--- a/docs/工場見える化構想.pptx
+++ b/docs/工場見える化構想.pptx
@@ -4,9 +4,13 @@
   <p:sldMasterIdLst>
     <p:sldMasterId id="2147483648" r:id="rId1"/>
   </p:sldMasterIdLst>
+  <p:notesMasterIdLst>
+    <p:notesMasterId r:id="rId5"/>
+  </p:notesMasterIdLst>
   <p:sldIdLst>
     <p:sldId id="256" r:id="rId2"/>
     <p:sldId id="257" r:id="rId3"/>
+    <p:sldId id="258" r:id="rId4"/>
   </p:sldIdLst>
   <p:sldSz cx="12192000" cy="6858000"/>
   <p:notesSz cx="6858000" cy="9144000"/>
@@ -113,6 +117,574 @@
 </p:presentation>
 </file>
 
+<file path=ppt/notesMasters/notesMaster1.xml><?xml version="1.0" encoding="utf-8"?>
+<p:notesMaster xmlns:a="http://schemas.openxmlformats.org/drawingml/2006/main" xmlns:r="http://schemas.openxmlformats.org/officeDocument/2006/relationships" xmlns:p="http://schemas.openxmlformats.org/presentationml/2006/main">
+  <p:cSld>
+    <p:bg>
+      <p:bgRef idx="1001">
+        <a:schemeClr val="bg1"/>
+      </p:bgRef>
+    </p:bg>
+    <p:spTree>
+      <p:nvGrpSpPr>
+        <p:cNvPr id="1" name=""/>
+        <p:cNvGrpSpPr/>
+        <p:nvPr/>
+      </p:nvGrpSpPr>
+      <p:grpSpPr>
+        <a:xfrm>
+          <a:off x="0" y="0"/>
+          <a:ext cx="0" cy="0"/>
+          <a:chOff x="0" y="0"/>
+          <a:chExt cx="0" cy="0"/>
+        </a:xfrm>
+      </p:grpSpPr>
+      <p:sp>
+        <p:nvSpPr>
+          <p:cNvPr id="2" name="ヘッダー プレースホルダー 1"/>
+          <p:cNvSpPr>
+            <a:spLocks noGrp="1"/>
+          </p:cNvSpPr>
+          <p:nvPr>
+            <p:ph type="hdr" sz="quarter"/>
+          </p:nvPr>
+        </p:nvSpPr>
+        <p:spPr>
+          <a:xfrm>
+            <a:off x="0" y="0"/>
+            <a:ext cx="2971800" cy="458788"/>
+          </a:xfrm>
+          <a:prstGeom prst="rect">
+            <a:avLst/>
+          </a:prstGeom>
+        </p:spPr>
+        <p:txBody>
+          <a:bodyPr vert="horz" lIns="91440" tIns="45720" rIns="91440" bIns="45720" rtlCol="0"/>
+          <a:lstStyle>
+            <a:lvl1pPr algn="l">
+              <a:defRPr sz="1200"/>
+            </a:lvl1pPr>
+          </a:lstStyle>
+          <a:p>
+            <a:endParaRPr kumimoji="1" lang="ja-JP" altLang="en-US"/>
+          </a:p>
+        </p:txBody>
+      </p:sp>
+      <p:sp>
+        <p:nvSpPr>
+          <p:cNvPr id="3" name="日付プレースホルダー 2"/>
+          <p:cNvSpPr>
+            <a:spLocks noGrp="1"/>
+          </p:cNvSpPr>
+          <p:nvPr>
+            <p:ph type="dt" idx="1"/>
+          </p:nvPr>
+        </p:nvSpPr>
+        <p:spPr>
+          <a:xfrm>
+            <a:off x="3884613" y="0"/>
+            <a:ext cx="2971800" cy="458788"/>
+          </a:xfrm>
+          <a:prstGeom prst="rect">
+            <a:avLst/>
+          </a:prstGeom>
+        </p:spPr>
+        <p:txBody>
+          <a:bodyPr vert="horz" lIns="91440" tIns="45720" rIns="91440" bIns="45720" rtlCol="0"/>
+          <a:lstStyle>
+            <a:lvl1pPr algn="r">
+              <a:defRPr sz="1200"/>
+            </a:lvl1pPr>
+          </a:lstStyle>
+          <a:p>
+            <a:fld id="{6D8032D9-50E7-4552-AF78-A4AF4DDE4D9C}" type="datetimeFigureOut">
+              <a:rPr kumimoji="1" lang="ja-JP" altLang="en-US" smtClean="0"/>
+              <a:t>2026/9/6</a:t>
+            </a:fld>
+            <a:endParaRPr kumimoji="1" lang="ja-JP" altLang="en-US"/>
+          </a:p>
+        </p:txBody>
+      </p:sp>
+      <p:sp>
+        <p:nvSpPr>
+          <p:cNvPr id="4" name="スライド イメージ プレースホルダー 3"/>
+          <p:cNvSpPr>
+            <a:spLocks noGrp="1" noRot="1" noChangeAspect="1"/>
+          </p:cNvSpPr>
+          <p:nvPr>
+            <p:ph type="sldImg" idx="2"/>
+          </p:nvPr>
+        </p:nvSpPr>
+        <p:spPr>
+          <a:xfrm>
+            <a:off x="685800" y="1143000"/>
+            <a:ext cx="5486400" cy="3086100"/>
+          </a:xfrm>
+          <a:prstGeom prst="rect">
+            <a:avLst/>
+          </a:prstGeom>
+          <a:noFill/>
+          <a:ln w="12700">
+            <a:solidFill>
+              <a:prstClr val="black"/>
+            </a:solidFill>
+          </a:ln>
+        </p:spPr>
+        <p:txBody>
+          <a:bodyPr vert="horz" lIns="91440" tIns="45720" rIns="91440" bIns="45720" rtlCol="0" anchor="ctr"/>
+          <a:lstStyle/>
+          <a:p>
+            <a:endParaRPr lang="ja-JP" altLang="en-US"/>
+          </a:p>
+        </p:txBody>
+      </p:sp>
+      <p:sp>
+        <p:nvSpPr>
+          <p:cNvPr id="5" name="ノート プレースホルダー 4"/>
+          <p:cNvSpPr>
+            <a:spLocks noGrp="1"/>
+          </p:cNvSpPr>
+          <p:nvPr>
+            <p:ph type="body" sz="quarter" idx="3"/>
+          </p:nvPr>
+        </p:nvSpPr>
+        <p:spPr>
+          <a:xfrm>
+            <a:off x="685800" y="4400550"/>
+            <a:ext cx="5486400" cy="3600450"/>
+          </a:xfrm>
+          <a:prstGeom prst="rect">
+            <a:avLst/>
+          </a:prstGeom>
+        </p:spPr>
+        <p:txBody>
+          <a:bodyPr vert="horz" lIns="91440" tIns="45720" rIns="91440" bIns="45720" rtlCol="0"/>
+          <a:lstStyle/>
+          <a:p>
+            <a:pPr lvl="0"/>
+            <a:r>
+              <a:rPr kumimoji="1" lang="ja-JP" altLang="en-US"/>
+              <a:t>マスター テキストの書式設定</a:t>
+            </a:r>
+          </a:p>
+          <a:p>
+            <a:pPr lvl="1"/>
+            <a:r>
+              <a:rPr kumimoji="1" lang="ja-JP" altLang="en-US"/>
+              <a:t>第 </a:t>
+            </a:r>
+            <a:r>
+              <a:rPr kumimoji="1" lang="en-US" altLang="ja-JP"/>
+              <a:t>2 </a:t>
+            </a:r>
+            <a:r>
+              <a:rPr kumimoji="1" lang="ja-JP" altLang="en-US"/>
+              <a:t>レベル</a:t>
+            </a:r>
+          </a:p>
+          <a:p>
+            <a:pPr lvl="2"/>
+            <a:r>
+              <a:rPr kumimoji="1" lang="ja-JP" altLang="en-US"/>
+              <a:t>第 </a:t>
+            </a:r>
+            <a:r>
+              <a:rPr kumimoji="1" lang="en-US" altLang="ja-JP"/>
+              <a:t>3 </a:t>
+            </a:r>
+            <a:r>
+              <a:rPr kumimoji="1" lang="ja-JP" altLang="en-US"/>
+              <a:t>レベル</a:t>
+            </a:r>
+          </a:p>
+          <a:p>
+            <a:pPr lvl="3"/>
+            <a:r>
+              <a:rPr kumimoji="1" lang="ja-JP" altLang="en-US"/>
+              <a:t>第 </a:t>
+            </a:r>
+            <a:r>
+              <a:rPr kumimoji="1" lang="en-US" altLang="ja-JP"/>
+              <a:t>4 </a:t>
+            </a:r>
+            <a:r>
+              <a:rPr kumimoji="1" lang="ja-JP" altLang="en-US"/>
+              <a:t>レベル</a:t>
+            </a:r>
+          </a:p>
+          <a:p>
+            <a:pPr lvl="4"/>
+            <a:r>
+              <a:rPr kumimoji="1" lang="ja-JP" altLang="en-US"/>
+              <a:t>第 </a:t>
+            </a:r>
+            <a:r>
+              <a:rPr kumimoji="1" lang="en-US" altLang="ja-JP"/>
+              <a:t>5 </a:t>
+            </a:r>
+            <a:r>
+              <a:rPr kumimoji="1" lang="ja-JP" altLang="en-US"/>
+              <a:t>レベル</a:t>
+            </a:r>
+          </a:p>
+        </p:txBody>
+      </p:sp>
+      <p:sp>
+        <p:nvSpPr>
+          <p:cNvPr id="6" name="フッター プレースホルダー 5"/>
+          <p:cNvSpPr>
+            <a:spLocks noGrp="1"/>
+          </p:cNvSpPr>
+          <p:nvPr>
+            <p:ph type="ftr" sz="quarter" idx="4"/>
+          </p:nvPr>
+        </p:nvSpPr>
+        <p:spPr>
+          <a:xfrm>
+            <a:off x="0" y="8685213"/>
+            <a:ext cx="2971800" cy="458787"/>
+          </a:xfrm>
+          <a:prstGeom prst="rect">
+            <a:avLst/>
+          </a:prstGeom>
+        </p:spPr>
+        <p:txBody>
+          <a:bodyPr vert="horz" lIns="91440" tIns="45720" rIns="91440" bIns="45720" rtlCol="0" anchor="b"/>
+          <a:lstStyle>
+            <a:lvl1pPr algn="l">
+              <a:defRPr sz="1200"/>
+            </a:lvl1pPr>
+          </a:lstStyle>
+          <a:p>
+            <a:endParaRPr kumimoji="1" lang="ja-JP" altLang="en-US"/>
+          </a:p>
+        </p:txBody>
+      </p:sp>
+      <p:sp>
+        <p:nvSpPr>
+          <p:cNvPr id="7" name="スライド番号プレースホルダー 6"/>
+          <p:cNvSpPr>
+            <a:spLocks noGrp="1"/>
+          </p:cNvSpPr>
+          <p:nvPr>
+            <p:ph type="sldNum" sz="quarter" idx="5"/>
+          </p:nvPr>
+        </p:nvSpPr>
+        <p:spPr>
+          <a:xfrm>
+            <a:off x="3884613" y="8685213"/>
+            <a:ext cx="2971800" cy="458787"/>
+          </a:xfrm>
+          <a:prstGeom prst="rect">
+            <a:avLst/>
+          </a:prstGeom>
+        </p:spPr>
+        <p:txBody>
+          <a:bodyPr vert="horz" lIns="91440" tIns="45720" rIns="91440" bIns="45720" rtlCol="0" anchor="b"/>
+          <a:lstStyle>
+            <a:lvl1pPr algn="r">
+              <a:defRPr sz="1200"/>
+            </a:lvl1pPr>
+          </a:lstStyle>
+          <a:p>
+            <a:fld id="{65252D0F-376C-4D15-BC42-A6A8877BE89C}" type="slidenum">
+              <a:rPr kumimoji="1" lang="ja-JP" altLang="en-US" smtClean="0"/>
+              <a:t>‹#›</a:t>
+            </a:fld>
+            <a:endParaRPr kumimoji="1" lang="ja-JP" altLang="en-US"/>
+          </a:p>
+        </p:txBody>
+      </p:sp>
+    </p:spTree>
+    <p:extLst>
+      <p:ext uri="{BB962C8B-B14F-4D97-AF65-F5344CB8AC3E}">
+        <p14:creationId xmlns:p14="http://schemas.microsoft.com/office/powerpoint/2010/main" val="4075657373"/>
+      </p:ext>
+    </p:extLst>
+  </p:cSld>
+  <p:clrMap bg1="lt1" tx1="dk1" bg2="lt2" tx2="dk2" accent1="accent1" accent2="accent2" accent3="accent3" accent4="accent4" accent5="accent5" accent6="accent6" hlink="hlink" folHlink="folHlink"/>
+  <p:notesStyle>
+    <a:lvl1pPr marL="0" algn="l" defTabSz="914400" rtl="0" eaLnBrk="1" latinLnBrk="0" hangingPunct="1">
+      <a:defRPr kumimoji="1" sz="1200" kern="1200">
+        <a:solidFill>
+          <a:schemeClr val="tx1"/>
+        </a:solidFill>
+        <a:latin typeface="+mn-lt"/>
+        <a:ea typeface="+mn-ea"/>
+        <a:cs typeface="+mn-cs"/>
+      </a:defRPr>
+    </a:lvl1pPr>
+    <a:lvl2pPr marL="457200" algn="l" defTabSz="914400" rtl="0" eaLnBrk="1" latinLnBrk="0" hangingPunct="1">
+      <a:defRPr kumimoji="1" sz="1200" kern="1200">
+        <a:solidFill>
+          <a:schemeClr val="tx1"/>
+        </a:solidFill>
+        <a:latin typeface="+mn-lt"/>
+        <a:ea typeface="+mn-ea"/>
+        <a:cs typeface="+mn-cs"/>
+      </a:defRPr>
+    </a:lvl2pPr>
+    <a:lvl3pPr marL="914400" algn="l" defTabSz="914400" rtl="0" eaLnBrk="1" latinLnBrk="0" hangingPunct="1">
+      <a:defRPr kumimoji="1" sz="1200" kern="1200">
+        <a:solidFill>
+          <a:schemeClr val="tx1"/>
+        </a:solidFill>
+        <a:latin typeface="+mn-lt"/>
+        <a:ea typeface="+mn-ea"/>
+        <a:cs typeface="+mn-cs"/>
+      </a:defRPr>
+    </a:lvl3pPr>
+    <a:lvl4pPr marL="1371600" algn="l" defTabSz="914400" rtl="0" eaLnBrk="1" latinLnBrk="0" hangingPunct="1">
+      <a:defRPr kumimoji="1" sz="1200" kern="1200">
+        <a:solidFill>
+          <a:schemeClr val="tx1"/>
+        </a:solidFill>
+        <a:latin typeface="+mn-lt"/>
+        <a:ea typeface="+mn-ea"/>
+        <a:cs typeface="+mn-cs"/>
+      </a:defRPr>
+    </a:lvl4pPr>
+    <a:lvl5pPr marL="1828800" algn="l" defTabSz="914400" rtl="0" eaLnBrk="1" latinLnBrk="0" hangingPunct="1">
+      <a:defRPr kumimoji="1" sz="1200" kern="1200">
+        <a:solidFill>
+          <a:schemeClr val="tx1"/>
+        </a:solidFill>
+        <a:latin typeface="+mn-lt"/>
+        <a:ea typeface="+mn-ea"/>
+        <a:cs typeface="+mn-cs"/>
+      </a:defRPr>
+    </a:lvl5pPr>
+    <a:lvl6pPr marL="2286000" algn="l" defTabSz="914400" rtl="0" eaLnBrk="1" latinLnBrk="0" hangingPunct="1">
+      <a:defRPr kumimoji="1" sz="1200" kern="1200">
+        <a:solidFill>
+          <a:schemeClr val="tx1"/>
+        </a:solidFill>
+        <a:latin typeface="+mn-lt"/>
+        <a:ea typeface="+mn-ea"/>
+        <a:cs typeface="+mn-cs"/>
+      </a:defRPr>
+    </a:lvl6pPr>
+    <a:lvl7pPr marL="2743200" algn="l" defTabSz="914400" rtl="0" eaLnBrk="1" latinLnBrk="0" hangingPunct="1">
+      <a:defRPr kumimoji="1" sz="1200" kern="1200">
+        <a:solidFill>
+          <a:schemeClr val="tx1"/>
+        </a:solidFill>
+        <a:latin typeface="+mn-lt"/>
+        <a:ea typeface="+mn-ea"/>
+        <a:cs typeface="+mn-cs"/>
+      </a:defRPr>
+    </a:lvl7pPr>
+    <a:lvl8pPr marL="3200400" algn="l" defTabSz="914400" rtl="0" eaLnBrk="1" latinLnBrk="0" hangingPunct="1">
+      <a:defRPr kumimoji="1" sz="1200" kern="1200">
+        <a:solidFill>
+          <a:schemeClr val="tx1"/>
+        </a:solidFill>
+        <a:latin typeface="+mn-lt"/>
+        <a:ea typeface="+mn-ea"/>
+        <a:cs typeface="+mn-cs"/>
+      </a:defRPr>
+    </a:lvl8pPr>
+    <a:lvl9pPr marL="3657600" algn="l" defTabSz="914400" rtl="0" eaLnBrk="1" latinLnBrk="0" hangingPunct="1">
+      <a:defRPr kumimoji="1" sz="1200" kern="1200">
+        <a:solidFill>
+          <a:schemeClr val="tx1"/>
+        </a:solidFill>
+        <a:latin typeface="+mn-lt"/>
+        <a:ea typeface="+mn-ea"/>
+        <a:cs typeface="+mn-cs"/>
+      </a:defRPr>
+    </a:lvl9pPr>
+  </p:notesStyle>
+</p:notesMaster>
+</file>
+
+<file path=ppt/notesSlides/notesSlide1.xml><?xml version="1.0" encoding="utf-8"?>
+<p:notes xmlns:a="http://schemas.openxmlformats.org/drawingml/2006/main" xmlns:r="http://schemas.openxmlformats.org/officeDocument/2006/relationships" xmlns:p="http://schemas.openxmlformats.org/presentationml/2006/main">
+  <p:cSld>
+    <p:spTree>
+      <p:nvGrpSpPr>
+        <p:cNvPr id="1" name=""/>
+        <p:cNvGrpSpPr/>
+        <p:nvPr/>
+      </p:nvGrpSpPr>
+      <p:grpSpPr>
+        <a:xfrm>
+          <a:off x="0" y="0"/>
+          <a:ext cx="0" cy="0"/>
+          <a:chOff x="0" y="0"/>
+          <a:chExt cx="0" cy="0"/>
+        </a:xfrm>
+      </p:grpSpPr>
+      <p:sp>
+        <p:nvSpPr>
+          <p:cNvPr id="2" name="スライド イメージ プレースホルダー 1"/>
+          <p:cNvSpPr>
+            <a:spLocks noGrp="1" noRot="1" noChangeAspect="1"/>
+          </p:cNvSpPr>
+          <p:nvPr>
+            <p:ph type="sldImg"/>
+          </p:nvPr>
+        </p:nvSpPr>
+        <p:spPr/>
+      </p:sp>
+      <p:sp>
+        <p:nvSpPr>
+          <p:cNvPr id="3" name="ノート プレースホルダー 2"/>
+          <p:cNvSpPr>
+            <a:spLocks noGrp="1"/>
+          </p:cNvSpPr>
+          <p:nvPr>
+            <p:ph type="body" idx="1"/>
+          </p:nvPr>
+        </p:nvSpPr>
+        <p:spPr/>
+        <p:txBody>
+          <a:bodyPr/>
+          <a:lstStyle/>
+          <a:p>
+            <a:r>
+              <a:rPr kumimoji="1" lang="en-US" altLang="ja-JP" dirty="0"/>
+              <a:t>【</a:t>
+            </a:r>
+            <a:r>
+              <a:rPr kumimoji="1" lang="ja-JP" altLang="en-US" dirty="0"/>
+              <a:t>稼働時間</a:t>
+            </a:r>
+            <a:r>
+              <a:rPr kumimoji="1" lang="en-US" altLang="ja-JP" dirty="0"/>
+              <a:t>】</a:t>
+            </a:r>
+          </a:p>
+          <a:p>
+            <a:r>
+              <a:rPr kumimoji="1" lang="ja-JP" altLang="en-US" dirty="0"/>
+              <a:t>・昼勤は前営業日の夜勤と競う（月曜日昼勤は前の週の金曜夜勤が相手）</a:t>
+            </a:r>
+            <a:endParaRPr kumimoji="1" lang="en-US" altLang="ja-JP" dirty="0"/>
+          </a:p>
+          <a:p>
+            <a:r>
+              <a:rPr kumimoji="1" lang="ja-JP" altLang="en-US" dirty="0"/>
+              <a:t>・メンバー写真は下のドロップダウンメニューから手動で選択する</a:t>
+            </a:r>
+            <a:endParaRPr kumimoji="1" lang="en-US" altLang="ja-JP" dirty="0"/>
+          </a:p>
+          <a:p>
+            <a:endParaRPr kumimoji="1" lang="en-US" altLang="ja-JP" dirty="0"/>
+          </a:p>
+          <a:p>
+            <a:r>
+              <a:rPr kumimoji="1" lang="en-US" altLang="ja-JP" dirty="0"/>
+              <a:t>【</a:t>
+            </a:r>
+            <a:r>
+              <a:rPr kumimoji="1" lang="ja-JP" altLang="en-US" dirty="0"/>
+              <a:t>本日の稼働状況</a:t>
+            </a:r>
+            <a:r>
+              <a:rPr kumimoji="1" lang="en-US" altLang="ja-JP" dirty="0"/>
+              <a:t>】</a:t>
+            </a:r>
+          </a:p>
+          <a:p>
+            <a:r>
+              <a:rPr kumimoji="1" lang="ja-JP" altLang="en-US" dirty="0"/>
+              <a:t>・生産達成率に応じてグラフ色変更 </a:t>
+            </a:r>
+            <a:r>
+              <a:rPr kumimoji="1" lang="en-US" altLang="ja-JP" dirty="0"/>
+              <a:t>(25%</a:t>
+            </a:r>
+            <a:r>
+              <a:rPr kumimoji="1" lang="ja-JP" altLang="en-US" dirty="0"/>
+              <a:t>以下</a:t>
+            </a:r>
+            <a:r>
+              <a:rPr kumimoji="1" lang="en-US" altLang="ja-JP" dirty="0"/>
+              <a:t>=</a:t>
+            </a:r>
+            <a:r>
+              <a:rPr kumimoji="1" lang="ja-JP" altLang="en-US" dirty="0"/>
+              <a:t>ピンク、</a:t>
+            </a:r>
+            <a:r>
+              <a:rPr kumimoji="1" lang="en-US" altLang="ja-JP" dirty="0"/>
+              <a:t>50</a:t>
+            </a:r>
+            <a:r>
+              <a:rPr kumimoji="1" lang="ja-JP" altLang="en-US" dirty="0"/>
+              <a:t>％以下＝オレンジ、</a:t>
+            </a:r>
+            <a:r>
+              <a:rPr kumimoji="1" lang="en-US" altLang="ja-JP" dirty="0"/>
+              <a:t>75</a:t>
+            </a:r>
+            <a:r>
+              <a:rPr kumimoji="1" lang="ja-JP" altLang="en-US" dirty="0"/>
+              <a:t>％以下＝黄色、</a:t>
+            </a:r>
+            <a:r>
+              <a:rPr kumimoji="1" lang="en-US" altLang="ja-JP" dirty="0"/>
+              <a:t>100</a:t>
+            </a:r>
+            <a:r>
+              <a:rPr kumimoji="1" lang="ja-JP" altLang="en-US" dirty="0"/>
+              <a:t>％以下＝黄緑、</a:t>
+            </a:r>
+            <a:r>
+              <a:rPr kumimoji="1" lang="en-US" altLang="ja-JP" dirty="0"/>
+              <a:t>101</a:t>
+            </a:r>
+            <a:r>
+              <a:rPr kumimoji="1" lang="ja-JP" altLang="en-US" dirty="0"/>
+              <a:t>以上＝水色）</a:t>
+            </a:r>
+            <a:endParaRPr kumimoji="1" lang="en-US" altLang="ja-JP" dirty="0"/>
+          </a:p>
+          <a:p>
+            <a:r>
+              <a:rPr kumimoji="1" lang="ja-JP" altLang="en-US" dirty="0"/>
+              <a:t>・当日の目標生産数は手入力</a:t>
+            </a:r>
+          </a:p>
+        </p:txBody>
+      </p:sp>
+      <p:sp>
+        <p:nvSpPr>
+          <p:cNvPr id="4" name="スライド番号プレースホルダー 3"/>
+          <p:cNvSpPr>
+            <a:spLocks noGrp="1"/>
+          </p:cNvSpPr>
+          <p:nvPr>
+            <p:ph type="sldNum" sz="quarter" idx="5"/>
+          </p:nvPr>
+        </p:nvSpPr>
+        <p:spPr/>
+        <p:txBody>
+          <a:bodyPr/>
+          <a:lstStyle/>
+          <a:p>
+            <a:fld id="{91A22420-C0FF-4625-9830-0338D4E38C42}" type="slidenum">
+              <a:rPr kumimoji="1" lang="ja-JP" altLang="en-US" smtClean="0"/>
+              <a:t>3</a:t>
+            </a:fld>
+            <a:endParaRPr kumimoji="1" lang="ja-JP" altLang="en-US"/>
+          </a:p>
+        </p:txBody>
+      </p:sp>
+    </p:spTree>
+    <p:extLst>
+      <p:ext uri="{BB962C8B-B14F-4D97-AF65-F5344CB8AC3E}">
+        <p14:creationId xmlns:p14="http://schemas.microsoft.com/office/powerpoint/2010/main" val="579125139"/>
+      </p:ext>
+    </p:extLst>
+  </p:cSld>
+  <p:clrMapOvr>
+    <a:masterClrMapping/>
+  </p:clrMapOvr>
+</p:notes>
+</file>
+
 <file path=ppt/slideLayouts/slideLayout1.xml><?xml version="1.0" encoding="utf-8"?>
 <p:sldLayout xmlns:a="http://schemas.openxmlformats.org/drawingml/2006/main" xmlns:r="http://schemas.openxmlformats.org/officeDocument/2006/relationships" xmlns:p="http://schemas.openxmlformats.org/presentationml/2006/main" type="title" preserve="1">
   <p:cSld name="タイトル スライド">
@@ -260,7 +832,7 @@
           <a:p>
             <a:fld id="{94165FF4-FB7B-4546-AEDF-E8D6362B3E6C}" type="datetimeFigureOut">
               <a:rPr kumimoji="1" lang="ja-JP" altLang="en-US" smtClean="0"/>
-              <a:t>2026/8/30</a:t>
+              <a:t>2026/9/6</a:t>
             </a:fld>
             <a:endParaRPr kumimoji="1" lang="ja-JP" altLang="en-US"/>
           </a:p>
@@ -490,7 +1062,7 @@
           <a:p>
             <a:fld id="{94165FF4-FB7B-4546-AEDF-E8D6362B3E6C}" type="datetimeFigureOut">
               <a:rPr kumimoji="1" lang="ja-JP" altLang="en-US" smtClean="0"/>
-              <a:t>2026/8/30</a:t>
+              <a:t>2026/9/6</a:t>
             </a:fld>
             <a:endParaRPr kumimoji="1" lang="ja-JP" altLang="en-US"/>
           </a:p>
@@ -730,7 +1302,7 @@
           <a:p>
             <a:fld id="{94165FF4-FB7B-4546-AEDF-E8D6362B3E6C}" type="datetimeFigureOut">
               <a:rPr kumimoji="1" lang="ja-JP" altLang="en-US" smtClean="0"/>
-              <a:t>2026/8/30</a:t>
+              <a:t>2026/9/6</a:t>
             </a:fld>
             <a:endParaRPr kumimoji="1" lang="ja-JP" altLang="en-US"/>
           </a:p>
@@ -960,7 +1532,7 @@
           <a:p>
             <a:fld id="{94165FF4-FB7B-4546-AEDF-E8D6362B3E6C}" type="datetimeFigureOut">
               <a:rPr kumimoji="1" lang="ja-JP" altLang="en-US" smtClean="0"/>
-              <a:t>2026/8/30</a:t>
+              <a:t>2026/9/6</a:t>
             </a:fld>
             <a:endParaRPr kumimoji="1" lang="ja-JP" altLang="en-US"/>
           </a:p>
@@ -1235,7 +1807,7 @@
           <a:p>
             <a:fld id="{94165FF4-FB7B-4546-AEDF-E8D6362B3E6C}" type="datetimeFigureOut">
               <a:rPr kumimoji="1" lang="ja-JP" altLang="en-US" smtClean="0"/>
-              <a:t>2026/8/30</a:t>
+              <a:t>2026/9/6</a:t>
             </a:fld>
             <a:endParaRPr kumimoji="1" lang="ja-JP" altLang="en-US"/>
           </a:p>
@@ -1564,7 +2136,7 @@
           <a:p>
             <a:fld id="{94165FF4-FB7B-4546-AEDF-E8D6362B3E6C}" type="datetimeFigureOut">
               <a:rPr kumimoji="1" lang="ja-JP" altLang="en-US" smtClean="0"/>
-              <a:t>2026/8/30</a:t>
+              <a:t>2026/9/6</a:t>
             </a:fld>
             <a:endParaRPr kumimoji="1" lang="ja-JP" altLang="en-US"/>
           </a:p>
@@ -2040,7 +2612,7 @@
           <a:p>
             <a:fld id="{94165FF4-FB7B-4546-AEDF-E8D6362B3E6C}" type="datetimeFigureOut">
               <a:rPr kumimoji="1" lang="ja-JP" altLang="en-US" smtClean="0"/>
-              <a:t>2026/8/30</a:t>
+              <a:t>2026/9/6</a:t>
             </a:fld>
             <a:endParaRPr kumimoji="1" lang="ja-JP" altLang="en-US"/>
           </a:p>
@@ -2181,7 +2753,7 @@
           <a:p>
             <a:fld id="{94165FF4-FB7B-4546-AEDF-E8D6362B3E6C}" type="datetimeFigureOut">
               <a:rPr kumimoji="1" lang="ja-JP" altLang="en-US" smtClean="0"/>
-              <a:t>2026/8/30</a:t>
+              <a:t>2026/9/6</a:t>
             </a:fld>
             <a:endParaRPr kumimoji="1" lang="ja-JP" altLang="en-US"/>
           </a:p>
@@ -2294,7 +2866,7 @@
           <a:p>
             <a:fld id="{94165FF4-FB7B-4546-AEDF-E8D6362B3E6C}" type="datetimeFigureOut">
               <a:rPr kumimoji="1" lang="ja-JP" altLang="en-US" smtClean="0"/>
-              <a:t>2026/8/30</a:t>
+              <a:t>2026/9/6</a:t>
             </a:fld>
             <a:endParaRPr kumimoji="1" lang="ja-JP" altLang="en-US"/>
           </a:p>
@@ -2637,7 +3209,7 @@
           <a:p>
             <a:fld id="{94165FF4-FB7B-4546-AEDF-E8D6362B3E6C}" type="datetimeFigureOut">
               <a:rPr kumimoji="1" lang="ja-JP" altLang="en-US" smtClean="0"/>
-              <a:t>2026/8/30</a:t>
+              <a:t>2026/9/6</a:t>
             </a:fld>
             <a:endParaRPr kumimoji="1" lang="ja-JP" altLang="en-US"/>
           </a:p>
@@ -2925,7 +3497,7 @@
           <a:p>
             <a:fld id="{94165FF4-FB7B-4546-AEDF-E8D6362B3E6C}" type="datetimeFigureOut">
               <a:rPr kumimoji="1" lang="ja-JP" altLang="en-US" smtClean="0"/>
-              <a:t>2026/8/30</a:t>
+              <a:t>2026/9/6</a:t>
             </a:fld>
             <a:endParaRPr kumimoji="1" lang="ja-JP" altLang="en-US"/>
           </a:p>
@@ -3198,7 +3770,7 @@
           <a:p>
             <a:fld id="{94165FF4-FB7B-4546-AEDF-E8D6362B3E6C}" type="datetimeFigureOut">
               <a:rPr kumimoji="1" lang="ja-JP" altLang="en-US" smtClean="0"/>
-              <a:t>2026/8/30</a:t>
+              <a:t>2026/9/6</a:t>
             </a:fld>
             <a:endParaRPr kumimoji="1" lang="ja-JP" altLang="en-US"/>
           </a:p>
@@ -9560,6 +10132,5408 @@
 </p:sld>
 </file>
 
+<file path=ppt/slides/slide3.xml><?xml version="1.0" encoding="utf-8"?>
+<p:sld xmlns:a="http://schemas.openxmlformats.org/drawingml/2006/main" xmlns:r="http://schemas.openxmlformats.org/officeDocument/2006/relationships" xmlns:p="http://schemas.openxmlformats.org/presentationml/2006/main">
+  <p:cSld>
+    <p:spTree>
+      <p:nvGrpSpPr>
+        <p:cNvPr id="1" name=""/>
+        <p:cNvGrpSpPr/>
+        <p:nvPr/>
+      </p:nvGrpSpPr>
+      <p:grpSpPr>
+        <a:xfrm>
+          <a:off x="0" y="0"/>
+          <a:ext cx="0" cy="0"/>
+          <a:chOff x="0" y="0"/>
+          <a:chExt cx="0" cy="0"/>
+        </a:xfrm>
+      </p:grpSpPr>
+      <p:sp>
+        <p:nvSpPr>
+          <p:cNvPr id="33" name="正方形/長方形 32">
+            <a:extLst>
+              <a:ext uri="{FF2B5EF4-FFF2-40B4-BE49-F238E27FC236}">
+                <a16:creationId xmlns:a16="http://schemas.microsoft.com/office/drawing/2014/main" id="{B83C9937-B66E-B901-2DC0-D52FF6C74FB0}"/>
+              </a:ext>
+            </a:extLst>
+          </p:cNvPr>
+          <p:cNvSpPr/>
+          <p:nvPr/>
+        </p:nvSpPr>
+        <p:spPr>
+          <a:xfrm>
+            <a:off x="193517" y="4097176"/>
+            <a:ext cx="11956134" cy="2703675"/>
+          </a:xfrm>
+          <a:prstGeom prst="rect">
+            <a:avLst/>
+          </a:prstGeom>
+          <a:gradFill flip="none" rotWithShape="1">
+            <a:gsLst>
+              <a:gs pos="0">
+                <a:schemeClr val="bg1">
+                  <a:lumMod val="65000"/>
+                  <a:shade val="30000"/>
+                  <a:satMod val="115000"/>
+                </a:schemeClr>
+              </a:gs>
+              <a:gs pos="50000">
+                <a:schemeClr val="bg1">
+                  <a:lumMod val="65000"/>
+                  <a:shade val="67500"/>
+                  <a:satMod val="115000"/>
+                </a:schemeClr>
+              </a:gs>
+              <a:gs pos="100000">
+                <a:schemeClr val="bg1">
+                  <a:lumMod val="65000"/>
+                  <a:shade val="100000"/>
+                  <a:satMod val="115000"/>
+                </a:schemeClr>
+              </a:gs>
+            </a:gsLst>
+            <a:lin ang="16200000" scaled="1"/>
+            <a:tileRect/>
+          </a:gradFill>
+          <a:ln w="38100">
+            <a:noFill/>
+          </a:ln>
+        </p:spPr>
+        <p:style>
+          <a:lnRef idx="2">
+            <a:schemeClr val="accent1">
+              <a:shade val="15000"/>
+            </a:schemeClr>
+          </a:lnRef>
+          <a:fillRef idx="1">
+            <a:schemeClr val="accent1"/>
+          </a:fillRef>
+          <a:effectRef idx="0">
+            <a:schemeClr val="accent1"/>
+          </a:effectRef>
+          <a:fontRef idx="minor">
+            <a:schemeClr val="lt1"/>
+          </a:fontRef>
+        </p:style>
+        <p:txBody>
+          <a:bodyPr rtlCol="0" anchor="ctr"/>
+          <a:lstStyle/>
+          <a:p>
+            <a:pPr algn="ctr"/>
+            <a:endParaRPr kumimoji="1" lang="ja-JP" altLang="en-US">
+              <a:latin typeface="UD デジタル 教科書体 NP-B" panose="02020700000000000000" pitchFamily="18" charset="-128"/>
+              <a:ea typeface="UD デジタル 教科書体 NP-B" panose="02020700000000000000" pitchFamily="18" charset="-128"/>
+            </a:endParaRPr>
+          </a:p>
+        </p:txBody>
+      </p:sp>
+      <p:sp>
+        <p:nvSpPr>
+          <p:cNvPr id="32" name="正方形/長方形 31">
+            <a:extLst>
+              <a:ext uri="{FF2B5EF4-FFF2-40B4-BE49-F238E27FC236}">
+                <a16:creationId xmlns:a16="http://schemas.microsoft.com/office/drawing/2014/main" id="{9F8EAF22-1623-F358-2CAA-86E4C59E26B1}"/>
+              </a:ext>
+            </a:extLst>
+          </p:cNvPr>
+          <p:cNvSpPr/>
+          <p:nvPr/>
+        </p:nvSpPr>
+        <p:spPr>
+          <a:xfrm>
+            <a:off x="175775" y="630261"/>
+            <a:ext cx="11973876" cy="2798154"/>
+          </a:xfrm>
+          <a:prstGeom prst="rect">
+            <a:avLst/>
+          </a:prstGeom>
+          <a:gradFill flip="none" rotWithShape="1">
+            <a:gsLst>
+              <a:gs pos="0">
+                <a:schemeClr val="bg1">
+                  <a:lumMod val="65000"/>
+                  <a:shade val="30000"/>
+                  <a:satMod val="115000"/>
+                </a:schemeClr>
+              </a:gs>
+              <a:gs pos="50000">
+                <a:schemeClr val="bg1">
+                  <a:lumMod val="65000"/>
+                  <a:shade val="67500"/>
+                  <a:satMod val="115000"/>
+                </a:schemeClr>
+              </a:gs>
+              <a:gs pos="100000">
+                <a:schemeClr val="bg1">
+                  <a:lumMod val="65000"/>
+                  <a:shade val="100000"/>
+                  <a:satMod val="115000"/>
+                </a:schemeClr>
+              </a:gs>
+            </a:gsLst>
+            <a:lin ang="16200000" scaled="1"/>
+            <a:tileRect/>
+          </a:gradFill>
+          <a:ln w="38100">
+            <a:noFill/>
+          </a:ln>
+        </p:spPr>
+        <p:style>
+          <a:lnRef idx="2">
+            <a:schemeClr val="accent1">
+              <a:shade val="15000"/>
+            </a:schemeClr>
+          </a:lnRef>
+          <a:fillRef idx="1">
+            <a:schemeClr val="accent1"/>
+          </a:fillRef>
+          <a:effectRef idx="0">
+            <a:schemeClr val="accent1"/>
+          </a:effectRef>
+          <a:fontRef idx="minor">
+            <a:schemeClr val="lt1"/>
+          </a:fontRef>
+        </p:style>
+        <p:txBody>
+          <a:bodyPr rtlCol="0" anchor="ctr"/>
+          <a:lstStyle/>
+          <a:p>
+            <a:pPr algn="ctr"/>
+            <a:endParaRPr kumimoji="1" lang="ja-JP" altLang="en-US">
+              <a:latin typeface="UD デジタル 教科書体 NP-B" panose="02020700000000000000" pitchFamily="18" charset="-128"/>
+              <a:ea typeface="UD デジタル 教科書体 NP-B" panose="02020700000000000000" pitchFamily="18" charset="-128"/>
+            </a:endParaRPr>
+          </a:p>
+        </p:txBody>
+      </p:sp>
+      <p:sp>
+        <p:nvSpPr>
+          <p:cNvPr id="17" name="正方形/長方形 16">
+            <a:extLst>
+              <a:ext uri="{FF2B5EF4-FFF2-40B4-BE49-F238E27FC236}">
+                <a16:creationId xmlns:a16="http://schemas.microsoft.com/office/drawing/2014/main" id="{136A4AA7-613D-5CE4-D5E7-8E99D54796FA}"/>
+              </a:ext>
+            </a:extLst>
+          </p:cNvPr>
+          <p:cNvSpPr/>
+          <p:nvPr/>
+        </p:nvSpPr>
+        <p:spPr>
+          <a:xfrm>
+            <a:off x="107641" y="3983110"/>
+            <a:ext cx="11957890" cy="2695648"/>
+          </a:xfrm>
+          <a:prstGeom prst="rect">
+            <a:avLst/>
+          </a:prstGeom>
+          <a:solidFill>
+            <a:schemeClr val="bg1"/>
+          </a:solidFill>
+          <a:ln w="38100">
+            <a:solidFill>
+              <a:schemeClr val="bg1">
+                <a:lumMod val="65000"/>
+              </a:schemeClr>
+            </a:solidFill>
+          </a:ln>
+        </p:spPr>
+        <p:style>
+          <a:lnRef idx="2">
+            <a:schemeClr val="accent1">
+              <a:shade val="15000"/>
+            </a:schemeClr>
+          </a:lnRef>
+          <a:fillRef idx="1">
+            <a:schemeClr val="accent1"/>
+          </a:fillRef>
+          <a:effectRef idx="0">
+            <a:schemeClr val="accent1"/>
+          </a:effectRef>
+          <a:fontRef idx="minor">
+            <a:schemeClr val="lt1"/>
+          </a:fontRef>
+        </p:style>
+        <p:txBody>
+          <a:bodyPr rtlCol="0" anchor="ctr"/>
+          <a:lstStyle/>
+          <a:p>
+            <a:pPr algn="ctr"/>
+            <a:endParaRPr kumimoji="1" lang="ja-JP" altLang="en-US">
+              <a:latin typeface="UD デジタル 教科書体 NP-B" panose="02020700000000000000" pitchFamily="18" charset="-128"/>
+              <a:ea typeface="UD デジタル 教科書体 NP-B" panose="02020700000000000000" pitchFamily="18" charset="-128"/>
+            </a:endParaRPr>
+          </a:p>
+        </p:txBody>
+      </p:sp>
+      <p:sp>
+        <p:nvSpPr>
+          <p:cNvPr id="21" name="正方形/長方形 20">
+            <a:extLst>
+              <a:ext uri="{FF2B5EF4-FFF2-40B4-BE49-F238E27FC236}">
+                <a16:creationId xmlns:a16="http://schemas.microsoft.com/office/drawing/2014/main" id="{1E3D1085-5286-18D9-5F56-1504E19B7E09}"/>
+              </a:ext>
+            </a:extLst>
+          </p:cNvPr>
+          <p:cNvSpPr/>
+          <p:nvPr/>
+        </p:nvSpPr>
+        <p:spPr>
+          <a:xfrm>
+            <a:off x="3742171" y="4503151"/>
+            <a:ext cx="4659234" cy="1071819"/>
+          </a:xfrm>
+          <a:prstGeom prst="rect">
+            <a:avLst/>
+          </a:prstGeom>
+          <a:solidFill>
+            <a:schemeClr val="accent1">
+              <a:lumMod val="60000"/>
+              <a:lumOff val="40000"/>
+            </a:schemeClr>
+          </a:solidFill>
+          <a:ln>
+            <a:noFill/>
+          </a:ln>
+        </p:spPr>
+        <p:style>
+          <a:lnRef idx="2">
+            <a:schemeClr val="accent1">
+              <a:shade val="15000"/>
+            </a:schemeClr>
+          </a:lnRef>
+          <a:fillRef idx="1">
+            <a:schemeClr val="accent1"/>
+          </a:fillRef>
+          <a:effectRef idx="0">
+            <a:schemeClr val="accent1"/>
+          </a:effectRef>
+          <a:fontRef idx="minor">
+            <a:schemeClr val="lt1"/>
+          </a:fontRef>
+        </p:style>
+        <p:txBody>
+          <a:bodyPr rtlCol="0" anchor="ctr"/>
+          <a:lstStyle/>
+          <a:p>
+            <a:pPr algn="ctr"/>
+            <a:endParaRPr kumimoji="1" lang="ja-JP" altLang="en-US" dirty="0">
+              <a:latin typeface="UD デジタル 教科書体 NP-B" panose="02020700000000000000" pitchFamily="18" charset="-128"/>
+              <a:ea typeface="UD デジタル 教科書体 NP-B" panose="02020700000000000000" pitchFamily="18" charset="-128"/>
+            </a:endParaRPr>
+          </a:p>
+        </p:txBody>
+      </p:sp>
+      <p:sp>
+        <p:nvSpPr>
+          <p:cNvPr id="6" name="テキスト ボックス 5">
+            <a:extLst>
+              <a:ext uri="{FF2B5EF4-FFF2-40B4-BE49-F238E27FC236}">
+                <a16:creationId xmlns:a16="http://schemas.microsoft.com/office/drawing/2014/main" id="{DA1F5462-76D7-182A-D998-0A7749C78703}"/>
+              </a:ext>
+            </a:extLst>
+          </p:cNvPr>
+          <p:cNvSpPr txBox="1"/>
+          <p:nvPr/>
+        </p:nvSpPr>
+        <p:spPr>
+          <a:xfrm>
+            <a:off x="103818" y="163661"/>
+            <a:ext cx="6462683" cy="400110"/>
+          </a:xfrm>
+          <a:prstGeom prst="rect">
+            <a:avLst/>
+          </a:prstGeom>
+          <a:noFill/>
+        </p:spPr>
+        <p:txBody>
+          <a:bodyPr wrap="square" rtlCol="0">
+            <a:spAutoFit/>
+          </a:bodyPr>
+          <a:lstStyle/>
+          <a:p>
+            <a:r>
+              <a:rPr lang="en-US" altLang="ja-JP" sz="2000" b="1" dirty="0">
+                <a:solidFill>
+                  <a:schemeClr val="tx1">
+                    <a:lumMod val="65000"/>
+                    <a:lumOff val="35000"/>
+                  </a:schemeClr>
+                </a:solidFill>
+                <a:latin typeface="UD デジタル 教科書体 NP-B" panose="02020700000000000000" pitchFamily="18" charset="-128"/>
+                <a:ea typeface="UD デジタル 教科書体 NP-B" panose="02020700000000000000" pitchFamily="18" charset="-128"/>
+              </a:rPr>
+              <a:t>OPERATING TIME </a:t>
+            </a:r>
+            <a:r>
+              <a:rPr lang="ja-JP" altLang="en-US" sz="1400" dirty="0">
+                <a:solidFill>
+                  <a:schemeClr val="tx1">
+                    <a:lumMod val="65000"/>
+                    <a:lumOff val="35000"/>
+                  </a:schemeClr>
+                </a:solidFill>
+                <a:latin typeface="UD デジタル 教科書体 NP-B" panose="02020700000000000000" pitchFamily="18" charset="-128"/>
+                <a:ea typeface="UD デジタル 教科書体 NP-B" panose="02020700000000000000" pitchFamily="18" charset="-128"/>
+              </a:rPr>
+              <a:t>稼働時間</a:t>
+            </a:r>
+            <a:endParaRPr kumimoji="1" lang="ja-JP" altLang="en-US" sz="1400" dirty="0">
+              <a:solidFill>
+                <a:schemeClr val="tx1">
+                  <a:lumMod val="65000"/>
+                  <a:lumOff val="35000"/>
+                </a:schemeClr>
+              </a:solidFill>
+              <a:latin typeface="UD デジタル 教科書体 NP-B" panose="02020700000000000000" pitchFamily="18" charset="-128"/>
+              <a:ea typeface="UD デジタル 教科書体 NP-B" panose="02020700000000000000" pitchFamily="18" charset="-128"/>
+            </a:endParaRPr>
+          </a:p>
+        </p:txBody>
+      </p:sp>
+      <p:sp>
+        <p:nvSpPr>
+          <p:cNvPr id="2" name="正方形/長方形 1">
+            <a:extLst>
+              <a:ext uri="{FF2B5EF4-FFF2-40B4-BE49-F238E27FC236}">
+                <a16:creationId xmlns:a16="http://schemas.microsoft.com/office/drawing/2014/main" id="{5888854E-0E3E-785E-6C9E-0C3BA9BECC4E}"/>
+              </a:ext>
+            </a:extLst>
+          </p:cNvPr>
+          <p:cNvSpPr/>
+          <p:nvPr/>
+        </p:nvSpPr>
+        <p:spPr>
+          <a:xfrm>
+            <a:off x="103818" y="504531"/>
+            <a:ext cx="11957890" cy="2798153"/>
+          </a:xfrm>
+          <a:prstGeom prst="rect">
+            <a:avLst/>
+          </a:prstGeom>
+          <a:solidFill>
+            <a:schemeClr val="bg1"/>
+          </a:solidFill>
+          <a:ln w="38100">
+            <a:solidFill>
+              <a:schemeClr val="bg1">
+                <a:lumMod val="65000"/>
+              </a:schemeClr>
+            </a:solidFill>
+          </a:ln>
+        </p:spPr>
+        <p:style>
+          <a:lnRef idx="2">
+            <a:schemeClr val="accent1">
+              <a:shade val="15000"/>
+            </a:schemeClr>
+          </a:lnRef>
+          <a:fillRef idx="1">
+            <a:schemeClr val="accent1"/>
+          </a:fillRef>
+          <a:effectRef idx="0">
+            <a:schemeClr val="accent1"/>
+          </a:effectRef>
+          <a:fontRef idx="minor">
+            <a:schemeClr val="lt1"/>
+          </a:fontRef>
+        </p:style>
+        <p:txBody>
+          <a:bodyPr rtlCol="0" anchor="ctr"/>
+          <a:lstStyle/>
+          <a:p>
+            <a:pPr algn="ctr"/>
+            <a:endParaRPr kumimoji="1" lang="ja-JP" altLang="en-US">
+              <a:latin typeface="UD デジタル 教科書体 NP-B" panose="02020700000000000000" pitchFamily="18" charset="-128"/>
+              <a:ea typeface="UD デジタル 教科書体 NP-B" panose="02020700000000000000" pitchFamily="18" charset="-128"/>
+            </a:endParaRPr>
+          </a:p>
+        </p:txBody>
+      </p:sp>
+      <p:sp>
+        <p:nvSpPr>
+          <p:cNvPr id="3" name="正方形/長方形 2">
+            <a:extLst>
+              <a:ext uri="{FF2B5EF4-FFF2-40B4-BE49-F238E27FC236}">
+                <a16:creationId xmlns:a16="http://schemas.microsoft.com/office/drawing/2014/main" id="{D95DE211-0137-2F11-D1B1-1A1AD4B0B1A9}"/>
+              </a:ext>
+            </a:extLst>
+          </p:cNvPr>
+          <p:cNvSpPr/>
+          <p:nvPr/>
+        </p:nvSpPr>
+        <p:spPr>
+          <a:xfrm>
+            <a:off x="2475438" y="865595"/>
+            <a:ext cx="3412682" cy="1037951"/>
+          </a:xfrm>
+          <a:prstGeom prst="rect">
+            <a:avLst/>
+          </a:prstGeom>
+          <a:solidFill>
+            <a:schemeClr val="accent4">
+              <a:lumMod val="75000"/>
+            </a:schemeClr>
+          </a:solidFill>
+        </p:spPr>
+        <p:style>
+          <a:lnRef idx="2">
+            <a:schemeClr val="accent1">
+              <a:shade val="15000"/>
+            </a:schemeClr>
+          </a:lnRef>
+          <a:fillRef idx="1">
+            <a:schemeClr val="accent1"/>
+          </a:fillRef>
+          <a:effectRef idx="0">
+            <a:schemeClr val="accent1"/>
+          </a:effectRef>
+          <a:fontRef idx="minor">
+            <a:schemeClr val="lt1"/>
+          </a:fontRef>
+        </p:style>
+        <p:txBody>
+          <a:bodyPr rtlCol="0" anchor="ctr"/>
+          <a:lstStyle/>
+          <a:p>
+            <a:pPr algn="ctr"/>
+            <a:endParaRPr kumimoji="1" lang="ja-JP" altLang="en-US" dirty="0">
+              <a:latin typeface="UD デジタル 教科書体 NP-B" panose="02020700000000000000" pitchFamily="18" charset="-128"/>
+              <a:ea typeface="UD デジタル 教科書体 NP-B" panose="02020700000000000000" pitchFamily="18" charset="-128"/>
+            </a:endParaRPr>
+          </a:p>
+        </p:txBody>
+      </p:sp>
+      <p:sp>
+        <p:nvSpPr>
+          <p:cNvPr id="10" name="正方形/長方形 9">
+            <a:extLst>
+              <a:ext uri="{FF2B5EF4-FFF2-40B4-BE49-F238E27FC236}">
+                <a16:creationId xmlns:a16="http://schemas.microsoft.com/office/drawing/2014/main" id="{F46298EC-F017-CF51-6037-5F9F9D5BC59D}"/>
+              </a:ext>
+            </a:extLst>
+          </p:cNvPr>
+          <p:cNvSpPr/>
+          <p:nvPr/>
+        </p:nvSpPr>
+        <p:spPr>
+          <a:xfrm>
+            <a:off x="5815339" y="865595"/>
+            <a:ext cx="3857787" cy="1037951"/>
+          </a:xfrm>
+          <a:prstGeom prst="rect">
+            <a:avLst/>
+          </a:prstGeom>
+          <a:solidFill>
+            <a:schemeClr val="accent5">
+              <a:lumMod val="50000"/>
+            </a:schemeClr>
+          </a:solidFill>
+        </p:spPr>
+        <p:style>
+          <a:lnRef idx="2">
+            <a:schemeClr val="accent1">
+              <a:shade val="15000"/>
+            </a:schemeClr>
+          </a:lnRef>
+          <a:fillRef idx="1">
+            <a:schemeClr val="accent1"/>
+          </a:fillRef>
+          <a:effectRef idx="0">
+            <a:schemeClr val="accent1"/>
+          </a:effectRef>
+          <a:fontRef idx="minor">
+            <a:schemeClr val="lt1"/>
+          </a:fontRef>
+        </p:style>
+        <p:txBody>
+          <a:bodyPr rtlCol="0" anchor="ctr"/>
+          <a:lstStyle/>
+          <a:p>
+            <a:pPr algn="ctr"/>
+            <a:endParaRPr kumimoji="1" lang="ja-JP" altLang="en-US" dirty="0">
+              <a:latin typeface="UD デジタル 教科書体 NP-B" panose="02020700000000000000" pitchFamily="18" charset="-128"/>
+              <a:ea typeface="UD デジタル 教科書体 NP-B" panose="02020700000000000000" pitchFamily="18" charset="-128"/>
+            </a:endParaRPr>
+          </a:p>
+        </p:txBody>
+      </p:sp>
+      <p:sp>
+        <p:nvSpPr>
+          <p:cNvPr id="11" name="テキスト ボックス 10">
+            <a:extLst>
+              <a:ext uri="{FF2B5EF4-FFF2-40B4-BE49-F238E27FC236}">
+                <a16:creationId xmlns:a16="http://schemas.microsoft.com/office/drawing/2014/main" id="{7ABDF172-C200-A69A-705D-83E2476078B6}"/>
+              </a:ext>
+            </a:extLst>
+          </p:cNvPr>
+          <p:cNvSpPr txBox="1"/>
+          <p:nvPr/>
+        </p:nvSpPr>
+        <p:spPr>
+          <a:xfrm>
+            <a:off x="2469136" y="1061404"/>
+            <a:ext cx="1624676" cy="646331"/>
+          </a:xfrm>
+          <a:prstGeom prst="rect">
+            <a:avLst/>
+          </a:prstGeom>
+          <a:noFill/>
+        </p:spPr>
+        <p:txBody>
+          <a:bodyPr wrap="square" rtlCol="0">
+            <a:spAutoFit/>
+          </a:bodyPr>
+          <a:lstStyle/>
+          <a:p>
+            <a:r>
+              <a:rPr lang="en-US" altLang="ja-JP" b="1" dirty="0">
+                <a:solidFill>
+                  <a:schemeClr val="bg1"/>
+                </a:solidFill>
+                <a:latin typeface="UD デジタル 教科書体 NP-B" panose="02020700000000000000" pitchFamily="18" charset="-128"/>
+                <a:ea typeface="UD デジタル 教科書体 NP-B" panose="02020700000000000000" pitchFamily="18" charset="-128"/>
+              </a:rPr>
+              <a:t>145</a:t>
+            </a:r>
+            <a:r>
+              <a:rPr kumimoji="1" lang="en-US" altLang="ja-JP" b="1" dirty="0">
+                <a:solidFill>
+                  <a:schemeClr val="bg1"/>
+                </a:solidFill>
+                <a:latin typeface="UD デジタル 教科書体 NP-B" panose="02020700000000000000" pitchFamily="18" charset="-128"/>
+                <a:ea typeface="UD デジタル 教科書体 NP-B" panose="02020700000000000000" pitchFamily="18" charset="-128"/>
+              </a:rPr>
+              <a:t> min</a:t>
+            </a:r>
+          </a:p>
+          <a:p>
+            <a:r>
+              <a:rPr lang="en-US" altLang="ja-JP" b="1" dirty="0">
+                <a:solidFill>
+                  <a:schemeClr val="bg1"/>
+                </a:solidFill>
+                <a:latin typeface="UD デジタル 教科書体 NP-B" panose="02020700000000000000" pitchFamily="18" charset="-128"/>
+                <a:ea typeface="UD デジタル 教科書体 NP-B" panose="02020700000000000000" pitchFamily="18" charset="-128"/>
+              </a:rPr>
+              <a:t>46 %</a:t>
+            </a:r>
+            <a:endParaRPr kumimoji="1" lang="ja-JP" altLang="en-US" b="1" dirty="0">
+              <a:solidFill>
+                <a:schemeClr val="bg1"/>
+              </a:solidFill>
+              <a:latin typeface="UD デジタル 教科書体 NP-B" panose="02020700000000000000" pitchFamily="18" charset="-128"/>
+              <a:ea typeface="UD デジタル 教科書体 NP-B" panose="02020700000000000000" pitchFamily="18" charset="-128"/>
+            </a:endParaRPr>
+          </a:p>
+        </p:txBody>
+      </p:sp>
+      <p:sp>
+        <p:nvSpPr>
+          <p:cNvPr id="12" name="テキスト ボックス 11">
+            <a:extLst>
+              <a:ext uri="{FF2B5EF4-FFF2-40B4-BE49-F238E27FC236}">
+                <a16:creationId xmlns:a16="http://schemas.microsoft.com/office/drawing/2014/main" id="{F6471D7B-17E3-5B65-F805-7D5FAF046058}"/>
+              </a:ext>
+            </a:extLst>
+          </p:cNvPr>
+          <p:cNvSpPr txBox="1"/>
+          <p:nvPr/>
+        </p:nvSpPr>
+        <p:spPr>
+          <a:xfrm>
+            <a:off x="646296" y="558595"/>
+            <a:ext cx="1480131" cy="338554"/>
+          </a:xfrm>
+          <a:prstGeom prst="rect">
+            <a:avLst/>
+          </a:prstGeom>
+          <a:noFill/>
+        </p:spPr>
+        <p:txBody>
+          <a:bodyPr wrap="square" rtlCol="0">
+            <a:spAutoFit/>
+          </a:bodyPr>
+          <a:lstStyle/>
+          <a:p>
+            <a:pPr algn="ctr"/>
+            <a:r>
+              <a:rPr lang="en-US" altLang="ja-JP" sz="1600" b="1" dirty="0">
+                <a:solidFill>
+                  <a:schemeClr val="bg2">
+                    <a:lumMod val="50000"/>
+                  </a:schemeClr>
+                </a:solidFill>
+                <a:latin typeface="UD デジタル 教科書体 NP-B" panose="02020700000000000000" pitchFamily="18" charset="-128"/>
+                <a:ea typeface="UD デジタル 教科書体 NP-B" panose="02020700000000000000" pitchFamily="18" charset="-128"/>
+              </a:rPr>
+              <a:t>DAY SHIFT</a:t>
+            </a:r>
+            <a:endParaRPr kumimoji="1" lang="ja-JP" altLang="en-US" sz="1600" b="1" dirty="0">
+              <a:solidFill>
+                <a:schemeClr val="bg2">
+                  <a:lumMod val="50000"/>
+                </a:schemeClr>
+              </a:solidFill>
+              <a:latin typeface="UD デジタル 教科書体 NP-B" panose="02020700000000000000" pitchFamily="18" charset="-128"/>
+              <a:ea typeface="UD デジタル 教科書体 NP-B" panose="02020700000000000000" pitchFamily="18" charset="-128"/>
+            </a:endParaRPr>
+          </a:p>
+        </p:txBody>
+      </p:sp>
+      <p:sp>
+        <p:nvSpPr>
+          <p:cNvPr id="13" name="テキスト ボックス 12">
+            <a:extLst>
+              <a:ext uri="{FF2B5EF4-FFF2-40B4-BE49-F238E27FC236}">
+                <a16:creationId xmlns:a16="http://schemas.microsoft.com/office/drawing/2014/main" id="{E5A768F3-80E7-5017-B57A-E676FA3BA045}"/>
+              </a:ext>
+            </a:extLst>
+          </p:cNvPr>
+          <p:cNvSpPr txBox="1"/>
+          <p:nvPr/>
+        </p:nvSpPr>
+        <p:spPr>
+          <a:xfrm>
+            <a:off x="8048450" y="1061404"/>
+            <a:ext cx="1624676" cy="646331"/>
+          </a:xfrm>
+          <a:prstGeom prst="rect">
+            <a:avLst/>
+          </a:prstGeom>
+          <a:noFill/>
+        </p:spPr>
+        <p:txBody>
+          <a:bodyPr wrap="square" rtlCol="0">
+            <a:spAutoFit/>
+          </a:bodyPr>
+          <a:lstStyle/>
+          <a:p>
+            <a:pPr algn="r"/>
+            <a:r>
+              <a:rPr lang="en-US" altLang="ja-JP" b="1" dirty="0">
+                <a:solidFill>
+                  <a:schemeClr val="bg1"/>
+                </a:solidFill>
+                <a:latin typeface="UD デジタル 教科書体 NP-B" panose="02020700000000000000" pitchFamily="18" charset="-128"/>
+                <a:ea typeface="UD デジタル 教科書体 NP-B" panose="02020700000000000000" pitchFamily="18" charset="-128"/>
+              </a:rPr>
+              <a:t>156</a:t>
+            </a:r>
+            <a:r>
+              <a:rPr kumimoji="1" lang="en-US" altLang="ja-JP" b="1" dirty="0">
+                <a:solidFill>
+                  <a:schemeClr val="bg1"/>
+                </a:solidFill>
+                <a:latin typeface="UD デジタル 教科書体 NP-B" panose="02020700000000000000" pitchFamily="18" charset="-128"/>
+                <a:ea typeface="UD デジタル 教科書体 NP-B" panose="02020700000000000000" pitchFamily="18" charset="-128"/>
+              </a:rPr>
+              <a:t> min</a:t>
+            </a:r>
+          </a:p>
+          <a:p>
+            <a:pPr algn="r"/>
+            <a:r>
+              <a:rPr lang="en-US" altLang="ja-JP" b="1" dirty="0">
+                <a:solidFill>
+                  <a:schemeClr val="bg1"/>
+                </a:solidFill>
+                <a:latin typeface="UD デジタル 教科書体 NP-B" panose="02020700000000000000" pitchFamily="18" charset="-128"/>
+                <a:ea typeface="UD デジタル 教科書体 NP-B" panose="02020700000000000000" pitchFamily="18" charset="-128"/>
+              </a:rPr>
+              <a:t>54 %</a:t>
+            </a:r>
+            <a:endParaRPr kumimoji="1" lang="ja-JP" altLang="en-US" b="1" dirty="0">
+              <a:solidFill>
+                <a:schemeClr val="bg1"/>
+              </a:solidFill>
+              <a:latin typeface="UD デジタル 教科書体 NP-B" panose="02020700000000000000" pitchFamily="18" charset="-128"/>
+              <a:ea typeface="UD デジタル 教科書体 NP-B" panose="02020700000000000000" pitchFamily="18" charset="-128"/>
+            </a:endParaRPr>
+          </a:p>
+        </p:txBody>
+      </p:sp>
+      <p:sp>
+        <p:nvSpPr>
+          <p:cNvPr id="14" name="テキスト ボックス 13">
+            <a:extLst>
+              <a:ext uri="{FF2B5EF4-FFF2-40B4-BE49-F238E27FC236}">
+                <a16:creationId xmlns:a16="http://schemas.microsoft.com/office/drawing/2014/main" id="{1045F0D5-8FDD-7BC7-B1EF-ADAFF019C852}"/>
+              </a:ext>
+            </a:extLst>
+          </p:cNvPr>
+          <p:cNvSpPr txBox="1"/>
+          <p:nvPr/>
+        </p:nvSpPr>
+        <p:spPr>
+          <a:xfrm>
+            <a:off x="10039067" y="556534"/>
+            <a:ext cx="1636096" cy="338554"/>
+          </a:xfrm>
+          <a:prstGeom prst="rect">
+            <a:avLst/>
+          </a:prstGeom>
+          <a:noFill/>
+        </p:spPr>
+        <p:txBody>
+          <a:bodyPr wrap="square" rtlCol="0">
+            <a:spAutoFit/>
+          </a:bodyPr>
+          <a:lstStyle/>
+          <a:p>
+            <a:pPr algn="ctr"/>
+            <a:r>
+              <a:rPr lang="en-US" altLang="ja-JP" sz="1600" b="1" dirty="0">
+                <a:solidFill>
+                  <a:schemeClr val="bg2">
+                    <a:lumMod val="50000"/>
+                  </a:schemeClr>
+                </a:solidFill>
+                <a:latin typeface="UD デジタル 教科書体 NP-B" panose="02020700000000000000" pitchFamily="18" charset="-128"/>
+                <a:ea typeface="UD デジタル 教科書体 NP-B" panose="02020700000000000000" pitchFamily="18" charset="-128"/>
+              </a:rPr>
+              <a:t>NIGHT SHIFT</a:t>
+            </a:r>
+            <a:endParaRPr kumimoji="1" lang="ja-JP" altLang="en-US" sz="1600" b="1" dirty="0">
+              <a:solidFill>
+                <a:schemeClr val="bg2">
+                  <a:lumMod val="50000"/>
+                </a:schemeClr>
+              </a:solidFill>
+              <a:latin typeface="UD デジタル 教科書体 NP-B" panose="02020700000000000000" pitchFamily="18" charset="-128"/>
+              <a:ea typeface="UD デジタル 教科書体 NP-B" panose="02020700000000000000" pitchFamily="18" charset="-128"/>
+            </a:endParaRPr>
+          </a:p>
+        </p:txBody>
+      </p:sp>
+      <p:graphicFrame>
+        <p:nvGraphicFramePr>
+          <p:cNvPr id="15" name="表 14">
+            <a:extLst>
+              <a:ext uri="{FF2B5EF4-FFF2-40B4-BE49-F238E27FC236}">
+                <a16:creationId xmlns:a16="http://schemas.microsoft.com/office/drawing/2014/main" id="{9CCB2A98-0A03-F8C6-B05D-9681F29C6AAE}"/>
+              </a:ext>
+            </a:extLst>
+          </p:cNvPr>
+          <p:cNvGraphicFramePr>
+            <a:graphicFrameLocks noGrp="1"/>
+          </p:cNvGraphicFramePr>
+          <p:nvPr>
+            <p:extLst>
+              <p:ext uri="{D42A27DB-BD31-4B8C-83A1-F6EECF244321}">
+                <p14:modId xmlns:p14="http://schemas.microsoft.com/office/powerpoint/2010/main" val="1828845096"/>
+              </p:ext>
+            </p:extLst>
+          </p:nvPr>
+        </p:nvGraphicFramePr>
+        <p:xfrm>
+          <a:off x="2464994" y="2205750"/>
+          <a:ext cx="7185562" cy="942360"/>
+        </p:xfrm>
+        <a:graphic>
+          <a:graphicData uri="http://schemas.openxmlformats.org/drawingml/2006/table">
+            <a:tbl>
+              <a:tblPr firstRow="1" bandRow="1">
+                <a:tableStyleId>{F2DE63D5-997A-4646-A377-4702673A728D}</a:tableStyleId>
+              </a:tblPr>
+              <a:tblGrid>
+                <a:gridCol w="898252">
+                  <a:extLst>
+                    <a:ext uri="{9D8B030D-6E8A-4147-A177-3AD203B41FA5}">
+                      <a16:colId xmlns:a16="http://schemas.microsoft.com/office/drawing/2014/main" val="3542659806"/>
+                    </a:ext>
+                  </a:extLst>
+                </a:gridCol>
+                <a:gridCol w="1047885">
+                  <a:extLst>
+                    <a:ext uri="{9D8B030D-6E8A-4147-A177-3AD203B41FA5}">
+                      <a16:colId xmlns:a16="http://schemas.microsoft.com/office/drawing/2014/main" val="1074413920"/>
+                    </a:ext>
+                  </a:extLst>
+                </a:gridCol>
+                <a:gridCol w="1047885">
+                  <a:extLst>
+                    <a:ext uri="{9D8B030D-6E8A-4147-A177-3AD203B41FA5}">
+                      <a16:colId xmlns:a16="http://schemas.microsoft.com/office/drawing/2014/main" val="188364501"/>
+                    </a:ext>
+                  </a:extLst>
+                </a:gridCol>
+                <a:gridCol w="1047885">
+                  <a:extLst>
+                    <a:ext uri="{9D8B030D-6E8A-4147-A177-3AD203B41FA5}">
+                      <a16:colId xmlns:a16="http://schemas.microsoft.com/office/drawing/2014/main" val="3123303698"/>
+                    </a:ext>
+                  </a:extLst>
+                </a:gridCol>
+                <a:gridCol w="1047885">
+                  <a:extLst>
+                    <a:ext uri="{9D8B030D-6E8A-4147-A177-3AD203B41FA5}">
+                      <a16:colId xmlns:a16="http://schemas.microsoft.com/office/drawing/2014/main" val="1716167615"/>
+                    </a:ext>
+                  </a:extLst>
+                </a:gridCol>
+                <a:gridCol w="1047885">
+                  <a:extLst>
+                    <a:ext uri="{9D8B030D-6E8A-4147-A177-3AD203B41FA5}">
+                      <a16:colId xmlns:a16="http://schemas.microsoft.com/office/drawing/2014/main" val="1994325327"/>
+                    </a:ext>
+                  </a:extLst>
+                </a:gridCol>
+                <a:gridCol w="1047885">
+                  <a:extLst>
+                    <a:ext uri="{9D8B030D-6E8A-4147-A177-3AD203B41FA5}">
+                      <a16:colId xmlns:a16="http://schemas.microsoft.com/office/drawing/2014/main" val="3844872914"/>
+                    </a:ext>
+                  </a:extLst>
+                </a:gridCol>
+              </a:tblGrid>
+              <a:tr h="314120">
+                <a:tc>
+                  <a:txBody>
+                    <a:bodyPr/>
+                    <a:lstStyle/>
+                    <a:p>
+                      <a:pPr algn="ctr"/>
+                      <a:endParaRPr kumimoji="1" lang="ja-JP" altLang="en-US" sz="1400" dirty="0">
+                        <a:latin typeface="UD デジタル 教科書体 NP-B" panose="02020700000000000000" pitchFamily="18" charset="-128"/>
+                        <a:ea typeface="UD デジタル 教科書体 NP-B" panose="02020700000000000000" pitchFamily="18" charset="-128"/>
+                      </a:endParaRPr>
+                    </a:p>
+                  </a:txBody>
+                  <a:tcPr anchor="ctr">
+                    <a:lnR w="12700" cap="flat" cmpd="sng" algn="ctr">
+                      <a:solidFill>
+                        <a:schemeClr val="bg1">
+                          <a:lumMod val="50000"/>
+                        </a:schemeClr>
+                      </a:solidFill>
+                      <a:prstDash val="solid"/>
+                      <a:round/>
+                      <a:headEnd type="none" w="med" len="med"/>
+                      <a:tailEnd type="none" w="med" len="med"/>
+                    </a:lnR>
+                    <a:lnB w="12700" cap="flat" cmpd="sng" algn="ctr">
+                      <a:solidFill>
+                        <a:schemeClr val="bg1">
+                          <a:lumMod val="50000"/>
+                        </a:schemeClr>
+                      </a:solidFill>
+                      <a:prstDash val="solid"/>
+                      <a:round/>
+                      <a:headEnd type="none" w="med" len="med"/>
+                      <a:tailEnd type="none" w="med" len="med"/>
+                    </a:lnB>
+                    <a:solidFill>
+                      <a:schemeClr val="bg1"/>
+                    </a:solidFill>
+                  </a:tcPr>
+                </a:tc>
+                <a:tc>
+                  <a:txBody>
+                    <a:bodyPr/>
+                    <a:lstStyle/>
+                    <a:p>
+                      <a:pPr marL="0" marR="0" lvl="0" indent="0" algn="ctr" defTabSz="914400" rtl="0" eaLnBrk="1" fontAlgn="auto" latinLnBrk="0" hangingPunct="1">
+                        <a:lnSpc>
+                          <a:spcPct val="100000"/>
+                        </a:lnSpc>
+                        <a:spcBef>
+                          <a:spcPts val="0"/>
+                        </a:spcBef>
+                        <a:spcAft>
+                          <a:spcPts val="0"/>
+                        </a:spcAft>
+                        <a:buClrTx/>
+                        <a:buSzTx/>
+                        <a:buFontTx/>
+                        <a:buNone/>
+                        <a:tabLst/>
+                        <a:defRPr/>
+                      </a:pPr>
+                      <a:r>
+                        <a:rPr kumimoji="1" lang="en-US" altLang="ja-JP" sz="1400" dirty="0">
+                          <a:latin typeface="UD デジタル 教科書体 NP-B" panose="02020700000000000000" pitchFamily="18" charset="-128"/>
+                          <a:ea typeface="UD デジタル 教科書体 NP-B" panose="02020700000000000000" pitchFamily="18" charset="-128"/>
+                        </a:rPr>
+                        <a:t>Fri</a:t>
+                      </a:r>
+                      <a:endParaRPr kumimoji="1" lang="ja-JP" altLang="en-US" sz="1400" dirty="0">
+                        <a:latin typeface="UD デジタル 教科書体 NP-B" panose="02020700000000000000" pitchFamily="18" charset="-128"/>
+                        <a:ea typeface="UD デジタル 教科書体 NP-B" panose="02020700000000000000" pitchFamily="18" charset="-128"/>
+                      </a:endParaRPr>
+                    </a:p>
+                  </a:txBody>
+                  <a:tcPr anchor="ctr">
+                    <a:lnL w="12700" cap="flat" cmpd="sng" algn="ctr">
+                      <a:solidFill>
+                        <a:schemeClr val="bg1">
+                          <a:lumMod val="50000"/>
+                        </a:schemeClr>
+                      </a:solidFill>
+                      <a:prstDash val="solid"/>
+                      <a:round/>
+                      <a:headEnd type="none" w="med" len="med"/>
+                      <a:tailEnd type="none" w="med" len="med"/>
+                    </a:lnL>
+                    <a:lnR w="12700" cap="flat" cmpd="sng" algn="ctr">
+                      <a:solidFill>
+                        <a:schemeClr val="bg1">
+                          <a:lumMod val="50000"/>
+                        </a:schemeClr>
+                      </a:solidFill>
+                      <a:prstDash val="solid"/>
+                      <a:round/>
+                      <a:headEnd type="none" w="med" len="med"/>
+                      <a:tailEnd type="none" w="med" len="med"/>
+                    </a:lnR>
+                    <a:lnB w="12700" cap="flat" cmpd="sng" algn="ctr">
+                      <a:solidFill>
+                        <a:schemeClr val="bg1">
+                          <a:lumMod val="50000"/>
+                        </a:schemeClr>
+                      </a:solidFill>
+                      <a:prstDash val="solid"/>
+                      <a:round/>
+                      <a:headEnd type="none" w="med" len="med"/>
+                      <a:tailEnd type="none" w="med" len="med"/>
+                    </a:lnB>
+                  </a:tcPr>
+                </a:tc>
+                <a:tc>
+                  <a:txBody>
+                    <a:bodyPr/>
+                    <a:lstStyle/>
+                    <a:p>
+                      <a:pPr algn="ctr"/>
+                      <a:r>
+                        <a:rPr kumimoji="1" lang="en-US" altLang="ja-JP" sz="1400" dirty="0">
+                          <a:latin typeface="UD デジタル 教科書体 NP-B" panose="02020700000000000000" pitchFamily="18" charset="-128"/>
+                          <a:ea typeface="UD デジタル 教科書体 NP-B" panose="02020700000000000000" pitchFamily="18" charset="-128"/>
+                        </a:rPr>
+                        <a:t>Mon</a:t>
+                      </a:r>
+                      <a:endParaRPr kumimoji="1" lang="ja-JP" altLang="en-US" sz="1400" dirty="0">
+                        <a:latin typeface="UD デジタル 教科書体 NP-B" panose="02020700000000000000" pitchFamily="18" charset="-128"/>
+                        <a:ea typeface="UD デジタル 教科書体 NP-B" panose="02020700000000000000" pitchFamily="18" charset="-128"/>
+                      </a:endParaRPr>
+                    </a:p>
+                  </a:txBody>
+                  <a:tcPr anchor="ctr">
+                    <a:lnL w="12700" cap="flat" cmpd="sng" algn="ctr">
+                      <a:solidFill>
+                        <a:schemeClr val="bg1">
+                          <a:lumMod val="50000"/>
+                        </a:schemeClr>
+                      </a:solidFill>
+                      <a:prstDash val="solid"/>
+                      <a:round/>
+                      <a:headEnd type="none" w="med" len="med"/>
+                      <a:tailEnd type="none" w="med" len="med"/>
+                    </a:lnL>
+                    <a:lnB w="12700" cap="flat" cmpd="sng" algn="ctr">
+                      <a:solidFill>
+                        <a:schemeClr val="bg1">
+                          <a:lumMod val="50000"/>
+                        </a:schemeClr>
+                      </a:solidFill>
+                      <a:prstDash val="solid"/>
+                      <a:round/>
+                      <a:headEnd type="none" w="med" len="med"/>
+                      <a:tailEnd type="none" w="med" len="med"/>
+                    </a:lnB>
+                  </a:tcPr>
+                </a:tc>
+                <a:tc>
+                  <a:txBody>
+                    <a:bodyPr/>
+                    <a:lstStyle/>
+                    <a:p>
+                      <a:pPr algn="ctr"/>
+                      <a:r>
+                        <a:rPr kumimoji="1" lang="en-US" altLang="ja-JP" sz="1400" dirty="0">
+                          <a:latin typeface="UD デジタル 教科書体 NP-B" panose="02020700000000000000" pitchFamily="18" charset="-128"/>
+                          <a:ea typeface="UD デジタル 教科書体 NP-B" panose="02020700000000000000" pitchFamily="18" charset="-128"/>
+                        </a:rPr>
+                        <a:t>Tue</a:t>
+                      </a:r>
+                      <a:endParaRPr kumimoji="1" lang="ja-JP" altLang="en-US" sz="1400" dirty="0">
+                        <a:latin typeface="UD デジタル 教科書体 NP-B" panose="02020700000000000000" pitchFamily="18" charset="-128"/>
+                        <a:ea typeface="UD デジタル 教科書体 NP-B" panose="02020700000000000000" pitchFamily="18" charset="-128"/>
+                      </a:endParaRPr>
+                    </a:p>
+                  </a:txBody>
+                  <a:tcPr anchor="ctr">
+                    <a:lnB w="12700" cap="flat" cmpd="sng" algn="ctr">
+                      <a:solidFill>
+                        <a:schemeClr val="bg1">
+                          <a:lumMod val="50000"/>
+                        </a:schemeClr>
+                      </a:solidFill>
+                      <a:prstDash val="solid"/>
+                      <a:round/>
+                      <a:headEnd type="none" w="med" len="med"/>
+                      <a:tailEnd type="none" w="med" len="med"/>
+                    </a:lnB>
+                  </a:tcPr>
+                </a:tc>
+                <a:tc>
+                  <a:txBody>
+                    <a:bodyPr/>
+                    <a:lstStyle/>
+                    <a:p>
+                      <a:pPr algn="ctr"/>
+                      <a:r>
+                        <a:rPr kumimoji="1" lang="en-US" altLang="ja-JP" sz="1400" dirty="0">
+                          <a:latin typeface="UD デジタル 教科書体 NP-B" panose="02020700000000000000" pitchFamily="18" charset="-128"/>
+                          <a:ea typeface="UD デジタル 教科書体 NP-B" panose="02020700000000000000" pitchFamily="18" charset="-128"/>
+                        </a:rPr>
+                        <a:t>Wed</a:t>
+                      </a:r>
+                      <a:endParaRPr kumimoji="1" lang="ja-JP" altLang="en-US" sz="1400" dirty="0">
+                        <a:latin typeface="UD デジタル 教科書体 NP-B" panose="02020700000000000000" pitchFamily="18" charset="-128"/>
+                        <a:ea typeface="UD デジタル 教科書体 NP-B" panose="02020700000000000000" pitchFamily="18" charset="-128"/>
+                      </a:endParaRPr>
+                    </a:p>
+                  </a:txBody>
+                  <a:tcPr anchor="ctr">
+                    <a:lnB w="12700" cap="flat" cmpd="sng" algn="ctr">
+                      <a:solidFill>
+                        <a:schemeClr val="bg1">
+                          <a:lumMod val="50000"/>
+                        </a:schemeClr>
+                      </a:solidFill>
+                      <a:prstDash val="solid"/>
+                      <a:round/>
+                      <a:headEnd type="none" w="med" len="med"/>
+                      <a:tailEnd type="none" w="med" len="med"/>
+                    </a:lnB>
+                  </a:tcPr>
+                </a:tc>
+                <a:tc>
+                  <a:txBody>
+                    <a:bodyPr/>
+                    <a:lstStyle/>
+                    <a:p>
+                      <a:pPr algn="ctr"/>
+                      <a:r>
+                        <a:rPr kumimoji="1" lang="en-US" altLang="ja-JP" sz="1400" dirty="0">
+                          <a:latin typeface="UD デジタル 教科書体 NP-B" panose="02020700000000000000" pitchFamily="18" charset="-128"/>
+                          <a:ea typeface="UD デジタル 教科書体 NP-B" panose="02020700000000000000" pitchFamily="18" charset="-128"/>
+                        </a:rPr>
+                        <a:t>Thu</a:t>
+                      </a:r>
+                      <a:endParaRPr kumimoji="1" lang="ja-JP" altLang="en-US" sz="1400" dirty="0">
+                        <a:latin typeface="UD デジタル 教科書体 NP-B" panose="02020700000000000000" pitchFamily="18" charset="-128"/>
+                        <a:ea typeface="UD デジタル 教科書体 NP-B" panose="02020700000000000000" pitchFamily="18" charset="-128"/>
+                      </a:endParaRPr>
+                    </a:p>
+                  </a:txBody>
+                  <a:tcPr anchor="ctr">
+                    <a:lnB w="12700" cap="flat" cmpd="sng" algn="ctr">
+                      <a:solidFill>
+                        <a:schemeClr val="bg1">
+                          <a:lumMod val="50000"/>
+                        </a:schemeClr>
+                      </a:solidFill>
+                      <a:prstDash val="solid"/>
+                      <a:round/>
+                      <a:headEnd type="none" w="med" len="med"/>
+                      <a:tailEnd type="none" w="med" len="med"/>
+                    </a:lnB>
+                  </a:tcPr>
+                </a:tc>
+                <a:tc>
+                  <a:txBody>
+                    <a:bodyPr/>
+                    <a:lstStyle/>
+                    <a:p>
+                      <a:pPr algn="ctr"/>
+                      <a:r>
+                        <a:rPr kumimoji="1" lang="en-US" altLang="ja-JP" sz="1400" dirty="0">
+                          <a:latin typeface="UD デジタル 教科書体 NP-B" panose="02020700000000000000" pitchFamily="18" charset="-128"/>
+                          <a:ea typeface="UD デジタル 教科書体 NP-B" panose="02020700000000000000" pitchFamily="18" charset="-128"/>
+                        </a:rPr>
+                        <a:t>Fri</a:t>
+                      </a:r>
+                      <a:endParaRPr kumimoji="1" lang="ja-JP" altLang="en-US" sz="1400" dirty="0">
+                        <a:latin typeface="UD デジタル 教科書体 NP-B" panose="02020700000000000000" pitchFamily="18" charset="-128"/>
+                        <a:ea typeface="UD デジタル 教科書体 NP-B" panose="02020700000000000000" pitchFamily="18" charset="-128"/>
+                      </a:endParaRPr>
+                    </a:p>
+                  </a:txBody>
+                  <a:tcPr anchor="ctr">
+                    <a:lnB w="12700" cap="flat" cmpd="sng" algn="ctr">
+                      <a:solidFill>
+                        <a:schemeClr val="bg1">
+                          <a:lumMod val="50000"/>
+                        </a:schemeClr>
+                      </a:solidFill>
+                      <a:prstDash val="solid"/>
+                      <a:round/>
+                      <a:headEnd type="none" w="med" len="med"/>
+                      <a:tailEnd type="none" w="med" len="med"/>
+                    </a:lnB>
+                  </a:tcPr>
+                </a:tc>
+                <a:extLst>
+                  <a:ext uri="{0D108BD9-81ED-4DB2-BD59-A6C34878D82A}">
+                    <a16:rowId xmlns:a16="http://schemas.microsoft.com/office/drawing/2014/main" val="3062724192"/>
+                  </a:ext>
+                </a:extLst>
+              </a:tr>
+              <a:tr h="314120">
+                <a:tc>
+                  <a:txBody>
+                    <a:bodyPr/>
+                    <a:lstStyle/>
+                    <a:p>
+                      <a:pPr algn="ctr"/>
+                      <a:r>
+                        <a:rPr kumimoji="1" lang="en-US" altLang="ja-JP" sz="1200" b="1" dirty="0">
+                          <a:solidFill>
+                            <a:schemeClr val="bg1"/>
+                          </a:solidFill>
+                          <a:latin typeface="UD デジタル 教科書体 NP-B" panose="02020700000000000000" pitchFamily="18" charset="-128"/>
+                          <a:ea typeface="UD デジタル 教科書体 NP-B" panose="02020700000000000000" pitchFamily="18" charset="-128"/>
+                        </a:rPr>
+                        <a:t>DAY</a:t>
+                      </a:r>
+                      <a:endParaRPr kumimoji="1" lang="ja-JP" altLang="en-US" sz="1200" b="1" dirty="0">
+                        <a:solidFill>
+                          <a:schemeClr val="bg1"/>
+                        </a:solidFill>
+                        <a:latin typeface="UD デジタル 教科書体 NP-B" panose="02020700000000000000" pitchFamily="18" charset="-128"/>
+                        <a:ea typeface="UD デジタル 教科書体 NP-B" panose="02020700000000000000" pitchFamily="18" charset="-128"/>
+                      </a:endParaRPr>
+                    </a:p>
+                  </a:txBody>
+                  <a:tcPr anchor="ctr">
+                    <a:lnR w="12700" cap="flat" cmpd="sng" algn="ctr">
+                      <a:solidFill>
+                        <a:schemeClr val="bg1">
+                          <a:lumMod val="50000"/>
+                        </a:schemeClr>
+                      </a:solidFill>
+                      <a:prstDash val="solid"/>
+                      <a:round/>
+                      <a:headEnd type="none" w="med" len="med"/>
+                      <a:tailEnd type="none" w="med" len="med"/>
+                    </a:lnR>
+                    <a:lnT w="12700" cap="flat" cmpd="sng" algn="ctr">
+                      <a:solidFill>
+                        <a:schemeClr val="bg1">
+                          <a:lumMod val="50000"/>
+                        </a:schemeClr>
+                      </a:solidFill>
+                      <a:prstDash val="solid"/>
+                      <a:round/>
+                      <a:headEnd type="none" w="med" len="med"/>
+                      <a:tailEnd type="none" w="med" len="med"/>
+                    </a:lnT>
+                    <a:solidFill>
+                      <a:schemeClr val="bg1">
+                        <a:lumMod val="65000"/>
+                      </a:schemeClr>
+                    </a:solidFill>
+                  </a:tcPr>
+                </a:tc>
+                <a:tc>
+                  <a:txBody>
+                    <a:bodyPr/>
+                    <a:lstStyle/>
+                    <a:p>
+                      <a:pPr algn="ctr"/>
+                      <a:r>
+                        <a:rPr kumimoji="1" lang="en-US" altLang="ja-JP" sz="1400" dirty="0">
+                          <a:latin typeface="UD デジタル 教科書体 NP-B" panose="02020700000000000000" pitchFamily="18" charset="-128"/>
+                          <a:ea typeface="UD デジタル 教科書体 NP-B" panose="02020700000000000000" pitchFamily="18" charset="-128"/>
+                        </a:rPr>
+                        <a:t>432</a:t>
+                      </a:r>
+                      <a:endParaRPr kumimoji="1" lang="ja-JP" altLang="en-US" sz="1400" dirty="0">
+                        <a:latin typeface="UD デジタル 教科書体 NP-B" panose="02020700000000000000" pitchFamily="18" charset="-128"/>
+                        <a:ea typeface="UD デジタル 教科書体 NP-B" panose="02020700000000000000" pitchFamily="18" charset="-128"/>
+                      </a:endParaRPr>
+                    </a:p>
+                  </a:txBody>
+                  <a:tcPr anchor="ctr">
+                    <a:lnL w="12700" cap="flat" cmpd="sng" algn="ctr">
+                      <a:solidFill>
+                        <a:schemeClr val="bg1">
+                          <a:lumMod val="50000"/>
+                        </a:schemeClr>
+                      </a:solidFill>
+                      <a:prstDash val="solid"/>
+                      <a:round/>
+                      <a:headEnd type="none" w="med" len="med"/>
+                      <a:tailEnd type="none" w="med" len="med"/>
+                    </a:lnL>
+                    <a:lnR w="12700" cap="flat" cmpd="sng" algn="ctr">
+                      <a:solidFill>
+                        <a:schemeClr val="bg1">
+                          <a:lumMod val="50000"/>
+                        </a:schemeClr>
+                      </a:solidFill>
+                      <a:prstDash val="solid"/>
+                      <a:round/>
+                      <a:headEnd type="none" w="med" len="med"/>
+                      <a:tailEnd type="none" w="med" len="med"/>
+                    </a:lnR>
+                    <a:lnT w="12700" cap="flat" cmpd="sng" algn="ctr">
+                      <a:solidFill>
+                        <a:schemeClr val="bg1">
+                          <a:lumMod val="50000"/>
+                        </a:schemeClr>
+                      </a:solidFill>
+                      <a:prstDash val="solid"/>
+                      <a:round/>
+                      <a:headEnd type="none" w="med" len="med"/>
+                      <a:tailEnd type="none" w="med" len="med"/>
+                    </a:lnT>
+                  </a:tcPr>
+                </a:tc>
+                <a:tc>
+                  <a:txBody>
+                    <a:bodyPr/>
+                    <a:lstStyle/>
+                    <a:p>
+                      <a:pPr algn="ctr"/>
+                      <a:r>
+                        <a:rPr kumimoji="1" lang="en-US" altLang="ja-JP" sz="1400" dirty="0">
+                          <a:latin typeface="UD デジタル 教科書体 NP-B" panose="02020700000000000000" pitchFamily="18" charset="-128"/>
+                          <a:ea typeface="UD デジタル 教科書体 NP-B" panose="02020700000000000000" pitchFamily="18" charset="-128"/>
+                        </a:rPr>
+                        <a:t>454</a:t>
+                      </a:r>
+                      <a:endParaRPr kumimoji="1" lang="ja-JP" altLang="en-US" sz="1400" dirty="0">
+                        <a:latin typeface="UD デジタル 教科書体 NP-B" panose="02020700000000000000" pitchFamily="18" charset="-128"/>
+                        <a:ea typeface="UD デジタル 教科書体 NP-B" panose="02020700000000000000" pitchFamily="18" charset="-128"/>
+                      </a:endParaRPr>
+                    </a:p>
+                  </a:txBody>
+                  <a:tcPr anchor="ctr">
+                    <a:lnL w="12700" cap="flat" cmpd="sng" algn="ctr">
+                      <a:solidFill>
+                        <a:schemeClr val="bg1">
+                          <a:lumMod val="50000"/>
+                        </a:schemeClr>
+                      </a:solidFill>
+                      <a:prstDash val="solid"/>
+                      <a:round/>
+                      <a:headEnd type="none" w="med" len="med"/>
+                      <a:tailEnd type="none" w="med" len="med"/>
+                    </a:lnL>
+                    <a:lnT w="12700" cap="flat" cmpd="sng" algn="ctr">
+                      <a:solidFill>
+                        <a:schemeClr val="bg1">
+                          <a:lumMod val="50000"/>
+                        </a:schemeClr>
+                      </a:solidFill>
+                      <a:prstDash val="solid"/>
+                      <a:round/>
+                      <a:headEnd type="none" w="med" len="med"/>
+                      <a:tailEnd type="none" w="med" len="med"/>
+                    </a:lnT>
+                  </a:tcPr>
+                </a:tc>
+                <a:tc>
+                  <a:txBody>
+                    <a:bodyPr/>
+                    <a:lstStyle/>
+                    <a:p>
+                      <a:pPr algn="ctr"/>
+                      <a:r>
+                        <a:rPr kumimoji="1" lang="en-US" altLang="ja-JP" sz="1400" dirty="0">
+                          <a:latin typeface="UD デジタル 教科書体 NP-B" panose="02020700000000000000" pitchFamily="18" charset="-128"/>
+                          <a:ea typeface="UD デジタル 教科書体 NP-B" panose="02020700000000000000" pitchFamily="18" charset="-128"/>
+                        </a:rPr>
+                        <a:t>407</a:t>
+                      </a:r>
+                      <a:endParaRPr kumimoji="1" lang="ja-JP" altLang="en-US" sz="1400" dirty="0">
+                        <a:latin typeface="UD デジタル 教科書体 NP-B" panose="02020700000000000000" pitchFamily="18" charset="-128"/>
+                        <a:ea typeface="UD デジタル 教科書体 NP-B" panose="02020700000000000000" pitchFamily="18" charset="-128"/>
+                      </a:endParaRPr>
+                    </a:p>
+                  </a:txBody>
+                  <a:tcPr anchor="ctr">
+                    <a:lnT w="12700" cap="flat" cmpd="sng" algn="ctr">
+                      <a:solidFill>
+                        <a:schemeClr val="bg1">
+                          <a:lumMod val="50000"/>
+                        </a:schemeClr>
+                      </a:solidFill>
+                      <a:prstDash val="solid"/>
+                      <a:round/>
+                      <a:headEnd type="none" w="med" len="med"/>
+                      <a:tailEnd type="none" w="med" len="med"/>
+                    </a:lnT>
+                  </a:tcPr>
+                </a:tc>
+                <a:tc>
+                  <a:txBody>
+                    <a:bodyPr/>
+                    <a:lstStyle/>
+                    <a:p>
+                      <a:pPr algn="ctr"/>
+                      <a:r>
+                        <a:rPr kumimoji="1" lang="en-US" altLang="ja-JP" sz="1400" dirty="0">
+                          <a:latin typeface="UD デジタル 教科書体 NP-B" panose="02020700000000000000" pitchFamily="18" charset="-128"/>
+                          <a:ea typeface="UD デジタル 教科書体 NP-B" panose="02020700000000000000" pitchFamily="18" charset="-128"/>
+                        </a:rPr>
+                        <a:t>470</a:t>
+                      </a:r>
+                      <a:endParaRPr kumimoji="1" lang="ja-JP" altLang="en-US" sz="1400" dirty="0">
+                        <a:latin typeface="UD デジタル 教科書体 NP-B" panose="02020700000000000000" pitchFamily="18" charset="-128"/>
+                        <a:ea typeface="UD デジタル 教科書体 NP-B" panose="02020700000000000000" pitchFamily="18" charset="-128"/>
+                      </a:endParaRPr>
+                    </a:p>
+                  </a:txBody>
+                  <a:tcPr anchor="ctr">
+                    <a:lnT w="12700" cap="flat" cmpd="sng" algn="ctr">
+                      <a:solidFill>
+                        <a:schemeClr val="bg1">
+                          <a:lumMod val="50000"/>
+                        </a:schemeClr>
+                      </a:solidFill>
+                      <a:prstDash val="solid"/>
+                      <a:round/>
+                      <a:headEnd type="none" w="med" len="med"/>
+                      <a:tailEnd type="none" w="med" len="med"/>
+                    </a:lnT>
+                  </a:tcPr>
+                </a:tc>
+                <a:tc>
+                  <a:txBody>
+                    <a:bodyPr/>
+                    <a:lstStyle/>
+                    <a:p>
+                      <a:pPr algn="ctr"/>
+                      <a:r>
+                        <a:rPr kumimoji="1" lang="en-US" altLang="ja-JP" sz="1400" dirty="0">
+                          <a:latin typeface="UD デジタル 教科書体 NP-B" panose="02020700000000000000" pitchFamily="18" charset="-128"/>
+                          <a:ea typeface="UD デジタル 教科書体 NP-B" panose="02020700000000000000" pitchFamily="18" charset="-128"/>
+                        </a:rPr>
+                        <a:t>0</a:t>
+                      </a:r>
+                      <a:endParaRPr kumimoji="1" lang="ja-JP" altLang="en-US" sz="1400" dirty="0">
+                        <a:latin typeface="UD デジタル 教科書体 NP-B" panose="02020700000000000000" pitchFamily="18" charset="-128"/>
+                        <a:ea typeface="UD デジタル 教科書体 NP-B" panose="02020700000000000000" pitchFamily="18" charset="-128"/>
+                      </a:endParaRPr>
+                    </a:p>
+                  </a:txBody>
+                  <a:tcPr anchor="ctr">
+                    <a:lnT w="12700" cap="flat" cmpd="sng" algn="ctr">
+                      <a:solidFill>
+                        <a:schemeClr val="bg1">
+                          <a:lumMod val="50000"/>
+                        </a:schemeClr>
+                      </a:solidFill>
+                      <a:prstDash val="solid"/>
+                      <a:round/>
+                      <a:headEnd type="none" w="med" len="med"/>
+                      <a:tailEnd type="none" w="med" len="med"/>
+                    </a:lnT>
+                  </a:tcPr>
+                </a:tc>
+                <a:tc>
+                  <a:txBody>
+                    <a:bodyPr/>
+                    <a:lstStyle/>
+                    <a:p>
+                      <a:pPr algn="ctr"/>
+                      <a:r>
+                        <a:rPr kumimoji="1" lang="en-US" altLang="ja-JP" sz="1400" dirty="0">
+                          <a:latin typeface="UD デジタル 教科書体 NP-B" panose="02020700000000000000" pitchFamily="18" charset="-128"/>
+                          <a:ea typeface="UD デジタル 教科書体 NP-B" panose="02020700000000000000" pitchFamily="18" charset="-128"/>
+                        </a:rPr>
+                        <a:t>0</a:t>
+                      </a:r>
+                      <a:endParaRPr kumimoji="1" lang="ja-JP" altLang="en-US" sz="1400" dirty="0">
+                        <a:latin typeface="UD デジタル 教科書体 NP-B" panose="02020700000000000000" pitchFamily="18" charset="-128"/>
+                        <a:ea typeface="UD デジタル 教科書体 NP-B" panose="02020700000000000000" pitchFamily="18" charset="-128"/>
+                      </a:endParaRPr>
+                    </a:p>
+                  </a:txBody>
+                  <a:tcPr anchor="ctr">
+                    <a:lnT w="12700" cap="flat" cmpd="sng" algn="ctr">
+                      <a:solidFill>
+                        <a:schemeClr val="bg1">
+                          <a:lumMod val="50000"/>
+                        </a:schemeClr>
+                      </a:solidFill>
+                      <a:prstDash val="solid"/>
+                      <a:round/>
+                      <a:headEnd type="none" w="med" len="med"/>
+                      <a:tailEnd type="none" w="med" len="med"/>
+                    </a:lnT>
+                  </a:tcPr>
+                </a:tc>
+                <a:extLst>
+                  <a:ext uri="{0D108BD9-81ED-4DB2-BD59-A6C34878D82A}">
+                    <a16:rowId xmlns:a16="http://schemas.microsoft.com/office/drawing/2014/main" val="601181801"/>
+                  </a:ext>
+                </a:extLst>
+              </a:tr>
+              <a:tr h="314120">
+                <a:tc>
+                  <a:txBody>
+                    <a:bodyPr/>
+                    <a:lstStyle/>
+                    <a:p>
+                      <a:pPr algn="ctr"/>
+                      <a:r>
+                        <a:rPr kumimoji="1" lang="en-US" altLang="ja-JP" sz="1200" b="1" dirty="0">
+                          <a:solidFill>
+                            <a:schemeClr val="bg1"/>
+                          </a:solidFill>
+                          <a:latin typeface="UD デジタル 教科書体 NP-B" panose="02020700000000000000" pitchFamily="18" charset="-128"/>
+                          <a:ea typeface="UD デジタル 教科書体 NP-B" panose="02020700000000000000" pitchFamily="18" charset="-128"/>
+                        </a:rPr>
+                        <a:t>NIGHT</a:t>
+                      </a:r>
+                      <a:endParaRPr kumimoji="1" lang="ja-JP" altLang="en-US" sz="1200" b="1" dirty="0">
+                        <a:solidFill>
+                          <a:schemeClr val="bg1"/>
+                        </a:solidFill>
+                        <a:latin typeface="UD デジタル 教科書体 NP-B" panose="02020700000000000000" pitchFamily="18" charset="-128"/>
+                        <a:ea typeface="UD デジタル 教科書体 NP-B" panose="02020700000000000000" pitchFamily="18" charset="-128"/>
+                      </a:endParaRPr>
+                    </a:p>
+                  </a:txBody>
+                  <a:tcPr anchor="ctr">
+                    <a:lnR w="12700" cap="flat" cmpd="sng" algn="ctr">
+                      <a:solidFill>
+                        <a:schemeClr val="bg1">
+                          <a:lumMod val="50000"/>
+                        </a:schemeClr>
+                      </a:solidFill>
+                      <a:prstDash val="solid"/>
+                      <a:round/>
+                      <a:headEnd type="none" w="med" len="med"/>
+                      <a:tailEnd type="none" w="med" len="med"/>
+                    </a:lnR>
+                    <a:solidFill>
+                      <a:schemeClr val="bg1">
+                        <a:lumMod val="65000"/>
+                      </a:schemeClr>
+                    </a:solidFill>
+                  </a:tcPr>
+                </a:tc>
+                <a:tc>
+                  <a:txBody>
+                    <a:bodyPr/>
+                    <a:lstStyle/>
+                    <a:p>
+                      <a:pPr algn="ctr"/>
+                      <a:r>
+                        <a:rPr kumimoji="1" lang="en-US" altLang="ja-JP" sz="1400" dirty="0">
+                          <a:latin typeface="UD デジタル 教科書体 NP-B" panose="02020700000000000000" pitchFamily="18" charset="-128"/>
+                          <a:ea typeface="UD デジタル 教科書体 NP-B" panose="02020700000000000000" pitchFamily="18" charset="-128"/>
+                        </a:rPr>
+                        <a:t>447</a:t>
+                      </a:r>
+                      <a:endParaRPr kumimoji="1" lang="ja-JP" altLang="en-US" sz="1400" dirty="0">
+                        <a:latin typeface="UD デジタル 教科書体 NP-B" panose="02020700000000000000" pitchFamily="18" charset="-128"/>
+                        <a:ea typeface="UD デジタル 教科書体 NP-B" panose="02020700000000000000" pitchFamily="18" charset="-128"/>
+                      </a:endParaRPr>
+                    </a:p>
+                  </a:txBody>
+                  <a:tcPr anchor="ctr">
+                    <a:lnL w="12700" cap="flat" cmpd="sng" algn="ctr">
+                      <a:solidFill>
+                        <a:schemeClr val="bg1">
+                          <a:lumMod val="50000"/>
+                        </a:schemeClr>
+                      </a:solidFill>
+                      <a:prstDash val="solid"/>
+                      <a:round/>
+                      <a:headEnd type="none" w="med" len="med"/>
+                      <a:tailEnd type="none" w="med" len="med"/>
+                    </a:lnL>
+                    <a:lnR w="12700" cap="flat" cmpd="sng" algn="ctr">
+                      <a:solidFill>
+                        <a:schemeClr val="bg1">
+                          <a:lumMod val="50000"/>
+                        </a:schemeClr>
+                      </a:solidFill>
+                      <a:prstDash val="solid"/>
+                      <a:round/>
+                      <a:headEnd type="none" w="med" len="med"/>
+                      <a:tailEnd type="none" w="med" len="med"/>
+                    </a:lnR>
+                  </a:tcPr>
+                </a:tc>
+                <a:tc>
+                  <a:txBody>
+                    <a:bodyPr/>
+                    <a:lstStyle/>
+                    <a:p>
+                      <a:pPr algn="ctr"/>
+                      <a:r>
+                        <a:rPr kumimoji="1" lang="en-US" altLang="ja-JP" sz="1400" dirty="0">
+                          <a:latin typeface="UD デジタル 教科書体 NP-B" panose="02020700000000000000" pitchFamily="18" charset="-128"/>
+                          <a:ea typeface="UD デジタル 教科書体 NP-B" panose="02020700000000000000" pitchFamily="18" charset="-128"/>
+                        </a:rPr>
+                        <a:t>430</a:t>
+                      </a:r>
+                      <a:endParaRPr kumimoji="1" lang="ja-JP" altLang="en-US" sz="1400" dirty="0">
+                        <a:latin typeface="UD デジタル 教科書体 NP-B" panose="02020700000000000000" pitchFamily="18" charset="-128"/>
+                        <a:ea typeface="UD デジタル 教科書体 NP-B" panose="02020700000000000000" pitchFamily="18" charset="-128"/>
+                      </a:endParaRPr>
+                    </a:p>
+                  </a:txBody>
+                  <a:tcPr anchor="ctr">
+                    <a:lnL w="12700" cap="flat" cmpd="sng" algn="ctr">
+                      <a:solidFill>
+                        <a:schemeClr val="bg1">
+                          <a:lumMod val="50000"/>
+                        </a:schemeClr>
+                      </a:solidFill>
+                      <a:prstDash val="solid"/>
+                      <a:round/>
+                      <a:headEnd type="none" w="med" len="med"/>
+                      <a:tailEnd type="none" w="med" len="med"/>
+                    </a:lnL>
+                  </a:tcPr>
+                </a:tc>
+                <a:tc>
+                  <a:txBody>
+                    <a:bodyPr/>
+                    <a:lstStyle/>
+                    <a:p>
+                      <a:pPr algn="ctr"/>
+                      <a:r>
+                        <a:rPr kumimoji="1" lang="en-US" altLang="ja-JP" sz="1400" dirty="0">
+                          <a:latin typeface="UD デジタル 教科書体 NP-B" panose="02020700000000000000" pitchFamily="18" charset="-128"/>
+                          <a:ea typeface="UD デジタル 教科書体 NP-B" panose="02020700000000000000" pitchFamily="18" charset="-128"/>
+                        </a:rPr>
+                        <a:t>442</a:t>
+                      </a:r>
+                      <a:endParaRPr kumimoji="1" lang="ja-JP" altLang="en-US" sz="1400" dirty="0">
+                        <a:latin typeface="UD デジタル 教科書体 NP-B" panose="02020700000000000000" pitchFamily="18" charset="-128"/>
+                        <a:ea typeface="UD デジタル 教科書体 NP-B" panose="02020700000000000000" pitchFamily="18" charset="-128"/>
+                      </a:endParaRPr>
+                    </a:p>
+                  </a:txBody>
+                  <a:tcPr anchor="ctr"/>
+                </a:tc>
+                <a:tc>
+                  <a:txBody>
+                    <a:bodyPr/>
+                    <a:lstStyle/>
+                    <a:p>
+                      <a:pPr algn="ctr"/>
+                      <a:r>
+                        <a:rPr kumimoji="1" lang="en-US" altLang="ja-JP" sz="1400" dirty="0">
+                          <a:latin typeface="UD デジタル 教科書体 NP-B" panose="02020700000000000000" pitchFamily="18" charset="-128"/>
+                          <a:ea typeface="UD デジタル 教科書体 NP-B" panose="02020700000000000000" pitchFamily="18" charset="-128"/>
+                        </a:rPr>
+                        <a:t>156</a:t>
+                      </a:r>
+                      <a:endParaRPr kumimoji="1" lang="ja-JP" altLang="en-US" sz="1400" dirty="0">
+                        <a:latin typeface="UD デジタル 教科書体 NP-B" panose="02020700000000000000" pitchFamily="18" charset="-128"/>
+                        <a:ea typeface="UD デジタル 教科書体 NP-B" panose="02020700000000000000" pitchFamily="18" charset="-128"/>
+                      </a:endParaRPr>
+                    </a:p>
+                  </a:txBody>
+                  <a:tcPr anchor="ctr"/>
+                </a:tc>
+                <a:tc>
+                  <a:txBody>
+                    <a:bodyPr/>
+                    <a:lstStyle/>
+                    <a:p>
+                      <a:pPr algn="ctr"/>
+                      <a:r>
+                        <a:rPr kumimoji="1" lang="en-US" altLang="ja-JP" sz="1400" dirty="0">
+                          <a:latin typeface="UD デジタル 教科書体 NP-B" panose="02020700000000000000" pitchFamily="18" charset="-128"/>
+                          <a:ea typeface="UD デジタル 教科書体 NP-B" panose="02020700000000000000" pitchFamily="18" charset="-128"/>
+                        </a:rPr>
+                        <a:t>0</a:t>
+                      </a:r>
+                      <a:endParaRPr kumimoji="1" lang="ja-JP" altLang="en-US" sz="1400" dirty="0">
+                        <a:latin typeface="UD デジタル 教科書体 NP-B" panose="02020700000000000000" pitchFamily="18" charset="-128"/>
+                        <a:ea typeface="UD デジタル 教科書体 NP-B" panose="02020700000000000000" pitchFamily="18" charset="-128"/>
+                      </a:endParaRPr>
+                    </a:p>
+                  </a:txBody>
+                  <a:tcPr anchor="ctr"/>
+                </a:tc>
+                <a:tc>
+                  <a:txBody>
+                    <a:bodyPr/>
+                    <a:lstStyle/>
+                    <a:p>
+                      <a:pPr algn="ctr"/>
+                      <a:r>
+                        <a:rPr kumimoji="1" lang="en-US" altLang="ja-JP" sz="1400" dirty="0">
+                          <a:latin typeface="UD デジタル 教科書体 NP-B" panose="02020700000000000000" pitchFamily="18" charset="-128"/>
+                          <a:ea typeface="UD デジタル 教科書体 NP-B" panose="02020700000000000000" pitchFamily="18" charset="-128"/>
+                        </a:rPr>
+                        <a:t>0</a:t>
+                      </a:r>
+                      <a:endParaRPr kumimoji="1" lang="ja-JP" altLang="en-US" sz="1400" dirty="0">
+                        <a:latin typeface="UD デジタル 教科書体 NP-B" panose="02020700000000000000" pitchFamily="18" charset="-128"/>
+                        <a:ea typeface="UD デジタル 教科書体 NP-B" panose="02020700000000000000" pitchFamily="18" charset="-128"/>
+                      </a:endParaRPr>
+                    </a:p>
+                  </a:txBody>
+                  <a:tcPr anchor="ctr"/>
+                </a:tc>
+                <a:extLst>
+                  <a:ext uri="{0D108BD9-81ED-4DB2-BD59-A6C34878D82A}">
+                    <a16:rowId xmlns:a16="http://schemas.microsoft.com/office/drawing/2014/main" val="3922191600"/>
+                  </a:ext>
+                </a:extLst>
+              </a:tr>
+            </a:tbl>
+          </a:graphicData>
+        </a:graphic>
+      </p:graphicFrame>
+      <p:sp>
+        <p:nvSpPr>
+          <p:cNvPr id="18" name="テキスト ボックス 17">
+            <a:extLst>
+              <a:ext uri="{FF2B5EF4-FFF2-40B4-BE49-F238E27FC236}">
+                <a16:creationId xmlns:a16="http://schemas.microsoft.com/office/drawing/2014/main" id="{1B6EAC6A-A5AE-9F09-9064-10E8BE611AA8}"/>
+              </a:ext>
+            </a:extLst>
+          </p:cNvPr>
+          <p:cNvSpPr txBox="1"/>
+          <p:nvPr/>
+        </p:nvSpPr>
+        <p:spPr>
+          <a:xfrm>
+            <a:off x="103817" y="3632430"/>
+            <a:ext cx="6462683" cy="400110"/>
+          </a:xfrm>
+          <a:prstGeom prst="rect">
+            <a:avLst/>
+          </a:prstGeom>
+          <a:noFill/>
+        </p:spPr>
+        <p:txBody>
+          <a:bodyPr wrap="square" rtlCol="0">
+            <a:spAutoFit/>
+          </a:bodyPr>
+          <a:lstStyle/>
+          <a:p>
+            <a:r>
+              <a:rPr lang="en-US" altLang="ja-JP" sz="2000" b="1" dirty="0">
+                <a:solidFill>
+                  <a:schemeClr val="tx1">
+                    <a:lumMod val="65000"/>
+                    <a:lumOff val="35000"/>
+                  </a:schemeClr>
+                </a:solidFill>
+                <a:latin typeface="UD デジタル 教科書体 NP-B" panose="02020700000000000000" pitchFamily="18" charset="-128"/>
+                <a:ea typeface="UD デジタル 教科書体 NP-B" panose="02020700000000000000" pitchFamily="18" charset="-128"/>
+              </a:rPr>
+              <a:t>TODAY’S PRODUCTION </a:t>
+            </a:r>
+            <a:r>
+              <a:rPr lang="ja-JP" altLang="en-US" sz="1400" dirty="0">
+                <a:solidFill>
+                  <a:schemeClr val="tx1">
+                    <a:lumMod val="65000"/>
+                    <a:lumOff val="35000"/>
+                  </a:schemeClr>
+                </a:solidFill>
+                <a:latin typeface="UD デジタル 教科書体 NP-B" panose="02020700000000000000" pitchFamily="18" charset="-128"/>
+                <a:ea typeface="UD デジタル 教科書体 NP-B" panose="02020700000000000000" pitchFamily="18" charset="-128"/>
+              </a:rPr>
+              <a:t>本日の生産状況</a:t>
+            </a:r>
+            <a:endParaRPr kumimoji="1" lang="ja-JP" altLang="en-US" sz="1400" dirty="0">
+              <a:solidFill>
+                <a:schemeClr val="tx1">
+                  <a:lumMod val="65000"/>
+                  <a:lumOff val="35000"/>
+                </a:schemeClr>
+              </a:solidFill>
+              <a:latin typeface="UD デジタル 教科書体 NP-B" panose="02020700000000000000" pitchFamily="18" charset="-128"/>
+              <a:ea typeface="UD デジタル 教科書体 NP-B" panose="02020700000000000000" pitchFamily="18" charset="-128"/>
+            </a:endParaRPr>
+          </a:p>
+        </p:txBody>
+      </p:sp>
+      <p:graphicFrame>
+        <p:nvGraphicFramePr>
+          <p:cNvPr id="19" name="表 18">
+            <a:extLst>
+              <a:ext uri="{FF2B5EF4-FFF2-40B4-BE49-F238E27FC236}">
+                <a16:creationId xmlns:a16="http://schemas.microsoft.com/office/drawing/2014/main" id="{58B3D841-63BD-1C36-165A-FA3DA0E2D73C}"/>
+              </a:ext>
+            </a:extLst>
+          </p:cNvPr>
+          <p:cNvGraphicFramePr>
+            <a:graphicFrameLocks noGrp="1"/>
+          </p:cNvGraphicFramePr>
+          <p:nvPr>
+            <p:extLst>
+              <p:ext uri="{D42A27DB-BD31-4B8C-83A1-F6EECF244321}">
+                <p14:modId xmlns:p14="http://schemas.microsoft.com/office/powerpoint/2010/main" val="3145076754"/>
+              </p:ext>
+            </p:extLst>
+          </p:nvPr>
+        </p:nvGraphicFramePr>
+        <p:xfrm>
+          <a:off x="400832" y="4611402"/>
+          <a:ext cx="2806284" cy="708891"/>
+        </p:xfrm>
+        <a:graphic>
+          <a:graphicData uri="http://schemas.openxmlformats.org/drawingml/2006/table">
+            <a:tbl>
+              <a:tblPr firstRow="1" bandRow="1">
+                <a:tableStyleId>{F2DE63D5-997A-4646-A377-4702673A728D}</a:tableStyleId>
+              </a:tblPr>
+              <a:tblGrid>
+                <a:gridCol w="935428">
+                  <a:extLst>
+                    <a:ext uri="{9D8B030D-6E8A-4147-A177-3AD203B41FA5}">
+                      <a16:colId xmlns:a16="http://schemas.microsoft.com/office/drawing/2014/main" val="188364501"/>
+                    </a:ext>
+                  </a:extLst>
+                </a:gridCol>
+                <a:gridCol w="935428">
+                  <a:extLst>
+                    <a:ext uri="{9D8B030D-6E8A-4147-A177-3AD203B41FA5}">
+                      <a16:colId xmlns:a16="http://schemas.microsoft.com/office/drawing/2014/main" val="3123303698"/>
+                    </a:ext>
+                  </a:extLst>
+                </a:gridCol>
+                <a:gridCol w="935428">
+                  <a:extLst>
+                    <a:ext uri="{9D8B030D-6E8A-4147-A177-3AD203B41FA5}">
+                      <a16:colId xmlns:a16="http://schemas.microsoft.com/office/drawing/2014/main" val="1716167615"/>
+                    </a:ext>
+                  </a:extLst>
+                </a:gridCol>
+              </a:tblGrid>
+              <a:tr h="317272">
+                <a:tc>
+                  <a:txBody>
+                    <a:bodyPr/>
+                    <a:lstStyle/>
+                    <a:p>
+                      <a:pPr algn="ctr"/>
+                      <a:r>
+                        <a:rPr kumimoji="1" lang="ja-JP" altLang="en-US" sz="1400" dirty="0">
+                          <a:latin typeface="UD デジタル 教科書体 NP-B" panose="02020700000000000000" pitchFamily="18" charset="-128"/>
+                          <a:ea typeface="UD デジタル 教科書体 NP-B" panose="02020700000000000000" pitchFamily="18" charset="-128"/>
+                        </a:rPr>
+                        <a:t>実  績</a:t>
+                      </a:r>
+                      <a:endParaRPr kumimoji="1" lang="en-US" altLang="ja-JP" sz="1400" dirty="0">
+                        <a:latin typeface="UD デジタル 教科書体 NP-B" panose="02020700000000000000" pitchFamily="18" charset="-128"/>
+                        <a:ea typeface="UD デジタル 教科書体 NP-B" panose="02020700000000000000" pitchFamily="18" charset="-128"/>
+                      </a:endParaRPr>
+                    </a:p>
+                  </a:txBody>
+                  <a:tcPr anchor="ctr"/>
+                </a:tc>
+                <a:tc>
+                  <a:txBody>
+                    <a:bodyPr/>
+                    <a:lstStyle/>
+                    <a:p>
+                      <a:pPr algn="ctr"/>
+                      <a:r>
+                        <a:rPr kumimoji="1" lang="ja-JP" altLang="en-US" sz="1400" dirty="0">
+                          <a:latin typeface="UD デジタル 教科書体 NP-B" panose="02020700000000000000" pitchFamily="18" charset="-128"/>
+                          <a:ea typeface="UD デジタル 教科書体 NP-B" panose="02020700000000000000" pitchFamily="18" charset="-128"/>
+                        </a:rPr>
+                        <a:t>目  標</a:t>
+                      </a:r>
+                      <a:endParaRPr kumimoji="1" lang="en-US" altLang="ja-JP" sz="1400" dirty="0">
+                        <a:latin typeface="UD デジタル 教科書体 NP-B" panose="02020700000000000000" pitchFamily="18" charset="-128"/>
+                        <a:ea typeface="UD デジタル 教科書体 NP-B" panose="02020700000000000000" pitchFamily="18" charset="-128"/>
+                      </a:endParaRPr>
+                    </a:p>
+                  </a:txBody>
+                  <a:tcPr anchor="ctr"/>
+                </a:tc>
+                <a:tc>
+                  <a:txBody>
+                    <a:bodyPr/>
+                    <a:lstStyle/>
+                    <a:p>
+                      <a:pPr algn="ctr"/>
+                      <a:r>
+                        <a:rPr kumimoji="1" lang="ja-JP" altLang="en-US" sz="1400" dirty="0">
+                          <a:latin typeface="UD デジタル 教科書体 NP-B" panose="02020700000000000000" pitchFamily="18" charset="-128"/>
+                          <a:ea typeface="UD デジタル 教科書体 NP-B" panose="02020700000000000000" pitchFamily="18" charset="-128"/>
+                        </a:rPr>
+                        <a:t>達成率</a:t>
+                      </a:r>
+                    </a:p>
+                  </a:txBody>
+                  <a:tcPr anchor="ctr"/>
+                </a:tc>
+                <a:extLst>
+                  <a:ext uri="{0D108BD9-81ED-4DB2-BD59-A6C34878D82A}">
+                    <a16:rowId xmlns:a16="http://schemas.microsoft.com/office/drawing/2014/main" val="3062724192"/>
+                  </a:ext>
+                </a:extLst>
+              </a:tr>
+              <a:tr h="391619">
+                <a:tc>
+                  <a:txBody>
+                    <a:bodyPr/>
+                    <a:lstStyle/>
+                    <a:p>
+                      <a:pPr algn="ctr"/>
+                      <a:r>
+                        <a:rPr kumimoji="1" lang="en-US" altLang="ja-JP" sz="1400" dirty="0">
+                          <a:latin typeface="UD デジタル 教科書体 NP-B" panose="02020700000000000000" pitchFamily="18" charset="-128"/>
+                          <a:ea typeface="UD デジタル 教科書体 NP-B" panose="02020700000000000000" pitchFamily="18" charset="-128"/>
+                        </a:rPr>
+                        <a:t>12,535</a:t>
+                      </a:r>
+                      <a:endParaRPr kumimoji="1" lang="ja-JP" altLang="en-US" sz="1400" dirty="0">
+                        <a:latin typeface="UD デジタル 教科書体 NP-B" panose="02020700000000000000" pitchFamily="18" charset="-128"/>
+                        <a:ea typeface="UD デジタル 教科書体 NP-B" panose="02020700000000000000" pitchFamily="18" charset="-128"/>
+                      </a:endParaRPr>
+                    </a:p>
+                  </a:txBody>
+                  <a:tcPr anchor="ctr"/>
+                </a:tc>
+                <a:tc>
+                  <a:txBody>
+                    <a:bodyPr/>
+                    <a:lstStyle/>
+                    <a:p>
+                      <a:pPr algn="ctr"/>
+                      <a:r>
+                        <a:rPr kumimoji="1" lang="en-US" altLang="ja-JP" sz="1400" dirty="0">
+                          <a:latin typeface="UD デジタル 教科書体 NP-B" panose="02020700000000000000" pitchFamily="18" charset="-128"/>
+                          <a:ea typeface="UD デジタル 教科書体 NP-B" panose="02020700000000000000" pitchFamily="18" charset="-128"/>
+                        </a:rPr>
+                        <a:t>13,500</a:t>
+                      </a:r>
+                      <a:endParaRPr kumimoji="1" lang="ja-JP" altLang="en-US" sz="1400" dirty="0">
+                        <a:latin typeface="UD デジタル 教科書体 NP-B" panose="02020700000000000000" pitchFamily="18" charset="-128"/>
+                        <a:ea typeface="UD デジタル 教科書体 NP-B" panose="02020700000000000000" pitchFamily="18" charset="-128"/>
+                      </a:endParaRPr>
+                    </a:p>
+                  </a:txBody>
+                  <a:tcPr anchor="ctr"/>
+                </a:tc>
+                <a:tc>
+                  <a:txBody>
+                    <a:bodyPr/>
+                    <a:lstStyle/>
+                    <a:p>
+                      <a:pPr algn="ctr"/>
+                      <a:r>
+                        <a:rPr kumimoji="1" lang="en-US" altLang="ja-JP" sz="1600" dirty="0">
+                          <a:latin typeface="UD デジタル 教科書体 NP-B" panose="02020700000000000000" pitchFamily="18" charset="-128"/>
+                          <a:ea typeface="UD デジタル 教科書体 NP-B" panose="02020700000000000000" pitchFamily="18" charset="-128"/>
+                        </a:rPr>
+                        <a:t>83%</a:t>
+                      </a:r>
+                      <a:endParaRPr kumimoji="1" lang="ja-JP" altLang="en-US" sz="1600" dirty="0">
+                        <a:latin typeface="UD デジタル 教科書体 NP-B" panose="02020700000000000000" pitchFamily="18" charset="-128"/>
+                        <a:ea typeface="UD デジタル 教科書体 NP-B" panose="02020700000000000000" pitchFamily="18" charset="-128"/>
+                      </a:endParaRPr>
+                    </a:p>
+                  </a:txBody>
+                  <a:tcPr anchor="ctr"/>
+                </a:tc>
+                <a:extLst>
+                  <a:ext uri="{0D108BD9-81ED-4DB2-BD59-A6C34878D82A}">
+                    <a16:rowId xmlns:a16="http://schemas.microsoft.com/office/drawing/2014/main" val="601181801"/>
+                  </a:ext>
+                </a:extLst>
+              </a:tr>
+            </a:tbl>
+          </a:graphicData>
+        </a:graphic>
+      </p:graphicFrame>
+      <p:sp>
+        <p:nvSpPr>
+          <p:cNvPr id="22" name="正方形/長方形 21">
+            <a:extLst>
+              <a:ext uri="{FF2B5EF4-FFF2-40B4-BE49-F238E27FC236}">
+                <a16:creationId xmlns:a16="http://schemas.microsoft.com/office/drawing/2014/main" id="{AC28A90C-E78E-F694-E9B2-31CF96BCF230}"/>
+              </a:ext>
+            </a:extLst>
+          </p:cNvPr>
+          <p:cNvSpPr/>
+          <p:nvPr/>
+        </p:nvSpPr>
+        <p:spPr>
+          <a:xfrm>
+            <a:off x="3734105" y="4504579"/>
+            <a:ext cx="5399680" cy="1070721"/>
+          </a:xfrm>
+          <a:prstGeom prst="rect">
+            <a:avLst/>
+          </a:prstGeom>
+          <a:noFill/>
+          <a:ln w="28575">
+            <a:solidFill>
+              <a:schemeClr val="tx1">
+                <a:lumMod val="65000"/>
+                <a:lumOff val="35000"/>
+              </a:schemeClr>
+            </a:solidFill>
+          </a:ln>
+        </p:spPr>
+        <p:style>
+          <a:lnRef idx="2">
+            <a:schemeClr val="accent1">
+              <a:shade val="15000"/>
+            </a:schemeClr>
+          </a:lnRef>
+          <a:fillRef idx="1">
+            <a:schemeClr val="accent1"/>
+          </a:fillRef>
+          <a:effectRef idx="0">
+            <a:schemeClr val="accent1"/>
+          </a:effectRef>
+          <a:fontRef idx="minor">
+            <a:schemeClr val="lt1"/>
+          </a:fontRef>
+        </p:style>
+        <p:txBody>
+          <a:bodyPr rtlCol="0" anchor="ctr"/>
+          <a:lstStyle/>
+          <a:p>
+            <a:pPr algn="ctr"/>
+            <a:endParaRPr kumimoji="1" lang="ja-JP" altLang="en-US" dirty="0">
+              <a:latin typeface="UD デジタル 教科書体 NP-B" panose="02020700000000000000" pitchFamily="18" charset="-128"/>
+              <a:ea typeface="UD デジタル 教科書体 NP-B" panose="02020700000000000000" pitchFamily="18" charset="-128"/>
+            </a:endParaRPr>
+          </a:p>
+        </p:txBody>
+      </p:sp>
+      <p:cxnSp>
+        <p:nvCxnSpPr>
+          <p:cNvPr id="24" name="直線コネクタ 23">
+            <a:extLst>
+              <a:ext uri="{FF2B5EF4-FFF2-40B4-BE49-F238E27FC236}">
+                <a16:creationId xmlns:a16="http://schemas.microsoft.com/office/drawing/2014/main" id="{A98BA035-FCD3-4C1B-5983-7D97005EED64}"/>
+              </a:ext>
+            </a:extLst>
+          </p:cNvPr>
+          <p:cNvCxnSpPr>
+            <a:cxnSpLocks/>
+          </p:cNvCxnSpPr>
+          <p:nvPr/>
+        </p:nvCxnSpPr>
+        <p:spPr>
+          <a:xfrm>
+            <a:off x="5889007" y="4503151"/>
+            <a:ext cx="0" cy="1071819"/>
+          </a:xfrm>
+          <a:prstGeom prst="line">
+            <a:avLst/>
+          </a:prstGeom>
+          <a:ln w="28575">
+            <a:solidFill>
+              <a:schemeClr val="tx1">
+                <a:lumMod val="65000"/>
+                <a:lumOff val="35000"/>
+              </a:schemeClr>
+            </a:solidFill>
+            <a:prstDash val="sysDash"/>
+          </a:ln>
+        </p:spPr>
+        <p:style>
+          <a:lnRef idx="1">
+            <a:schemeClr val="accent1"/>
+          </a:lnRef>
+          <a:fillRef idx="0">
+            <a:schemeClr val="accent1"/>
+          </a:fillRef>
+          <a:effectRef idx="0">
+            <a:schemeClr val="accent1"/>
+          </a:effectRef>
+          <a:fontRef idx="minor">
+            <a:schemeClr val="tx1"/>
+          </a:fontRef>
+        </p:style>
+      </p:cxnSp>
+      <p:cxnSp>
+        <p:nvCxnSpPr>
+          <p:cNvPr id="25" name="直線コネクタ 24">
+            <a:extLst>
+              <a:ext uri="{FF2B5EF4-FFF2-40B4-BE49-F238E27FC236}">
+                <a16:creationId xmlns:a16="http://schemas.microsoft.com/office/drawing/2014/main" id="{5A1B9551-DFD0-3479-9F98-502500C83DF4}"/>
+              </a:ext>
+            </a:extLst>
+          </p:cNvPr>
+          <p:cNvCxnSpPr>
+            <a:cxnSpLocks/>
+          </p:cNvCxnSpPr>
+          <p:nvPr/>
+        </p:nvCxnSpPr>
+        <p:spPr>
+          <a:xfrm>
+            <a:off x="4806361" y="4503151"/>
+            <a:ext cx="0" cy="1071819"/>
+          </a:xfrm>
+          <a:prstGeom prst="line">
+            <a:avLst/>
+          </a:prstGeom>
+          <a:ln w="28575">
+            <a:solidFill>
+              <a:schemeClr val="tx1">
+                <a:lumMod val="65000"/>
+                <a:lumOff val="35000"/>
+              </a:schemeClr>
+            </a:solidFill>
+            <a:prstDash val="sysDash"/>
+          </a:ln>
+        </p:spPr>
+        <p:style>
+          <a:lnRef idx="1">
+            <a:schemeClr val="accent1"/>
+          </a:lnRef>
+          <a:fillRef idx="0">
+            <a:schemeClr val="accent1"/>
+          </a:fillRef>
+          <a:effectRef idx="0">
+            <a:schemeClr val="accent1"/>
+          </a:effectRef>
+          <a:fontRef idx="minor">
+            <a:schemeClr val="tx1"/>
+          </a:fontRef>
+        </p:style>
+      </p:cxnSp>
+      <p:cxnSp>
+        <p:nvCxnSpPr>
+          <p:cNvPr id="26" name="直線コネクタ 25">
+            <a:extLst>
+              <a:ext uri="{FF2B5EF4-FFF2-40B4-BE49-F238E27FC236}">
+                <a16:creationId xmlns:a16="http://schemas.microsoft.com/office/drawing/2014/main" id="{FC06633C-B0F5-C9CC-4E4C-E4F52BA20D58}"/>
+              </a:ext>
+            </a:extLst>
+          </p:cNvPr>
+          <p:cNvCxnSpPr>
+            <a:cxnSpLocks/>
+          </p:cNvCxnSpPr>
+          <p:nvPr/>
+        </p:nvCxnSpPr>
+        <p:spPr>
+          <a:xfrm>
+            <a:off x="6969007" y="4507003"/>
+            <a:ext cx="0" cy="1071819"/>
+          </a:xfrm>
+          <a:prstGeom prst="line">
+            <a:avLst/>
+          </a:prstGeom>
+          <a:ln w="28575">
+            <a:solidFill>
+              <a:schemeClr val="tx1">
+                <a:lumMod val="65000"/>
+                <a:lumOff val="35000"/>
+              </a:schemeClr>
+            </a:solidFill>
+            <a:prstDash val="sysDash"/>
+          </a:ln>
+        </p:spPr>
+        <p:style>
+          <a:lnRef idx="1">
+            <a:schemeClr val="accent1"/>
+          </a:lnRef>
+          <a:fillRef idx="0">
+            <a:schemeClr val="accent1"/>
+          </a:fillRef>
+          <a:effectRef idx="0">
+            <a:schemeClr val="accent1"/>
+          </a:effectRef>
+          <a:fontRef idx="minor">
+            <a:schemeClr val="tx1"/>
+          </a:fontRef>
+        </p:style>
+      </p:cxnSp>
+      <p:sp>
+        <p:nvSpPr>
+          <p:cNvPr id="27" name="テキスト ボックス 26">
+            <a:extLst>
+              <a:ext uri="{FF2B5EF4-FFF2-40B4-BE49-F238E27FC236}">
+                <a16:creationId xmlns:a16="http://schemas.microsoft.com/office/drawing/2014/main" id="{43FCF835-A8BE-F5DF-597D-C87AD1EBCF8C}"/>
+              </a:ext>
+            </a:extLst>
+          </p:cNvPr>
+          <p:cNvSpPr txBox="1"/>
+          <p:nvPr/>
+        </p:nvSpPr>
+        <p:spPr>
+          <a:xfrm>
+            <a:off x="4507425" y="4292215"/>
+            <a:ext cx="706394" cy="261610"/>
+          </a:xfrm>
+          <a:prstGeom prst="rect">
+            <a:avLst/>
+          </a:prstGeom>
+          <a:noFill/>
+        </p:spPr>
+        <p:txBody>
+          <a:bodyPr wrap="square" rtlCol="0">
+            <a:spAutoFit/>
+          </a:bodyPr>
+          <a:lstStyle/>
+          <a:p>
+            <a:pPr algn="ctr"/>
+            <a:r>
+              <a:rPr lang="en-US" altLang="ja-JP" sz="1100" b="1" dirty="0">
+                <a:solidFill>
+                  <a:schemeClr val="bg2">
+                    <a:lumMod val="50000"/>
+                  </a:schemeClr>
+                </a:solidFill>
+                <a:latin typeface="UD デジタル 教科書体 NP-B" panose="02020700000000000000" pitchFamily="18" charset="-128"/>
+                <a:ea typeface="UD デジタル 教科書体 NP-B" panose="02020700000000000000" pitchFamily="18" charset="-128"/>
+              </a:rPr>
+              <a:t>25%</a:t>
+            </a:r>
+            <a:endParaRPr kumimoji="1" lang="ja-JP" altLang="en-US" sz="1100" b="1" dirty="0">
+              <a:solidFill>
+                <a:schemeClr val="bg2">
+                  <a:lumMod val="50000"/>
+                </a:schemeClr>
+              </a:solidFill>
+              <a:latin typeface="UD デジタル 教科書体 NP-B" panose="02020700000000000000" pitchFamily="18" charset="-128"/>
+              <a:ea typeface="UD デジタル 教科書体 NP-B" panose="02020700000000000000" pitchFamily="18" charset="-128"/>
+            </a:endParaRPr>
+          </a:p>
+        </p:txBody>
+      </p:sp>
+      <p:sp>
+        <p:nvSpPr>
+          <p:cNvPr id="28" name="テキスト ボックス 27">
+            <a:extLst>
+              <a:ext uri="{FF2B5EF4-FFF2-40B4-BE49-F238E27FC236}">
+                <a16:creationId xmlns:a16="http://schemas.microsoft.com/office/drawing/2014/main" id="{18EAD41C-2793-E747-3EA4-EA3CA0D3644C}"/>
+              </a:ext>
+            </a:extLst>
+          </p:cNvPr>
+          <p:cNvSpPr txBox="1"/>
+          <p:nvPr/>
+        </p:nvSpPr>
+        <p:spPr>
+          <a:xfrm>
+            <a:off x="3427953" y="4302096"/>
+            <a:ext cx="706394" cy="261610"/>
+          </a:xfrm>
+          <a:prstGeom prst="rect">
+            <a:avLst/>
+          </a:prstGeom>
+          <a:noFill/>
+        </p:spPr>
+        <p:txBody>
+          <a:bodyPr wrap="square" rtlCol="0">
+            <a:spAutoFit/>
+          </a:bodyPr>
+          <a:lstStyle/>
+          <a:p>
+            <a:pPr algn="ctr"/>
+            <a:r>
+              <a:rPr lang="en-US" altLang="ja-JP" sz="1100" b="1" dirty="0">
+                <a:solidFill>
+                  <a:schemeClr val="bg2">
+                    <a:lumMod val="50000"/>
+                  </a:schemeClr>
+                </a:solidFill>
+                <a:latin typeface="UD デジタル 教科書体 NP-B" panose="02020700000000000000" pitchFamily="18" charset="-128"/>
+                <a:ea typeface="UD デジタル 教科書体 NP-B" panose="02020700000000000000" pitchFamily="18" charset="-128"/>
+              </a:rPr>
+              <a:t>0%</a:t>
+            </a:r>
+            <a:endParaRPr kumimoji="1" lang="ja-JP" altLang="en-US" sz="1100" b="1" dirty="0">
+              <a:solidFill>
+                <a:schemeClr val="bg2">
+                  <a:lumMod val="50000"/>
+                </a:schemeClr>
+              </a:solidFill>
+              <a:latin typeface="UD デジタル 教科書体 NP-B" panose="02020700000000000000" pitchFamily="18" charset="-128"/>
+              <a:ea typeface="UD デジタル 教科書体 NP-B" panose="02020700000000000000" pitchFamily="18" charset="-128"/>
+            </a:endParaRPr>
+          </a:p>
+        </p:txBody>
+      </p:sp>
+      <p:sp>
+        <p:nvSpPr>
+          <p:cNvPr id="29" name="テキスト ボックス 28">
+            <a:extLst>
+              <a:ext uri="{FF2B5EF4-FFF2-40B4-BE49-F238E27FC236}">
+                <a16:creationId xmlns:a16="http://schemas.microsoft.com/office/drawing/2014/main" id="{E4F3539A-4A4A-D0ED-D9EE-258E5C40DDE2}"/>
+              </a:ext>
+            </a:extLst>
+          </p:cNvPr>
+          <p:cNvSpPr txBox="1"/>
+          <p:nvPr/>
+        </p:nvSpPr>
+        <p:spPr>
+          <a:xfrm>
+            <a:off x="6640345" y="4295539"/>
+            <a:ext cx="706394" cy="261610"/>
+          </a:xfrm>
+          <a:prstGeom prst="rect">
+            <a:avLst/>
+          </a:prstGeom>
+          <a:noFill/>
+        </p:spPr>
+        <p:txBody>
+          <a:bodyPr wrap="square" rtlCol="0">
+            <a:spAutoFit/>
+          </a:bodyPr>
+          <a:lstStyle/>
+          <a:p>
+            <a:pPr algn="ctr"/>
+            <a:r>
+              <a:rPr lang="en-US" altLang="ja-JP" sz="1100" b="1" dirty="0">
+                <a:solidFill>
+                  <a:schemeClr val="bg2">
+                    <a:lumMod val="50000"/>
+                  </a:schemeClr>
+                </a:solidFill>
+                <a:latin typeface="UD デジタル 教科書体 NP-B" panose="02020700000000000000" pitchFamily="18" charset="-128"/>
+                <a:ea typeface="UD デジタル 教科書体 NP-B" panose="02020700000000000000" pitchFamily="18" charset="-128"/>
+              </a:rPr>
+              <a:t>75%</a:t>
+            </a:r>
+            <a:endParaRPr kumimoji="1" lang="ja-JP" altLang="en-US" sz="1100" b="1" dirty="0">
+              <a:solidFill>
+                <a:schemeClr val="bg2">
+                  <a:lumMod val="50000"/>
+                </a:schemeClr>
+              </a:solidFill>
+              <a:latin typeface="UD デジタル 教科書体 NP-B" panose="02020700000000000000" pitchFamily="18" charset="-128"/>
+              <a:ea typeface="UD デジタル 教科書体 NP-B" panose="02020700000000000000" pitchFamily="18" charset="-128"/>
+            </a:endParaRPr>
+          </a:p>
+        </p:txBody>
+      </p:sp>
+      <p:sp>
+        <p:nvSpPr>
+          <p:cNvPr id="30" name="テキスト ボックス 29">
+            <a:extLst>
+              <a:ext uri="{FF2B5EF4-FFF2-40B4-BE49-F238E27FC236}">
+                <a16:creationId xmlns:a16="http://schemas.microsoft.com/office/drawing/2014/main" id="{4A9ABF82-478C-1AF0-3186-8B668CFD6F67}"/>
+              </a:ext>
+            </a:extLst>
+          </p:cNvPr>
+          <p:cNvSpPr txBox="1"/>
+          <p:nvPr/>
+        </p:nvSpPr>
+        <p:spPr>
+          <a:xfrm>
+            <a:off x="5581140" y="4294518"/>
+            <a:ext cx="706394" cy="261610"/>
+          </a:xfrm>
+          <a:prstGeom prst="rect">
+            <a:avLst/>
+          </a:prstGeom>
+          <a:noFill/>
+        </p:spPr>
+        <p:txBody>
+          <a:bodyPr wrap="square" rtlCol="0">
+            <a:spAutoFit/>
+          </a:bodyPr>
+          <a:lstStyle/>
+          <a:p>
+            <a:pPr algn="ctr"/>
+            <a:r>
+              <a:rPr lang="en-US" altLang="ja-JP" sz="1100" b="1" dirty="0">
+                <a:solidFill>
+                  <a:schemeClr val="bg2">
+                    <a:lumMod val="50000"/>
+                  </a:schemeClr>
+                </a:solidFill>
+                <a:latin typeface="UD デジタル 教科書体 NP-B" panose="02020700000000000000" pitchFamily="18" charset="-128"/>
+                <a:ea typeface="UD デジタル 教科書体 NP-B" panose="02020700000000000000" pitchFamily="18" charset="-128"/>
+              </a:rPr>
+              <a:t>50%</a:t>
+            </a:r>
+            <a:endParaRPr kumimoji="1" lang="ja-JP" altLang="en-US" sz="1100" b="1" dirty="0">
+              <a:solidFill>
+                <a:schemeClr val="bg2">
+                  <a:lumMod val="50000"/>
+                </a:schemeClr>
+              </a:solidFill>
+              <a:latin typeface="UD デジタル 教科書体 NP-B" panose="02020700000000000000" pitchFamily="18" charset="-128"/>
+              <a:ea typeface="UD デジタル 教科書体 NP-B" panose="02020700000000000000" pitchFamily="18" charset="-128"/>
+            </a:endParaRPr>
+          </a:p>
+        </p:txBody>
+      </p:sp>
+      <p:sp>
+        <p:nvSpPr>
+          <p:cNvPr id="31" name="テキスト ボックス 30">
+            <a:extLst>
+              <a:ext uri="{FF2B5EF4-FFF2-40B4-BE49-F238E27FC236}">
+                <a16:creationId xmlns:a16="http://schemas.microsoft.com/office/drawing/2014/main" id="{C10EBBCC-713B-1570-57EB-5A43E34264D5}"/>
+              </a:ext>
+            </a:extLst>
+          </p:cNvPr>
+          <p:cNvSpPr txBox="1"/>
+          <p:nvPr/>
+        </p:nvSpPr>
+        <p:spPr>
+          <a:xfrm>
+            <a:off x="7659092" y="4280566"/>
+            <a:ext cx="829732" cy="261610"/>
+          </a:xfrm>
+          <a:prstGeom prst="rect">
+            <a:avLst/>
+          </a:prstGeom>
+          <a:noFill/>
+        </p:spPr>
+        <p:txBody>
+          <a:bodyPr wrap="square" rtlCol="0">
+            <a:spAutoFit/>
+          </a:bodyPr>
+          <a:lstStyle/>
+          <a:p>
+            <a:pPr algn="ctr"/>
+            <a:r>
+              <a:rPr lang="en-US" altLang="ja-JP" sz="1100" b="1" dirty="0">
+                <a:solidFill>
+                  <a:schemeClr val="bg2">
+                    <a:lumMod val="50000"/>
+                  </a:schemeClr>
+                </a:solidFill>
+                <a:latin typeface="UD デジタル 教科書体 NP-B" panose="02020700000000000000" pitchFamily="18" charset="-128"/>
+                <a:ea typeface="UD デジタル 教科書体 NP-B" panose="02020700000000000000" pitchFamily="18" charset="-128"/>
+              </a:rPr>
+              <a:t>100%</a:t>
+            </a:r>
+            <a:endParaRPr kumimoji="1" lang="ja-JP" altLang="en-US" sz="1100" b="1" dirty="0">
+              <a:solidFill>
+                <a:schemeClr val="bg2">
+                  <a:lumMod val="50000"/>
+                </a:schemeClr>
+              </a:solidFill>
+              <a:latin typeface="UD デジタル 教科書体 NP-B" panose="02020700000000000000" pitchFamily="18" charset="-128"/>
+              <a:ea typeface="UD デジタル 教科書体 NP-B" panose="02020700000000000000" pitchFamily="18" charset="-128"/>
+            </a:endParaRPr>
+          </a:p>
+        </p:txBody>
+      </p:sp>
+      <p:sp>
+        <p:nvSpPr>
+          <p:cNvPr id="34" name="テキスト ボックス 33">
+            <a:extLst>
+              <a:ext uri="{FF2B5EF4-FFF2-40B4-BE49-F238E27FC236}">
+                <a16:creationId xmlns:a16="http://schemas.microsoft.com/office/drawing/2014/main" id="{B288B3DB-9BC9-1FC6-42C8-70CCDF749A67}"/>
+              </a:ext>
+            </a:extLst>
+          </p:cNvPr>
+          <p:cNvSpPr txBox="1"/>
+          <p:nvPr/>
+        </p:nvSpPr>
+        <p:spPr>
+          <a:xfrm>
+            <a:off x="9714474" y="25207"/>
+            <a:ext cx="2334004" cy="415498"/>
+          </a:xfrm>
+          <a:prstGeom prst="rect">
+            <a:avLst/>
+          </a:prstGeom>
+          <a:noFill/>
+        </p:spPr>
+        <p:txBody>
+          <a:bodyPr wrap="square" rtlCol="0">
+            <a:spAutoFit/>
+          </a:bodyPr>
+          <a:lstStyle/>
+          <a:p>
+            <a:pPr algn="r"/>
+            <a:r>
+              <a:rPr lang="en-US" altLang="ja-JP" sz="1050" dirty="0">
+                <a:solidFill>
+                  <a:schemeClr val="tx1">
+                    <a:lumMod val="65000"/>
+                    <a:lumOff val="35000"/>
+                  </a:schemeClr>
+                </a:solidFill>
+                <a:latin typeface="UD デジタル 教科書体 NP-B" panose="02020700000000000000" pitchFamily="18" charset="-128"/>
+                <a:ea typeface="UD デジタル 教科書体 NP-B" panose="02020700000000000000" pitchFamily="18" charset="-128"/>
+              </a:rPr>
+              <a:t>LAST UPDATE: 2026-08-31 15:21 </a:t>
+            </a:r>
+            <a:endParaRPr kumimoji="1" lang="ja-JP" altLang="en-US" sz="1050" dirty="0">
+              <a:solidFill>
+                <a:schemeClr val="tx1">
+                  <a:lumMod val="65000"/>
+                  <a:lumOff val="35000"/>
+                </a:schemeClr>
+              </a:solidFill>
+              <a:latin typeface="UD デジタル 教科書体 NP-B" panose="02020700000000000000" pitchFamily="18" charset="-128"/>
+              <a:ea typeface="UD デジタル 教科書体 NP-B" panose="02020700000000000000" pitchFamily="18" charset="-128"/>
+            </a:endParaRPr>
+          </a:p>
+        </p:txBody>
+      </p:sp>
+      <p:pic>
+        <p:nvPicPr>
+          <p:cNvPr id="8" name="図 7" descr="吹き出しイラスト｜無料イラスト・フリー素材なら「イラストAC」">
+            <a:extLst>
+              <a:ext uri="{FF2B5EF4-FFF2-40B4-BE49-F238E27FC236}">
+                <a16:creationId xmlns:a16="http://schemas.microsoft.com/office/drawing/2014/main" id="{C0D58FF2-874D-E1EB-254A-080714E48A69}"/>
+              </a:ext>
+            </a:extLst>
+          </p:cNvPr>
+          <p:cNvPicPr>
+            <a:picLocks noChangeAspect="1"/>
+          </p:cNvPicPr>
+          <p:nvPr/>
+        </p:nvPicPr>
+        <p:blipFill>
+          <a:blip r:embed="rId3"/>
+          <a:srcRect l="4036" t="17354" r="71241" b="55671"/>
+          <a:stretch>
+            <a:fillRect/>
+          </a:stretch>
+        </p:blipFill>
+        <p:spPr>
+          <a:xfrm flipH="1">
+            <a:off x="10835175" y="4301740"/>
+            <a:ext cx="962016" cy="730635"/>
+          </a:xfrm>
+          <a:prstGeom prst="rect">
+            <a:avLst/>
+          </a:prstGeom>
+        </p:spPr>
+      </p:pic>
+      <p:pic>
+        <p:nvPicPr>
+          <p:cNvPr id="36" name="図 35" descr="Épinglé par Marga Díaz-Madroñero Rodríguez sur CRAFT BUNDLES">
+            <a:extLst>
+              <a:ext uri="{FF2B5EF4-FFF2-40B4-BE49-F238E27FC236}">
+                <a16:creationId xmlns:a16="http://schemas.microsoft.com/office/drawing/2014/main" id="{039E8649-9ECC-716C-5213-7FE36DB5F89D}"/>
+              </a:ext>
+            </a:extLst>
+          </p:cNvPr>
+          <p:cNvPicPr>
+            <a:picLocks noChangeAspect="1"/>
+          </p:cNvPicPr>
+          <p:nvPr/>
+        </p:nvPicPr>
+        <p:blipFill>
+          <a:blip r:embed="rId4"/>
+          <a:srcRect t="16103" b="15348"/>
+          <a:stretch>
+            <a:fillRect/>
+          </a:stretch>
+        </p:blipFill>
+        <p:spPr>
+          <a:xfrm>
+            <a:off x="10957646" y="4432545"/>
+            <a:ext cx="721854" cy="494822"/>
+          </a:xfrm>
+          <a:prstGeom prst="rect">
+            <a:avLst/>
+          </a:prstGeom>
+        </p:spPr>
+      </p:pic>
+      <p:pic>
+        <p:nvPicPr>
+          <p:cNvPr id="5" name="図 4">
+            <a:extLst>
+              <a:ext uri="{FF2B5EF4-FFF2-40B4-BE49-F238E27FC236}">
+                <a16:creationId xmlns:a16="http://schemas.microsoft.com/office/drawing/2014/main" id="{5C37BDB4-0CD1-D98A-3AAA-4F9F9EDAF6CD}"/>
+              </a:ext>
+            </a:extLst>
+          </p:cNvPr>
+          <p:cNvPicPr>
+            <a:picLocks noChangeAspect="1"/>
+          </p:cNvPicPr>
+          <p:nvPr/>
+        </p:nvPicPr>
+        <p:blipFill>
+          <a:blip r:embed="rId5">
+            <a:extLst>
+              <a:ext uri="{28A0092B-C50C-407E-A947-70E740481C1C}">
+                <a14:useLocalDpi xmlns:a14="http://schemas.microsoft.com/office/drawing/2010/main" val="0"/>
+              </a:ext>
+            </a:extLst>
+          </a:blip>
+          <a:srcRect l="18522" t="2599" r="18442" b="1444"/>
+          <a:stretch>
+            <a:fillRect/>
+          </a:stretch>
+        </p:blipFill>
+        <p:spPr>
+          <a:xfrm>
+            <a:off x="9612735" y="4353799"/>
+            <a:ext cx="1432397" cy="2180493"/>
+          </a:xfrm>
+          <a:prstGeom prst="rect">
+            <a:avLst/>
+          </a:prstGeom>
+        </p:spPr>
+      </p:pic>
+      <p:pic>
+        <p:nvPicPr>
+          <p:cNvPr id="37" name="図 36">
+            <a:extLst>
+              <a:ext uri="{FF2B5EF4-FFF2-40B4-BE49-F238E27FC236}">
+                <a16:creationId xmlns:a16="http://schemas.microsoft.com/office/drawing/2014/main" id="{D530D17C-EA53-D91E-B09A-7F63FAD82B09}"/>
+              </a:ext>
+            </a:extLst>
+          </p:cNvPr>
+          <p:cNvPicPr>
+            <a:picLocks noChangeAspect="1"/>
+          </p:cNvPicPr>
+          <p:nvPr/>
+        </p:nvPicPr>
+        <p:blipFill>
+          <a:blip r:embed="rId6">
+            <a:extLst>
+              <a:ext uri="{28A0092B-C50C-407E-A947-70E740481C1C}">
+                <a14:useLocalDpi xmlns:a14="http://schemas.microsoft.com/office/drawing/2010/main" val="0"/>
+              </a:ext>
+            </a:extLst>
+          </a:blip>
+          <a:srcRect l="4404" r="10617" b="14717"/>
+          <a:stretch>
+            <a:fillRect/>
+          </a:stretch>
+        </p:blipFill>
+        <p:spPr>
+          <a:xfrm>
+            <a:off x="10535461" y="2090256"/>
+            <a:ext cx="664369" cy="830119"/>
+          </a:xfrm>
+          <a:prstGeom prst="rect">
+            <a:avLst/>
+          </a:prstGeom>
+          <a:ln>
+            <a:solidFill>
+              <a:schemeClr val="bg1">
+                <a:lumMod val="50000"/>
+              </a:schemeClr>
+            </a:solidFill>
+          </a:ln>
+        </p:spPr>
+      </p:pic>
+      <p:pic>
+        <p:nvPicPr>
+          <p:cNvPr id="39" name="図 38">
+            <a:extLst>
+              <a:ext uri="{FF2B5EF4-FFF2-40B4-BE49-F238E27FC236}">
+                <a16:creationId xmlns:a16="http://schemas.microsoft.com/office/drawing/2014/main" id="{0C079C47-265D-0227-5B74-463066D105AA}"/>
+              </a:ext>
+            </a:extLst>
+          </p:cNvPr>
+          <p:cNvPicPr>
+            <a:picLocks noChangeAspect="1"/>
+          </p:cNvPicPr>
+          <p:nvPr/>
+        </p:nvPicPr>
+        <p:blipFill>
+          <a:blip r:embed="rId7">
+            <a:extLst>
+              <a:ext uri="{28A0092B-C50C-407E-A947-70E740481C1C}">
+                <a14:useLocalDpi xmlns:a14="http://schemas.microsoft.com/office/drawing/2010/main" val="0"/>
+              </a:ext>
+            </a:extLst>
+          </a:blip>
+          <a:srcRect l="9619" r="5570" b="14699"/>
+          <a:stretch>
+            <a:fillRect/>
+          </a:stretch>
+        </p:blipFill>
+        <p:spPr>
+          <a:xfrm>
+            <a:off x="9799409" y="855919"/>
+            <a:ext cx="673894" cy="831408"/>
+          </a:xfrm>
+          <a:prstGeom prst="rect">
+            <a:avLst/>
+          </a:prstGeom>
+          <a:ln>
+            <a:solidFill>
+              <a:schemeClr val="bg1">
+                <a:lumMod val="50000"/>
+              </a:schemeClr>
+            </a:solidFill>
+          </a:ln>
+        </p:spPr>
+      </p:pic>
+      <p:pic>
+        <p:nvPicPr>
+          <p:cNvPr id="41" name="図 40">
+            <a:extLst>
+              <a:ext uri="{FF2B5EF4-FFF2-40B4-BE49-F238E27FC236}">
+                <a16:creationId xmlns:a16="http://schemas.microsoft.com/office/drawing/2014/main" id="{C7D11F10-0227-D5FE-34D3-2310B79ADE9F}"/>
+              </a:ext>
+            </a:extLst>
+          </p:cNvPr>
+          <p:cNvPicPr>
+            <a:picLocks noChangeAspect="1"/>
+          </p:cNvPicPr>
+          <p:nvPr/>
+        </p:nvPicPr>
+        <p:blipFill>
+          <a:blip r:embed="rId8">
+            <a:extLst>
+              <a:ext uri="{28A0092B-C50C-407E-A947-70E740481C1C}">
+                <a14:useLocalDpi xmlns:a14="http://schemas.microsoft.com/office/drawing/2010/main" val="0"/>
+              </a:ext>
+            </a:extLst>
+          </a:blip>
+          <a:srcRect l="3822" t="4723" r="3558" b="9569"/>
+          <a:stretch>
+            <a:fillRect/>
+          </a:stretch>
+        </p:blipFill>
+        <p:spPr>
+          <a:xfrm>
+            <a:off x="11215705" y="864282"/>
+            <a:ext cx="659606" cy="830118"/>
+          </a:xfrm>
+          <a:prstGeom prst="rect">
+            <a:avLst/>
+          </a:prstGeom>
+          <a:ln>
+            <a:solidFill>
+              <a:schemeClr val="bg1">
+                <a:lumMod val="50000"/>
+              </a:schemeClr>
+            </a:solidFill>
+          </a:ln>
+        </p:spPr>
+      </p:pic>
+      <p:pic>
+        <p:nvPicPr>
+          <p:cNvPr id="45" name="図 44">
+            <a:extLst>
+              <a:ext uri="{FF2B5EF4-FFF2-40B4-BE49-F238E27FC236}">
+                <a16:creationId xmlns:a16="http://schemas.microsoft.com/office/drawing/2014/main" id="{9AF8F646-500B-FF8E-B620-AA39561E5229}"/>
+              </a:ext>
+            </a:extLst>
+          </p:cNvPr>
+          <p:cNvPicPr>
+            <a:picLocks noChangeAspect="1"/>
+          </p:cNvPicPr>
+          <p:nvPr/>
+        </p:nvPicPr>
+        <p:blipFill>
+          <a:blip r:embed="rId9">
+            <a:extLst>
+              <a:ext uri="{28A0092B-C50C-407E-A947-70E740481C1C}">
+                <a14:useLocalDpi xmlns:a14="http://schemas.microsoft.com/office/drawing/2010/main" val="0"/>
+              </a:ext>
+            </a:extLst>
+          </a:blip>
+          <a:srcRect l="7680" t="5584" r="5873"/>
+          <a:stretch>
+            <a:fillRect/>
+          </a:stretch>
+        </p:blipFill>
+        <p:spPr>
+          <a:xfrm>
+            <a:off x="9826176" y="2090613"/>
+            <a:ext cx="661987" cy="830119"/>
+          </a:xfrm>
+          <a:prstGeom prst="rect">
+            <a:avLst/>
+          </a:prstGeom>
+          <a:ln>
+            <a:solidFill>
+              <a:schemeClr val="bg1">
+                <a:lumMod val="50000"/>
+              </a:schemeClr>
+            </a:solidFill>
+          </a:ln>
+        </p:spPr>
+      </p:pic>
+      <p:pic>
+        <p:nvPicPr>
+          <p:cNvPr id="47" name="図 46">
+            <a:extLst>
+              <a:ext uri="{FF2B5EF4-FFF2-40B4-BE49-F238E27FC236}">
+                <a16:creationId xmlns:a16="http://schemas.microsoft.com/office/drawing/2014/main" id="{F563D668-13B1-A2ED-82D8-562902AD5945}"/>
+              </a:ext>
+            </a:extLst>
+          </p:cNvPr>
+          <p:cNvPicPr>
+            <a:picLocks noChangeAspect="1"/>
+          </p:cNvPicPr>
+          <p:nvPr/>
+        </p:nvPicPr>
+        <p:blipFill>
+          <a:blip r:embed="rId10">
+            <a:extLst>
+              <a:ext uri="{28A0092B-C50C-407E-A947-70E740481C1C}">
+                <a14:useLocalDpi xmlns:a14="http://schemas.microsoft.com/office/drawing/2010/main" val="0"/>
+              </a:ext>
+            </a:extLst>
+          </a:blip>
+          <a:srcRect l="7095" r="5449" b="7510"/>
+          <a:stretch>
+            <a:fillRect/>
+          </a:stretch>
+        </p:blipFill>
+        <p:spPr>
+          <a:xfrm>
+            <a:off x="10515405" y="865595"/>
+            <a:ext cx="649778" cy="821732"/>
+          </a:xfrm>
+          <a:prstGeom prst="rect">
+            <a:avLst/>
+          </a:prstGeom>
+          <a:ln>
+            <a:solidFill>
+              <a:schemeClr val="bg1">
+                <a:lumMod val="50000"/>
+              </a:schemeClr>
+            </a:solidFill>
+          </a:ln>
+        </p:spPr>
+      </p:pic>
+      <p:pic>
+        <p:nvPicPr>
+          <p:cNvPr id="49" name="図 48">
+            <a:extLst>
+              <a:ext uri="{FF2B5EF4-FFF2-40B4-BE49-F238E27FC236}">
+                <a16:creationId xmlns:a16="http://schemas.microsoft.com/office/drawing/2014/main" id="{A8F7C139-4D4A-E090-5677-AF9CCAFF7262}"/>
+              </a:ext>
+            </a:extLst>
+          </p:cNvPr>
+          <p:cNvPicPr>
+            <a:picLocks noChangeAspect="1"/>
+          </p:cNvPicPr>
+          <p:nvPr/>
+        </p:nvPicPr>
+        <p:blipFill>
+          <a:blip r:embed="rId11">
+            <a:extLst>
+              <a:ext uri="{28A0092B-C50C-407E-A947-70E740481C1C}">
+                <a14:useLocalDpi xmlns:a14="http://schemas.microsoft.com/office/drawing/2010/main" val="0"/>
+              </a:ext>
+            </a:extLst>
+          </a:blip>
+          <a:srcRect l="19557" t="4725" r="18754" b="21081"/>
+          <a:stretch>
+            <a:fillRect/>
+          </a:stretch>
+        </p:blipFill>
+        <p:spPr>
+          <a:xfrm>
+            <a:off x="1024514" y="865595"/>
+            <a:ext cx="645286" cy="821732"/>
+          </a:xfrm>
+          <a:prstGeom prst="rect">
+            <a:avLst/>
+          </a:prstGeom>
+          <a:ln>
+            <a:solidFill>
+              <a:schemeClr val="bg1">
+                <a:lumMod val="50000"/>
+              </a:schemeClr>
+            </a:solidFill>
+          </a:ln>
+        </p:spPr>
+      </p:pic>
+      <p:pic>
+        <p:nvPicPr>
+          <p:cNvPr id="51" name="図 50">
+            <a:extLst>
+              <a:ext uri="{FF2B5EF4-FFF2-40B4-BE49-F238E27FC236}">
+                <a16:creationId xmlns:a16="http://schemas.microsoft.com/office/drawing/2014/main" id="{3D3CA826-AC82-C7EB-8C7A-30B26759F510}"/>
+              </a:ext>
+            </a:extLst>
+          </p:cNvPr>
+          <p:cNvPicPr>
+            <a:picLocks noChangeAspect="1"/>
+          </p:cNvPicPr>
+          <p:nvPr/>
+        </p:nvPicPr>
+        <p:blipFill>
+          <a:blip r:embed="rId12">
+            <a:extLst>
+              <a:ext uri="{28A0092B-C50C-407E-A947-70E740481C1C}">
+                <a14:useLocalDpi xmlns:a14="http://schemas.microsoft.com/office/drawing/2010/main" val="0"/>
+              </a:ext>
+            </a:extLst>
+          </a:blip>
+          <a:srcRect l="17213" t="5840" r="17166" b="22885"/>
+          <a:stretch>
+            <a:fillRect/>
+          </a:stretch>
+        </p:blipFill>
+        <p:spPr>
+          <a:xfrm>
+            <a:off x="312287" y="865594"/>
+            <a:ext cx="667326" cy="821733"/>
+          </a:xfrm>
+          <a:prstGeom prst="rect">
+            <a:avLst/>
+          </a:prstGeom>
+          <a:ln>
+            <a:solidFill>
+              <a:schemeClr val="bg1">
+                <a:lumMod val="50000"/>
+              </a:schemeClr>
+            </a:solidFill>
+          </a:ln>
+        </p:spPr>
+      </p:pic>
+      <p:pic>
+        <p:nvPicPr>
+          <p:cNvPr id="55" name="図 54">
+            <a:extLst>
+              <a:ext uri="{FF2B5EF4-FFF2-40B4-BE49-F238E27FC236}">
+                <a16:creationId xmlns:a16="http://schemas.microsoft.com/office/drawing/2014/main" id="{5D93DA9A-E35E-2C14-801D-A862F63982B6}"/>
+              </a:ext>
+            </a:extLst>
+          </p:cNvPr>
+          <p:cNvPicPr>
+            <a:picLocks noChangeAspect="1"/>
+          </p:cNvPicPr>
+          <p:nvPr/>
+        </p:nvPicPr>
+        <p:blipFill>
+          <a:blip r:embed="rId13">
+            <a:extLst>
+              <a:ext uri="{28A0092B-C50C-407E-A947-70E740481C1C}">
+                <a14:useLocalDpi xmlns:a14="http://schemas.microsoft.com/office/drawing/2010/main" val="0"/>
+              </a:ext>
+            </a:extLst>
+          </a:blip>
+          <a:stretch>
+            <a:fillRect/>
+          </a:stretch>
+        </p:blipFill>
+        <p:spPr>
+          <a:xfrm>
+            <a:off x="1009802" y="2036424"/>
+            <a:ext cx="637550" cy="821732"/>
+          </a:xfrm>
+          <a:prstGeom prst="rect">
+            <a:avLst/>
+          </a:prstGeom>
+          <a:ln>
+            <a:solidFill>
+              <a:schemeClr val="bg1">
+                <a:lumMod val="50000"/>
+              </a:schemeClr>
+            </a:solidFill>
+          </a:ln>
+        </p:spPr>
+      </p:pic>
+      <p:pic>
+        <p:nvPicPr>
+          <p:cNvPr id="57" name="図 56">
+            <a:extLst>
+              <a:ext uri="{FF2B5EF4-FFF2-40B4-BE49-F238E27FC236}">
+                <a16:creationId xmlns:a16="http://schemas.microsoft.com/office/drawing/2014/main" id="{300D88AB-3E8A-7056-4100-E598CA528B67}"/>
+              </a:ext>
+            </a:extLst>
+          </p:cNvPr>
+          <p:cNvPicPr>
+            <a:picLocks noChangeAspect="1"/>
+          </p:cNvPicPr>
+          <p:nvPr/>
+        </p:nvPicPr>
+        <p:blipFill>
+          <a:blip r:embed="rId14">
+            <a:extLst>
+              <a:ext uri="{28A0092B-C50C-407E-A947-70E740481C1C}">
+                <a14:useLocalDpi xmlns:a14="http://schemas.microsoft.com/office/drawing/2010/main" val="0"/>
+              </a:ext>
+            </a:extLst>
+          </a:blip>
+          <a:srcRect l="8280" r="10371"/>
+          <a:stretch>
+            <a:fillRect/>
+          </a:stretch>
+        </p:blipFill>
+        <p:spPr>
+          <a:xfrm>
+            <a:off x="319865" y="2036424"/>
+            <a:ext cx="637550" cy="821732"/>
+          </a:xfrm>
+          <a:prstGeom prst="rect">
+            <a:avLst/>
+          </a:prstGeom>
+          <a:ln>
+            <a:solidFill>
+              <a:schemeClr val="bg1">
+                <a:lumMod val="50000"/>
+              </a:schemeClr>
+            </a:solidFill>
+          </a:ln>
+        </p:spPr>
+      </p:pic>
+      <p:pic>
+        <p:nvPicPr>
+          <p:cNvPr id="53" name="図 52">
+            <a:extLst>
+              <a:ext uri="{FF2B5EF4-FFF2-40B4-BE49-F238E27FC236}">
+                <a16:creationId xmlns:a16="http://schemas.microsoft.com/office/drawing/2014/main" id="{877791DE-E174-B6D8-F953-A32EB12FD8D2}"/>
+              </a:ext>
+            </a:extLst>
+          </p:cNvPr>
+          <p:cNvPicPr>
+            <a:picLocks noChangeAspect="1"/>
+          </p:cNvPicPr>
+          <p:nvPr/>
+        </p:nvPicPr>
+        <p:blipFill>
+          <a:blip r:embed="rId15">
+            <a:extLst>
+              <a:ext uri="{28A0092B-C50C-407E-A947-70E740481C1C}">
+                <a14:useLocalDpi xmlns:a14="http://schemas.microsoft.com/office/drawing/2010/main" val="0"/>
+              </a:ext>
+            </a:extLst>
+          </a:blip>
+          <a:srcRect l="19766" t="7389" r="14631" b="19292"/>
+          <a:stretch>
+            <a:fillRect/>
+          </a:stretch>
+        </p:blipFill>
+        <p:spPr>
+          <a:xfrm>
+            <a:off x="1702330" y="865595"/>
+            <a:ext cx="667326" cy="821732"/>
+          </a:xfrm>
+          <a:prstGeom prst="rect">
+            <a:avLst/>
+          </a:prstGeom>
+          <a:ln>
+            <a:solidFill>
+              <a:schemeClr val="bg1">
+                <a:lumMod val="50000"/>
+              </a:schemeClr>
+            </a:solidFill>
+          </a:ln>
+        </p:spPr>
+      </p:pic>
+      <p:sp>
+        <p:nvSpPr>
+          <p:cNvPr id="62" name="テキスト ボックス 61">
+            <a:extLst>
+              <a:ext uri="{FF2B5EF4-FFF2-40B4-BE49-F238E27FC236}">
+                <a16:creationId xmlns:a16="http://schemas.microsoft.com/office/drawing/2014/main" id="{E1769FC6-0F08-6190-B346-5EFD3B42C01A}"/>
+              </a:ext>
+            </a:extLst>
+          </p:cNvPr>
+          <p:cNvSpPr txBox="1"/>
+          <p:nvPr/>
+        </p:nvSpPr>
+        <p:spPr>
+          <a:xfrm>
+            <a:off x="4425296" y="628190"/>
+            <a:ext cx="2640975" cy="253916"/>
+          </a:xfrm>
+          <a:prstGeom prst="rect">
+            <a:avLst/>
+          </a:prstGeom>
+          <a:noFill/>
+        </p:spPr>
+        <p:txBody>
+          <a:bodyPr wrap="square" rtlCol="0">
+            <a:spAutoFit/>
+          </a:bodyPr>
+          <a:lstStyle/>
+          <a:p>
+            <a:pPr algn="ctr"/>
+            <a:r>
+              <a:rPr kumimoji="1" lang="en-US" altLang="ja-JP" sz="1050" dirty="0">
+                <a:solidFill>
+                  <a:schemeClr val="tx1">
+                    <a:lumMod val="65000"/>
+                    <a:lumOff val="35000"/>
+                  </a:schemeClr>
+                </a:solidFill>
+                <a:latin typeface="UD デジタル 教科書体 NP-B" panose="02020700000000000000" pitchFamily="18" charset="-128"/>
+                <a:ea typeface="UD デジタル 教科書体 NP-B" panose="02020700000000000000" pitchFamily="18" charset="-128"/>
+              </a:rPr>
+              <a:t>EL</a:t>
+            </a:r>
+            <a:r>
+              <a:rPr lang="en-US" altLang="ja-JP" sz="1050" dirty="0">
+                <a:solidFill>
+                  <a:schemeClr val="tx1">
+                    <a:lumMod val="65000"/>
+                    <a:lumOff val="35000"/>
+                  </a:schemeClr>
+                </a:solidFill>
+                <a:latin typeface="UD デジタル 教科書体 NP-B" panose="02020700000000000000" pitchFamily="18" charset="-128"/>
+                <a:ea typeface="UD デジタル 教科書体 NP-B" panose="02020700000000000000" pitchFamily="18" charset="-128"/>
+              </a:rPr>
+              <a:t>APSED TIME = 3:45</a:t>
+            </a:r>
+            <a:endParaRPr kumimoji="1" lang="ja-JP" altLang="en-US" sz="1050" dirty="0">
+              <a:solidFill>
+                <a:schemeClr val="tx1">
+                  <a:lumMod val="65000"/>
+                  <a:lumOff val="35000"/>
+                </a:schemeClr>
+              </a:solidFill>
+              <a:latin typeface="UD デジタル 教科書体 NP-B" panose="02020700000000000000" pitchFamily="18" charset="-128"/>
+              <a:ea typeface="UD デジタル 教科書体 NP-B" panose="02020700000000000000" pitchFamily="18" charset="-128"/>
+            </a:endParaRPr>
+          </a:p>
+        </p:txBody>
+      </p:sp>
+      <p:sp>
+        <p:nvSpPr>
+          <p:cNvPr id="63" name="正方形/長方形 62">
+            <a:extLst>
+              <a:ext uri="{FF2B5EF4-FFF2-40B4-BE49-F238E27FC236}">
+                <a16:creationId xmlns:a16="http://schemas.microsoft.com/office/drawing/2014/main" id="{F82BE115-074E-E870-B61B-91E8636E53DA}"/>
+              </a:ext>
+            </a:extLst>
+          </p:cNvPr>
+          <p:cNvSpPr/>
+          <p:nvPr/>
+        </p:nvSpPr>
+        <p:spPr>
+          <a:xfrm>
+            <a:off x="6631104" y="2564859"/>
+            <a:ext cx="826796" cy="226315"/>
+          </a:xfrm>
+          <a:prstGeom prst="rect">
+            <a:avLst/>
+          </a:prstGeom>
+          <a:noFill/>
+          <a:ln w="38100">
+            <a:solidFill>
+              <a:srgbClr val="FF5050"/>
+            </a:solidFill>
+          </a:ln>
+        </p:spPr>
+        <p:style>
+          <a:lnRef idx="2">
+            <a:schemeClr val="accent1">
+              <a:shade val="15000"/>
+            </a:schemeClr>
+          </a:lnRef>
+          <a:fillRef idx="1">
+            <a:schemeClr val="accent1"/>
+          </a:fillRef>
+          <a:effectRef idx="0">
+            <a:schemeClr val="accent1"/>
+          </a:effectRef>
+          <a:fontRef idx="minor">
+            <a:schemeClr val="lt1"/>
+          </a:fontRef>
+        </p:style>
+        <p:txBody>
+          <a:bodyPr rtlCol="0" anchor="ctr"/>
+          <a:lstStyle/>
+          <a:p>
+            <a:pPr algn="ctr"/>
+            <a:endParaRPr kumimoji="1" lang="ja-JP" altLang="en-US">
+              <a:latin typeface="UD デジタル 教科書体 NP-B" panose="02020700000000000000" pitchFamily="18" charset="-128"/>
+              <a:ea typeface="UD デジタル 教科書体 NP-B" panose="02020700000000000000" pitchFamily="18" charset="-128"/>
+            </a:endParaRPr>
+          </a:p>
+        </p:txBody>
+      </p:sp>
+      <p:sp>
+        <p:nvSpPr>
+          <p:cNvPr id="72" name="正方形/長方形 71">
+            <a:extLst>
+              <a:ext uri="{FF2B5EF4-FFF2-40B4-BE49-F238E27FC236}">
+                <a16:creationId xmlns:a16="http://schemas.microsoft.com/office/drawing/2014/main" id="{232EC56C-AEDD-5C80-931B-D33D4E85A1DB}"/>
+              </a:ext>
+            </a:extLst>
+          </p:cNvPr>
+          <p:cNvSpPr/>
+          <p:nvPr/>
+        </p:nvSpPr>
+        <p:spPr>
+          <a:xfrm>
+            <a:off x="6628620" y="2861319"/>
+            <a:ext cx="826796" cy="226315"/>
+          </a:xfrm>
+          <a:prstGeom prst="rect">
+            <a:avLst/>
+          </a:prstGeom>
+          <a:noFill/>
+          <a:ln w="38100">
+            <a:solidFill>
+              <a:srgbClr val="FF5050"/>
+            </a:solidFill>
+          </a:ln>
+        </p:spPr>
+        <p:style>
+          <a:lnRef idx="2">
+            <a:schemeClr val="accent1">
+              <a:shade val="15000"/>
+            </a:schemeClr>
+          </a:lnRef>
+          <a:fillRef idx="1">
+            <a:schemeClr val="accent1"/>
+          </a:fillRef>
+          <a:effectRef idx="0">
+            <a:schemeClr val="accent1"/>
+          </a:effectRef>
+          <a:fontRef idx="minor">
+            <a:schemeClr val="lt1"/>
+          </a:fontRef>
+        </p:style>
+        <p:txBody>
+          <a:bodyPr rtlCol="0" anchor="ctr"/>
+          <a:lstStyle/>
+          <a:p>
+            <a:pPr algn="ctr"/>
+            <a:endParaRPr kumimoji="1" lang="ja-JP" altLang="en-US">
+              <a:latin typeface="UD デジタル 教科書体 NP-B" panose="02020700000000000000" pitchFamily="18" charset="-128"/>
+              <a:ea typeface="UD デジタル 教科書体 NP-B" panose="02020700000000000000" pitchFamily="18" charset="-128"/>
+            </a:endParaRPr>
+          </a:p>
+        </p:txBody>
+      </p:sp>
+      <p:sp>
+        <p:nvSpPr>
+          <p:cNvPr id="74" name="テキスト ボックス 73">
+            <a:extLst>
+              <a:ext uri="{FF2B5EF4-FFF2-40B4-BE49-F238E27FC236}">
+                <a16:creationId xmlns:a16="http://schemas.microsoft.com/office/drawing/2014/main" id="{1501D227-5025-D9C8-ECA1-E4D1D182FCE9}"/>
+              </a:ext>
+            </a:extLst>
+          </p:cNvPr>
+          <p:cNvSpPr txBox="1"/>
+          <p:nvPr/>
+        </p:nvSpPr>
+        <p:spPr>
+          <a:xfrm>
+            <a:off x="366729" y="4322269"/>
+            <a:ext cx="1924313" cy="338554"/>
+          </a:xfrm>
+          <a:prstGeom prst="rect">
+            <a:avLst/>
+          </a:prstGeom>
+          <a:noFill/>
+        </p:spPr>
+        <p:txBody>
+          <a:bodyPr wrap="square" rtlCol="0">
+            <a:spAutoFit/>
+          </a:bodyPr>
+          <a:lstStyle/>
+          <a:p>
+            <a:r>
+              <a:rPr lang="ja-JP" altLang="en-US" sz="1600" b="1" dirty="0">
+                <a:solidFill>
+                  <a:schemeClr val="bg2">
+                    <a:lumMod val="50000"/>
+                  </a:schemeClr>
+                </a:solidFill>
+                <a:latin typeface="UD デジタル 教科書体 NP-B" panose="02020700000000000000" pitchFamily="18" charset="-128"/>
+                <a:ea typeface="UD デジタル 教科書体 NP-B" panose="02020700000000000000" pitchFamily="18" charset="-128"/>
+              </a:rPr>
+              <a:t>経過時間生産数</a:t>
+            </a:r>
+            <a:endParaRPr kumimoji="1" lang="ja-JP" altLang="en-US" sz="1600" b="1" dirty="0">
+              <a:solidFill>
+                <a:schemeClr val="bg2">
+                  <a:lumMod val="50000"/>
+                </a:schemeClr>
+              </a:solidFill>
+              <a:latin typeface="UD デジタル 教科書体 NP-B" panose="02020700000000000000" pitchFamily="18" charset="-128"/>
+              <a:ea typeface="UD デジタル 教科書体 NP-B" panose="02020700000000000000" pitchFamily="18" charset="-128"/>
+            </a:endParaRPr>
+          </a:p>
+        </p:txBody>
+      </p:sp>
+      <p:sp>
+        <p:nvSpPr>
+          <p:cNvPr id="76" name="テキスト ボックス 75">
+            <a:extLst>
+              <a:ext uri="{FF2B5EF4-FFF2-40B4-BE49-F238E27FC236}">
+                <a16:creationId xmlns:a16="http://schemas.microsoft.com/office/drawing/2014/main" id="{03394706-E65C-D893-5030-49B8E5D19484}"/>
+              </a:ext>
+            </a:extLst>
+          </p:cNvPr>
+          <p:cNvSpPr txBox="1"/>
+          <p:nvPr/>
+        </p:nvSpPr>
+        <p:spPr>
+          <a:xfrm>
+            <a:off x="346007" y="5458042"/>
+            <a:ext cx="1924313" cy="338554"/>
+          </a:xfrm>
+          <a:prstGeom prst="rect">
+            <a:avLst/>
+          </a:prstGeom>
+          <a:noFill/>
+        </p:spPr>
+        <p:txBody>
+          <a:bodyPr wrap="square" rtlCol="0">
+            <a:spAutoFit/>
+          </a:bodyPr>
+          <a:lstStyle/>
+          <a:p>
+            <a:r>
+              <a:rPr lang="ja-JP" altLang="en-US" sz="1600" b="1" dirty="0">
+                <a:solidFill>
+                  <a:schemeClr val="bg2">
+                    <a:lumMod val="50000"/>
+                  </a:schemeClr>
+                </a:solidFill>
+                <a:latin typeface="UD デジタル 教科書体 NP-B" panose="02020700000000000000" pitchFamily="18" charset="-128"/>
+                <a:ea typeface="UD デジタル 教科書体 NP-B" panose="02020700000000000000" pitchFamily="18" charset="-128"/>
+              </a:rPr>
+              <a:t>累積生産数</a:t>
+            </a:r>
+            <a:endParaRPr kumimoji="1" lang="ja-JP" altLang="en-US" sz="1600" b="1" dirty="0">
+              <a:solidFill>
+                <a:schemeClr val="bg2">
+                  <a:lumMod val="50000"/>
+                </a:schemeClr>
+              </a:solidFill>
+              <a:latin typeface="UD デジタル 教科書体 NP-B" panose="02020700000000000000" pitchFamily="18" charset="-128"/>
+              <a:ea typeface="UD デジタル 教科書体 NP-B" panose="02020700000000000000" pitchFamily="18" charset="-128"/>
+            </a:endParaRPr>
+          </a:p>
+        </p:txBody>
+      </p:sp>
+      <p:cxnSp>
+        <p:nvCxnSpPr>
+          <p:cNvPr id="80" name="直線コネクタ 79">
+            <a:extLst>
+              <a:ext uri="{FF2B5EF4-FFF2-40B4-BE49-F238E27FC236}">
+                <a16:creationId xmlns:a16="http://schemas.microsoft.com/office/drawing/2014/main" id="{B2DDC763-5AFF-24D3-C4DD-F93D060A3A12}"/>
+              </a:ext>
+            </a:extLst>
+          </p:cNvPr>
+          <p:cNvCxnSpPr>
+            <a:cxnSpLocks/>
+          </p:cNvCxnSpPr>
+          <p:nvPr/>
+        </p:nvCxnSpPr>
+        <p:spPr>
+          <a:xfrm>
+            <a:off x="8047328" y="4503150"/>
+            <a:ext cx="0" cy="1071819"/>
+          </a:xfrm>
+          <a:prstGeom prst="line">
+            <a:avLst/>
+          </a:prstGeom>
+          <a:ln w="28575">
+            <a:solidFill>
+              <a:schemeClr val="tx1">
+                <a:lumMod val="65000"/>
+                <a:lumOff val="35000"/>
+              </a:schemeClr>
+            </a:solidFill>
+            <a:prstDash val="solid"/>
+          </a:ln>
+        </p:spPr>
+        <p:style>
+          <a:lnRef idx="1">
+            <a:schemeClr val="accent1"/>
+          </a:lnRef>
+          <a:fillRef idx="0">
+            <a:schemeClr val="accent1"/>
+          </a:fillRef>
+          <a:effectRef idx="0">
+            <a:schemeClr val="accent1"/>
+          </a:effectRef>
+          <a:fontRef idx="minor">
+            <a:schemeClr val="tx1"/>
+          </a:fontRef>
+        </p:style>
+      </p:cxnSp>
+      <p:sp>
+        <p:nvSpPr>
+          <p:cNvPr id="85" name="テキスト ボックス 84">
+            <a:extLst>
+              <a:ext uri="{FF2B5EF4-FFF2-40B4-BE49-F238E27FC236}">
+                <a16:creationId xmlns:a16="http://schemas.microsoft.com/office/drawing/2014/main" id="{7E359152-A79C-8DB2-9899-F8AC5569A64D}"/>
+              </a:ext>
+            </a:extLst>
+          </p:cNvPr>
+          <p:cNvSpPr txBox="1"/>
+          <p:nvPr/>
+        </p:nvSpPr>
+        <p:spPr>
+          <a:xfrm>
+            <a:off x="8684638" y="4280565"/>
+            <a:ext cx="829732" cy="261610"/>
+          </a:xfrm>
+          <a:prstGeom prst="rect">
+            <a:avLst/>
+          </a:prstGeom>
+          <a:noFill/>
+        </p:spPr>
+        <p:txBody>
+          <a:bodyPr wrap="square" rtlCol="0">
+            <a:spAutoFit/>
+          </a:bodyPr>
+          <a:lstStyle/>
+          <a:p>
+            <a:pPr algn="ctr"/>
+            <a:r>
+              <a:rPr lang="en-US" altLang="ja-JP" sz="1100" b="1" dirty="0">
+                <a:solidFill>
+                  <a:schemeClr val="bg2">
+                    <a:lumMod val="50000"/>
+                  </a:schemeClr>
+                </a:solidFill>
+                <a:latin typeface="UD デジタル 教科書体 NP-B" panose="02020700000000000000" pitchFamily="18" charset="-128"/>
+                <a:ea typeface="UD デジタル 教科書体 NP-B" panose="02020700000000000000" pitchFamily="18" charset="-128"/>
+              </a:rPr>
+              <a:t>125%</a:t>
+            </a:r>
+            <a:endParaRPr kumimoji="1" lang="ja-JP" altLang="en-US" sz="1100" b="1" dirty="0">
+              <a:solidFill>
+                <a:schemeClr val="bg2">
+                  <a:lumMod val="50000"/>
+                </a:schemeClr>
+              </a:solidFill>
+              <a:latin typeface="UD デジタル 教科書体 NP-B" panose="02020700000000000000" pitchFamily="18" charset="-128"/>
+              <a:ea typeface="UD デジタル 教科書体 NP-B" panose="02020700000000000000" pitchFamily="18" charset="-128"/>
+            </a:endParaRPr>
+          </a:p>
+        </p:txBody>
+      </p:sp>
+      <p:sp>
+        <p:nvSpPr>
+          <p:cNvPr id="86" name="テキスト ボックス 85">
+            <a:extLst>
+              <a:ext uri="{FF2B5EF4-FFF2-40B4-BE49-F238E27FC236}">
+                <a16:creationId xmlns:a16="http://schemas.microsoft.com/office/drawing/2014/main" id="{A8D1A43A-AAE6-737B-F96A-2262EF274021}"/>
+              </a:ext>
+            </a:extLst>
+          </p:cNvPr>
+          <p:cNvSpPr txBox="1"/>
+          <p:nvPr/>
+        </p:nvSpPr>
+        <p:spPr>
+          <a:xfrm>
+            <a:off x="4705764" y="4047746"/>
+            <a:ext cx="2640975" cy="253916"/>
+          </a:xfrm>
+          <a:prstGeom prst="rect">
+            <a:avLst/>
+          </a:prstGeom>
+          <a:noFill/>
+        </p:spPr>
+        <p:txBody>
+          <a:bodyPr wrap="square" rtlCol="0">
+            <a:spAutoFit/>
+          </a:bodyPr>
+          <a:lstStyle/>
+          <a:p>
+            <a:pPr algn="ctr"/>
+            <a:r>
+              <a:rPr kumimoji="1" lang="en-US" altLang="ja-JP" sz="1050" dirty="0">
+                <a:solidFill>
+                  <a:schemeClr val="tx1">
+                    <a:lumMod val="65000"/>
+                    <a:lumOff val="35000"/>
+                  </a:schemeClr>
+                </a:solidFill>
+                <a:latin typeface="UD デジタル 教科書体 NP-B" panose="02020700000000000000" pitchFamily="18" charset="-128"/>
+                <a:ea typeface="UD デジタル 教科書体 NP-B" panose="02020700000000000000" pitchFamily="18" charset="-128"/>
+              </a:rPr>
+              <a:t>EL</a:t>
+            </a:r>
+            <a:r>
+              <a:rPr lang="en-US" altLang="ja-JP" sz="1050" dirty="0">
+                <a:solidFill>
+                  <a:schemeClr val="tx1">
+                    <a:lumMod val="65000"/>
+                    <a:lumOff val="35000"/>
+                  </a:schemeClr>
+                </a:solidFill>
+                <a:latin typeface="UD デジタル 教科書体 NP-B" panose="02020700000000000000" pitchFamily="18" charset="-128"/>
+                <a:ea typeface="UD デジタル 教科書体 NP-B" panose="02020700000000000000" pitchFamily="18" charset="-128"/>
+              </a:rPr>
+              <a:t>APSED TIME = 3:45</a:t>
+            </a:r>
+            <a:endParaRPr kumimoji="1" lang="ja-JP" altLang="en-US" sz="1050" dirty="0">
+              <a:solidFill>
+                <a:schemeClr val="tx1">
+                  <a:lumMod val="65000"/>
+                  <a:lumOff val="35000"/>
+                </a:schemeClr>
+              </a:solidFill>
+              <a:latin typeface="UD デジタル 教科書体 NP-B" panose="02020700000000000000" pitchFamily="18" charset="-128"/>
+              <a:ea typeface="UD デジタル 教科書体 NP-B" panose="02020700000000000000" pitchFamily="18" charset="-128"/>
+            </a:endParaRPr>
+          </a:p>
+        </p:txBody>
+      </p:sp>
+      <p:graphicFrame>
+        <p:nvGraphicFramePr>
+          <p:cNvPr id="87" name="表 86">
+            <a:extLst>
+              <a:ext uri="{FF2B5EF4-FFF2-40B4-BE49-F238E27FC236}">
+                <a16:creationId xmlns:a16="http://schemas.microsoft.com/office/drawing/2014/main" id="{4FE12E1D-A6BB-AFD9-FAA4-73D1F6491EF0}"/>
+              </a:ext>
+            </a:extLst>
+          </p:cNvPr>
+          <p:cNvGraphicFramePr>
+            <a:graphicFrameLocks noGrp="1"/>
+          </p:cNvGraphicFramePr>
+          <p:nvPr>
+            <p:extLst>
+              <p:ext uri="{D42A27DB-BD31-4B8C-83A1-F6EECF244321}">
+                <p14:modId xmlns:p14="http://schemas.microsoft.com/office/powerpoint/2010/main" val="2062304785"/>
+              </p:ext>
+            </p:extLst>
+          </p:nvPr>
+        </p:nvGraphicFramePr>
+        <p:xfrm>
+          <a:off x="380110" y="5749908"/>
+          <a:ext cx="2806284" cy="708891"/>
+        </p:xfrm>
+        <a:graphic>
+          <a:graphicData uri="http://schemas.openxmlformats.org/drawingml/2006/table">
+            <a:tbl>
+              <a:tblPr firstRow="1" bandRow="1">
+                <a:tableStyleId>{F2DE63D5-997A-4646-A377-4702673A728D}</a:tableStyleId>
+              </a:tblPr>
+              <a:tblGrid>
+                <a:gridCol w="935428">
+                  <a:extLst>
+                    <a:ext uri="{9D8B030D-6E8A-4147-A177-3AD203B41FA5}">
+                      <a16:colId xmlns:a16="http://schemas.microsoft.com/office/drawing/2014/main" val="188364501"/>
+                    </a:ext>
+                  </a:extLst>
+                </a:gridCol>
+                <a:gridCol w="935428">
+                  <a:extLst>
+                    <a:ext uri="{9D8B030D-6E8A-4147-A177-3AD203B41FA5}">
+                      <a16:colId xmlns:a16="http://schemas.microsoft.com/office/drawing/2014/main" val="3123303698"/>
+                    </a:ext>
+                  </a:extLst>
+                </a:gridCol>
+                <a:gridCol w="935428">
+                  <a:extLst>
+                    <a:ext uri="{9D8B030D-6E8A-4147-A177-3AD203B41FA5}">
+                      <a16:colId xmlns:a16="http://schemas.microsoft.com/office/drawing/2014/main" val="1716167615"/>
+                    </a:ext>
+                  </a:extLst>
+                </a:gridCol>
+              </a:tblGrid>
+              <a:tr h="317272">
+                <a:tc>
+                  <a:txBody>
+                    <a:bodyPr/>
+                    <a:lstStyle/>
+                    <a:p>
+                      <a:pPr algn="ctr"/>
+                      <a:r>
+                        <a:rPr kumimoji="1" lang="ja-JP" altLang="en-US" sz="1400" dirty="0">
+                          <a:latin typeface="UD デジタル 教科書体 NP-B" panose="02020700000000000000" pitchFamily="18" charset="-128"/>
+                          <a:ea typeface="UD デジタル 教科書体 NP-B" panose="02020700000000000000" pitchFamily="18" charset="-128"/>
+                        </a:rPr>
+                        <a:t>実  績</a:t>
+                      </a:r>
+                      <a:endParaRPr kumimoji="1" lang="en-US" altLang="ja-JP" sz="1400" dirty="0">
+                        <a:latin typeface="UD デジタル 教科書体 NP-B" panose="02020700000000000000" pitchFamily="18" charset="-128"/>
+                        <a:ea typeface="UD デジタル 教科書体 NP-B" panose="02020700000000000000" pitchFamily="18" charset="-128"/>
+                      </a:endParaRPr>
+                    </a:p>
+                  </a:txBody>
+                  <a:tcPr anchor="ctr"/>
+                </a:tc>
+                <a:tc>
+                  <a:txBody>
+                    <a:bodyPr/>
+                    <a:lstStyle/>
+                    <a:p>
+                      <a:pPr algn="ctr"/>
+                      <a:r>
+                        <a:rPr kumimoji="1" lang="ja-JP" altLang="en-US" sz="1400" dirty="0">
+                          <a:latin typeface="UD デジタル 教科書体 NP-B" panose="02020700000000000000" pitchFamily="18" charset="-128"/>
+                          <a:ea typeface="UD デジタル 教科書体 NP-B" panose="02020700000000000000" pitchFamily="18" charset="-128"/>
+                        </a:rPr>
+                        <a:t>目  標</a:t>
+                      </a:r>
+                      <a:endParaRPr kumimoji="1" lang="en-US" altLang="ja-JP" sz="1400" dirty="0">
+                        <a:latin typeface="UD デジタル 教科書体 NP-B" panose="02020700000000000000" pitchFamily="18" charset="-128"/>
+                        <a:ea typeface="UD デジタル 教科書体 NP-B" panose="02020700000000000000" pitchFamily="18" charset="-128"/>
+                      </a:endParaRPr>
+                    </a:p>
+                  </a:txBody>
+                  <a:tcPr anchor="ctr"/>
+                </a:tc>
+                <a:tc>
+                  <a:txBody>
+                    <a:bodyPr/>
+                    <a:lstStyle/>
+                    <a:p>
+                      <a:pPr algn="ctr"/>
+                      <a:r>
+                        <a:rPr kumimoji="1" lang="ja-JP" altLang="en-US" sz="1400" dirty="0">
+                          <a:latin typeface="UD デジタル 教科書体 NP-B" panose="02020700000000000000" pitchFamily="18" charset="-128"/>
+                          <a:ea typeface="UD デジタル 教科書体 NP-B" panose="02020700000000000000" pitchFamily="18" charset="-128"/>
+                        </a:rPr>
+                        <a:t>達成率</a:t>
+                      </a:r>
+                    </a:p>
+                  </a:txBody>
+                  <a:tcPr anchor="ctr"/>
+                </a:tc>
+                <a:extLst>
+                  <a:ext uri="{0D108BD9-81ED-4DB2-BD59-A6C34878D82A}">
+                    <a16:rowId xmlns:a16="http://schemas.microsoft.com/office/drawing/2014/main" val="3062724192"/>
+                  </a:ext>
+                </a:extLst>
+              </a:tr>
+              <a:tr h="391619">
+                <a:tc>
+                  <a:txBody>
+                    <a:bodyPr/>
+                    <a:lstStyle/>
+                    <a:p>
+                      <a:pPr algn="ctr"/>
+                      <a:r>
+                        <a:rPr kumimoji="1" lang="en-US" altLang="ja-JP" sz="1200" dirty="0">
+                          <a:latin typeface="UD デジタル 教科書体 NP-B" panose="02020700000000000000" pitchFamily="18" charset="-128"/>
+                          <a:ea typeface="UD デジタル 教科書体 NP-B" panose="02020700000000000000" pitchFamily="18" charset="-128"/>
+                        </a:rPr>
+                        <a:t>12,535</a:t>
+                      </a:r>
+                      <a:endParaRPr kumimoji="1" lang="ja-JP" altLang="en-US" sz="1200" dirty="0">
+                        <a:latin typeface="UD デジタル 教科書体 NP-B" panose="02020700000000000000" pitchFamily="18" charset="-128"/>
+                        <a:ea typeface="UD デジタル 教科書体 NP-B" panose="02020700000000000000" pitchFamily="18" charset="-128"/>
+                      </a:endParaRPr>
+                    </a:p>
+                  </a:txBody>
+                  <a:tcPr anchor="ctr"/>
+                </a:tc>
+                <a:tc>
+                  <a:txBody>
+                    <a:bodyPr/>
+                    <a:lstStyle/>
+                    <a:p>
+                      <a:pPr algn="ctr"/>
+                      <a:r>
+                        <a:rPr kumimoji="1" lang="en-US" altLang="ja-JP" sz="1200" dirty="0">
+                          <a:latin typeface="UD デジタル 教科書体 NP-B" panose="02020700000000000000" pitchFamily="18" charset="-128"/>
+                          <a:ea typeface="UD デジタル 教科書体 NP-B" panose="02020700000000000000" pitchFamily="18" charset="-128"/>
+                        </a:rPr>
+                        <a:t>300,000</a:t>
+                      </a:r>
+                      <a:endParaRPr kumimoji="1" lang="ja-JP" altLang="en-US" sz="1200" dirty="0">
+                        <a:latin typeface="UD デジタル 教科書体 NP-B" panose="02020700000000000000" pitchFamily="18" charset="-128"/>
+                        <a:ea typeface="UD デジタル 教科書体 NP-B" panose="02020700000000000000" pitchFamily="18" charset="-128"/>
+                      </a:endParaRPr>
+                    </a:p>
+                  </a:txBody>
+                  <a:tcPr anchor="ctr"/>
+                </a:tc>
+                <a:tc>
+                  <a:txBody>
+                    <a:bodyPr/>
+                    <a:lstStyle/>
+                    <a:p>
+                      <a:pPr algn="ctr"/>
+                      <a:r>
+                        <a:rPr kumimoji="1" lang="en-US" altLang="ja-JP" sz="1200" dirty="0">
+                          <a:latin typeface="UD デジタル 教科書体 NP-B" panose="02020700000000000000" pitchFamily="18" charset="-128"/>
+                          <a:ea typeface="UD デジタル 教科書体 NP-B" panose="02020700000000000000" pitchFamily="18" charset="-128"/>
+                        </a:rPr>
+                        <a:t>5%</a:t>
+                      </a:r>
+                      <a:endParaRPr kumimoji="1" lang="ja-JP" altLang="en-US" sz="1200" dirty="0">
+                        <a:latin typeface="UD デジタル 教科書体 NP-B" panose="02020700000000000000" pitchFamily="18" charset="-128"/>
+                        <a:ea typeface="UD デジタル 教科書体 NP-B" panose="02020700000000000000" pitchFamily="18" charset="-128"/>
+                      </a:endParaRPr>
+                    </a:p>
+                  </a:txBody>
+                  <a:tcPr anchor="ctr"/>
+                </a:tc>
+                <a:extLst>
+                  <a:ext uri="{0D108BD9-81ED-4DB2-BD59-A6C34878D82A}">
+                    <a16:rowId xmlns:a16="http://schemas.microsoft.com/office/drawing/2014/main" val="601181801"/>
+                  </a:ext>
+                </a:extLst>
+              </a:tr>
+            </a:tbl>
+          </a:graphicData>
+        </a:graphic>
+      </p:graphicFrame>
+      <p:graphicFrame>
+        <p:nvGraphicFramePr>
+          <p:cNvPr id="88" name="表 87">
+            <a:extLst>
+              <a:ext uri="{FF2B5EF4-FFF2-40B4-BE49-F238E27FC236}">
+                <a16:creationId xmlns:a16="http://schemas.microsoft.com/office/drawing/2014/main" id="{99AAC52B-FFDE-DA93-D026-C4BF9D0F9EA1}"/>
+              </a:ext>
+            </a:extLst>
+          </p:cNvPr>
+          <p:cNvGraphicFramePr>
+            <a:graphicFrameLocks noGrp="1"/>
+          </p:cNvGraphicFramePr>
+          <p:nvPr>
+            <p:extLst>
+              <p:ext uri="{D42A27DB-BD31-4B8C-83A1-F6EECF244321}">
+                <p14:modId xmlns:p14="http://schemas.microsoft.com/office/powerpoint/2010/main" val="616734387"/>
+              </p:ext>
+            </p:extLst>
+          </p:nvPr>
+        </p:nvGraphicFramePr>
+        <p:xfrm>
+          <a:off x="3742171" y="5877492"/>
+          <a:ext cx="5399680" cy="628240"/>
+        </p:xfrm>
+        <a:graphic>
+          <a:graphicData uri="http://schemas.openxmlformats.org/drawingml/2006/table">
+            <a:tbl>
+              <a:tblPr firstRow="1" bandRow="1">
+                <a:tableStyleId>{F2DE63D5-997A-4646-A377-4702673A728D}</a:tableStyleId>
+              </a:tblPr>
+              <a:tblGrid>
+                <a:gridCol w="1079936">
+                  <a:extLst>
+                    <a:ext uri="{9D8B030D-6E8A-4147-A177-3AD203B41FA5}">
+                      <a16:colId xmlns:a16="http://schemas.microsoft.com/office/drawing/2014/main" val="1074413920"/>
+                    </a:ext>
+                  </a:extLst>
+                </a:gridCol>
+                <a:gridCol w="1079936">
+                  <a:extLst>
+                    <a:ext uri="{9D8B030D-6E8A-4147-A177-3AD203B41FA5}">
+                      <a16:colId xmlns:a16="http://schemas.microsoft.com/office/drawing/2014/main" val="188364501"/>
+                    </a:ext>
+                  </a:extLst>
+                </a:gridCol>
+                <a:gridCol w="1079936">
+                  <a:extLst>
+                    <a:ext uri="{9D8B030D-6E8A-4147-A177-3AD203B41FA5}">
+                      <a16:colId xmlns:a16="http://schemas.microsoft.com/office/drawing/2014/main" val="3123303698"/>
+                    </a:ext>
+                  </a:extLst>
+                </a:gridCol>
+                <a:gridCol w="1079936">
+                  <a:extLst>
+                    <a:ext uri="{9D8B030D-6E8A-4147-A177-3AD203B41FA5}">
+                      <a16:colId xmlns:a16="http://schemas.microsoft.com/office/drawing/2014/main" val="1716167615"/>
+                    </a:ext>
+                  </a:extLst>
+                </a:gridCol>
+                <a:gridCol w="1079936">
+                  <a:extLst>
+                    <a:ext uri="{9D8B030D-6E8A-4147-A177-3AD203B41FA5}">
+                      <a16:colId xmlns:a16="http://schemas.microsoft.com/office/drawing/2014/main" val="1994325327"/>
+                    </a:ext>
+                  </a:extLst>
+                </a:gridCol>
+              </a:tblGrid>
+              <a:tr h="314120">
+                <a:tc>
+                  <a:txBody>
+                    <a:bodyPr/>
+                    <a:lstStyle/>
+                    <a:p>
+                      <a:pPr marL="0" marR="0" lvl="0" indent="0" algn="ctr" defTabSz="914400" rtl="0" eaLnBrk="1" fontAlgn="auto" latinLnBrk="0" hangingPunct="1">
+                        <a:lnSpc>
+                          <a:spcPct val="100000"/>
+                        </a:lnSpc>
+                        <a:spcBef>
+                          <a:spcPts val="0"/>
+                        </a:spcBef>
+                        <a:spcAft>
+                          <a:spcPts val="0"/>
+                        </a:spcAft>
+                        <a:buClrTx/>
+                        <a:buSzTx/>
+                        <a:buFontTx/>
+                        <a:buNone/>
+                        <a:tabLst/>
+                        <a:defRPr/>
+                      </a:pPr>
+                      <a:r>
+                        <a:rPr kumimoji="1" lang="en-US" altLang="ja-JP" sz="1200" dirty="0">
+                          <a:latin typeface="UD デジタル 教科書体 NP-B" panose="02020700000000000000" pitchFamily="18" charset="-128"/>
+                          <a:ea typeface="UD デジタル 教科書体 NP-B" panose="02020700000000000000" pitchFamily="18" charset="-128"/>
+                        </a:rPr>
+                        <a:t>MC557</a:t>
+                      </a:r>
+                      <a:endParaRPr kumimoji="1" lang="ja-JP" altLang="en-US" sz="1200" dirty="0">
+                        <a:latin typeface="UD デジタル 教科書体 NP-B" panose="02020700000000000000" pitchFamily="18" charset="-128"/>
+                        <a:ea typeface="UD デジタル 教科書体 NP-B" panose="02020700000000000000" pitchFamily="18" charset="-128"/>
+                      </a:endParaRPr>
+                    </a:p>
+                  </a:txBody>
+                  <a:tcPr anchor="ctr">
+                    <a:lnL w="12700" cap="flat" cmpd="sng" algn="ctr">
+                      <a:solidFill>
+                        <a:schemeClr val="bg1">
+                          <a:lumMod val="50000"/>
+                        </a:schemeClr>
+                      </a:solidFill>
+                      <a:prstDash val="solid"/>
+                      <a:round/>
+                      <a:headEnd type="none" w="med" len="med"/>
+                      <a:tailEnd type="none" w="med" len="med"/>
+                    </a:lnL>
+                    <a:lnR w="12700" cap="flat" cmpd="sng" algn="ctr">
+                      <a:solidFill>
+                        <a:schemeClr val="bg1">
+                          <a:lumMod val="50000"/>
+                        </a:schemeClr>
+                      </a:solidFill>
+                      <a:prstDash val="solid"/>
+                      <a:round/>
+                      <a:headEnd type="none" w="med" len="med"/>
+                      <a:tailEnd type="none" w="med" len="med"/>
+                    </a:lnR>
+                    <a:lnB w="12700" cap="flat" cmpd="sng" algn="ctr">
+                      <a:solidFill>
+                        <a:schemeClr val="bg1">
+                          <a:lumMod val="50000"/>
+                        </a:schemeClr>
+                      </a:solidFill>
+                      <a:prstDash val="solid"/>
+                      <a:round/>
+                      <a:headEnd type="none" w="med" len="med"/>
+                      <a:tailEnd type="none" w="med" len="med"/>
+                    </a:lnB>
+                  </a:tcPr>
+                </a:tc>
+                <a:tc>
+                  <a:txBody>
+                    <a:bodyPr/>
+                    <a:lstStyle/>
+                    <a:p>
+                      <a:pPr algn="ctr"/>
+                      <a:r>
+                        <a:rPr kumimoji="1" lang="en-US" altLang="ja-JP" sz="1200" dirty="0">
+                          <a:latin typeface="UD デジタル 教科書体 NP-B" panose="02020700000000000000" pitchFamily="18" charset="-128"/>
+                          <a:ea typeface="UD デジタル 教科書体 NP-B" panose="02020700000000000000" pitchFamily="18" charset="-128"/>
+                        </a:rPr>
+                        <a:t>MC560</a:t>
+                      </a:r>
+                      <a:endParaRPr kumimoji="1" lang="ja-JP" altLang="en-US" sz="1200" dirty="0">
+                        <a:latin typeface="UD デジタル 教科書体 NP-B" panose="02020700000000000000" pitchFamily="18" charset="-128"/>
+                        <a:ea typeface="UD デジタル 教科書体 NP-B" panose="02020700000000000000" pitchFamily="18" charset="-128"/>
+                      </a:endParaRPr>
+                    </a:p>
+                  </a:txBody>
+                  <a:tcPr anchor="ctr">
+                    <a:lnL w="12700" cap="flat" cmpd="sng" algn="ctr">
+                      <a:solidFill>
+                        <a:schemeClr val="bg1">
+                          <a:lumMod val="50000"/>
+                        </a:schemeClr>
+                      </a:solidFill>
+                      <a:prstDash val="solid"/>
+                      <a:round/>
+                      <a:headEnd type="none" w="med" len="med"/>
+                      <a:tailEnd type="none" w="med" len="med"/>
+                    </a:lnL>
+                    <a:lnB w="12700" cap="flat" cmpd="sng" algn="ctr">
+                      <a:solidFill>
+                        <a:schemeClr val="bg1">
+                          <a:lumMod val="50000"/>
+                        </a:schemeClr>
+                      </a:solidFill>
+                      <a:prstDash val="solid"/>
+                      <a:round/>
+                      <a:headEnd type="none" w="med" len="med"/>
+                      <a:tailEnd type="none" w="med" len="med"/>
+                    </a:lnB>
+                  </a:tcPr>
+                </a:tc>
+                <a:tc>
+                  <a:txBody>
+                    <a:bodyPr/>
+                    <a:lstStyle/>
+                    <a:p>
+                      <a:pPr algn="ctr"/>
+                      <a:r>
+                        <a:rPr kumimoji="1" lang="en-US" altLang="ja-JP" sz="1200" dirty="0">
+                          <a:latin typeface="UD デジタル 教科書体 NP-B" panose="02020700000000000000" pitchFamily="18" charset="-128"/>
+                          <a:ea typeface="UD デジタル 教科書体 NP-B" panose="02020700000000000000" pitchFamily="18" charset="-128"/>
+                        </a:rPr>
+                        <a:t>MC577</a:t>
+                      </a:r>
+                      <a:endParaRPr kumimoji="1" lang="ja-JP" altLang="en-US" sz="1200" dirty="0">
+                        <a:latin typeface="UD デジタル 教科書体 NP-B" panose="02020700000000000000" pitchFamily="18" charset="-128"/>
+                        <a:ea typeface="UD デジタル 教科書体 NP-B" panose="02020700000000000000" pitchFamily="18" charset="-128"/>
+                      </a:endParaRPr>
+                    </a:p>
+                  </a:txBody>
+                  <a:tcPr anchor="ctr">
+                    <a:lnB w="12700" cap="flat" cmpd="sng" algn="ctr">
+                      <a:solidFill>
+                        <a:schemeClr val="bg1">
+                          <a:lumMod val="50000"/>
+                        </a:schemeClr>
+                      </a:solidFill>
+                      <a:prstDash val="solid"/>
+                      <a:round/>
+                      <a:headEnd type="none" w="med" len="med"/>
+                      <a:tailEnd type="none" w="med" len="med"/>
+                    </a:lnB>
+                  </a:tcPr>
+                </a:tc>
+                <a:tc>
+                  <a:txBody>
+                    <a:bodyPr/>
+                    <a:lstStyle/>
+                    <a:p>
+                      <a:pPr algn="ctr"/>
+                      <a:r>
+                        <a:rPr kumimoji="1" lang="en-US" altLang="ja-JP" sz="1200" dirty="0">
+                          <a:latin typeface="UD デジタル 教科書体 NP-B" panose="02020700000000000000" pitchFamily="18" charset="-128"/>
+                          <a:ea typeface="UD デジタル 教科書体 NP-B" panose="02020700000000000000" pitchFamily="18" charset="-128"/>
+                        </a:rPr>
+                        <a:t>MC595</a:t>
+                      </a:r>
+                      <a:endParaRPr kumimoji="1" lang="ja-JP" altLang="en-US" sz="1200" dirty="0">
+                        <a:latin typeface="UD デジタル 教科書体 NP-B" panose="02020700000000000000" pitchFamily="18" charset="-128"/>
+                        <a:ea typeface="UD デジタル 教科書体 NP-B" panose="02020700000000000000" pitchFamily="18" charset="-128"/>
+                      </a:endParaRPr>
+                    </a:p>
+                  </a:txBody>
+                  <a:tcPr anchor="ctr">
+                    <a:lnB w="12700" cap="flat" cmpd="sng" algn="ctr">
+                      <a:solidFill>
+                        <a:schemeClr val="bg1">
+                          <a:lumMod val="50000"/>
+                        </a:schemeClr>
+                      </a:solidFill>
+                      <a:prstDash val="solid"/>
+                      <a:round/>
+                      <a:headEnd type="none" w="med" len="med"/>
+                      <a:tailEnd type="none" w="med" len="med"/>
+                    </a:lnB>
+                  </a:tcPr>
+                </a:tc>
+                <a:tc>
+                  <a:txBody>
+                    <a:bodyPr/>
+                    <a:lstStyle/>
+                    <a:p>
+                      <a:pPr algn="ctr"/>
+                      <a:r>
+                        <a:rPr kumimoji="1" lang="en-US" altLang="ja-JP" sz="1200" dirty="0">
+                          <a:latin typeface="UD デジタル 教科書体 NP-B" panose="02020700000000000000" pitchFamily="18" charset="-128"/>
+                          <a:ea typeface="UD デジタル 教科書体 NP-B" panose="02020700000000000000" pitchFamily="18" charset="-128"/>
+                        </a:rPr>
+                        <a:t>MC603</a:t>
+                      </a:r>
+                      <a:endParaRPr kumimoji="1" lang="ja-JP" altLang="en-US" sz="1200" dirty="0">
+                        <a:latin typeface="UD デジタル 教科書体 NP-B" panose="02020700000000000000" pitchFamily="18" charset="-128"/>
+                        <a:ea typeface="UD デジタル 教科書体 NP-B" panose="02020700000000000000" pitchFamily="18" charset="-128"/>
+                      </a:endParaRPr>
+                    </a:p>
+                  </a:txBody>
+                  <a:tcPr anchor="ctr">
+                    <a:lnB w="12700" cap="flat" cmpd="sng" algn="ctr">
+                      <a:solidFill>
+                        <a:schemeClr val="bg1">
+                          <a:lumMod val="50000"/>
+                        </a:schemeClr>
+                      </a:solidFill>
+                      <a:prstDash val="solid"/>
+                      <a:round/>
+                      <a:headEnd type="none" w="med" len="med"/>
+                      <a:tailEnd type="none" w="med" len="med"/>
+                    </a:lnB>
+                  </a:tcPr>
+                </a:tc>
+                <a:extLst>
+                  <a:ext uri="{0D108BD9-81ED-4DB2-BD59-A6C34878D82A}">
+                    <a16:rowId xmlns:a16="http://schemas.microsoft.com/office/drawing/2014/main" val="3062724192"/>
+                  </a:ext>
+                </a:extLst>
+              </a:tr>
+              <a:tr h="314120">
+                <a:tc>
+                  <a:txBody>
+                    <a:bodyPr/>
+                    <a:lstStyle/>
+                    <a:p>
+                      <a:pPr algn="ctr"/>
+                      <a:r>
+                        <a:rPr kumimoji="1" lang="en-US" altLang="ja-JP" sz="1200" dirty="0">
+                          <a:latin typeface="UD デジタル 教科書体 NP-B" panose="02020700000000000000" pitchFamily="18" charset="-128"/>
+                          <a:ea typeface="UD デジタル 教科書体 NP-B" panose="02020700000000000000" pitchFamily="18" charset="-128"/>
+                        </a:rPr>
+                        <a:t>3,457</a:t>
+                      </a:r>
+                      <a:endParaRPr kumimoji="1" lang="ja-JP" altLang="en-US" sz="1200" dirty="0">
+                        <a:latin typeface="UD デジタル 教科書体 NP-B" panose="02020700000000000000" pitchFamily="18" charset="-128"/>
+                        <a:ea typeface="UD デジタル 教科書体 NP-B" panose="02020700000000000000" pitchFamily="18" charset="-128"/>
+                      </a:endParaRPr>
+                    </a:p>
+                  </a:txBody>
+                  <a:tcPr anchor="ctr">
+                    <a:lnL w="12700" cap="flat" cmpd="sng" algn="ctr">
+                      <a:solidFill>
+                        <a:schemeClr val="bg1">
+                          <a:lumMod val="50000"/>
+                        </a:schemeClr>
+                      </a:solidFill>
+                      <a:prstDash val="solid"/>
+                      <a:round/>
+                      <a:headEnd type="none" w="med" len="med"/>
+                      <a:tailEnd type="none" w="med" len="med"/>
+                    </a:lnL>
+                    <a:lnR w="12700" cap="flat" cmpd="sng" algn="ctr">
+                      <a:solidFill>
+                        <a:schemeClr val="bg1">
+                          <a:lumMod val="50000"/>
+                        </a:schemeClr>
+                      </a:solidFill>
+                      <a:prstDash val="solid"/>
+                      <a:round/>
+                      <a:headEnd type="none" w="med" len="med"/>
+                      <a:tailEnd type="none" w="med" len="med"/>
+                    </a:lnR>
+                    <a:lnT w="12700" cap="flat" cmpd="sng" algn="ctr">
+                      <a:solidFill>
+                        <a:schemeClr val="bg1">
+                          <a:lumMod val="50000"/>
+                        </a:schemeClr>
+                      </a:solidFill>
+                      <a:prstDash val="solid"/>
+                      <a:round/>
+                      <a:headEnd type="none" w="med" len="med"/>
+                      <a:tailEnd type="none" w="med" len="med"/>
+                    </a:lnT>
+                  </a:tcPr>
+                </a:tc>
+                <a:tc>
+                  <a:txBody>
+                    <a:bodyPr/>
+                    <a:lstStyle/>
+                    <a:p>
+                      <a:pPr marL="0" marR="0" lvl="0" indent="0" algn="ctr" defTabSz="914400" rtl="0" eaLnBrk="1" fontAlgn="auto" latinLnBrk="0" hangingPunct="1">
+                        <a:lnSpc>
+                          <a:spcPct val="100000"/>
+                        </a:lnSpc>
+                        <a:spcBef>
+                          <a:spcPts val="0"/>
+                        </a:spcBef>
+                        <a:spcAft>
+                          <a:spcPts val="0"/>
+                        </a:spcAft>
+                        <a:buClrTx/>
+                        <a:buSzTx/>
+                        <a:buFontTx/>
+                        <a:buNone/>
+                        <a:tabLst/>
+                        <a:defRPr/>
+                      </a:pPr>
+                      <a:r>
+                        <a:rPr kumimoji="1" lang="en-US" altLang="ja-JP" sz="1200" b="0" i="0" u="none" strike="noStrike" kern="1200" cap="none" spc="0" normalizeH="0" baseline="0" noProof="0" dirty="0">
+                          <a:ln>
+                            <a:noFill/>
+                          </a:ln>
+                          <a:solidFill>
+                            <a:prstClr val="black"/>
+                          </a:solidFill>
+                          <a:effectLst/>
+                          <a:uLnTx/>
+                          <a:uFillTx/>
+                          <a:latin typeface="UD デジタル 教科書体 NP-B" panose="02020700000000000000" pitchFamily="18" charset="-128"/>
+                          <a:ea typeface="UD デジタル 教科書体 NP-B" panose="02020700000000000000" pitchFamily="18" charset="-128"/>
+                          <a:cs typeface="+mn-cs"/>
+                        </a:rPr>
+                        <a:t>3,123</a:t>
+                      </a:r>
+                      <a:endParaRPr kumimoji="1" lang="ja-JP" altLang="en-US" sz="1200" b="0" i="0" u="none" strike="noStrike" kern="1200" cap="none" spc="0" normalizeH="0" baseline="0" noProof="0" dirty="0">
+                        <a:ln>
+                          <a:noFill/>
+                        </a:ln>
+                        <a:solidFill>
+                          <a:prstClr val="black"/>
+                        </a:solidFill>
+                        <a:effectLst/>
+                        <a:uLnTx/>
+                        <a:uFillTx/>
+                        <a:latin typeface="UD デジタル 教科書体 NP-B" panose="02020700000000000000" pitchFamily="18" charset="-128"/>
+                        <a:ea typeface="UD デジタル 教科書体 NP-B" panose="02020700000000000000" pitchFamily="18" charset="-128"/>
+                        <a:cs typeface="+mn-cs"/>
+                      </a:endParaRPr>
+                    </a:p>
+                  </a:txBody>
+                  <a:tcPr anchor="ctr">
+                    <a:lnL w="12700" cap="flat" cmpd="sng" algn="ctr">
+                      <a:solidFill>
+                        <a:schemeClr val="bg1">
+                          <a:lumMod val="50000"/>
+                        </a:schemeClr>
+                      </a:solidFill>
+                      <a:prstDash val="solid"/>
+                      <a:round/>
+                      <a:headEnd type="none" w="med" len="med"/>
+                      <a:tailEnd type="none" w="med" len="med"/>
+                    </a:lnL>
+                    <a:lnT w="12700" cap="flat" cmpd="sng" algn="ctr">
+                      <a:solidFill>
+                        <a:schemeClr val="bg1">
+                          <a:lumMod val="50000"/>
+                        </a:schemeClr>
+                      </a:solidFill>
+                      <a:prstDash val="solid"/>
+                      <a:round/>
+                      <a:headEnd type="none" w="med" len="med"/>
+                      <a:tailEnd type="none" w="med" len="med"/>
+                    </a:lnT>
+                  </a:tcPr>
+                </a:tc>
+                <a:tc>
+                  <a:txBody>
+                    <a:bodyPr/>
+                    <a:lstStyle/>
+                    <a:p>
+                      <a:pPr marL="0" marR="0" lvl="0" indent="0" algn="ctr" defTabSz="914400" rtl="0" eaLnBrk="1" fontAlgn="auto" latinLnBrk="0" hangingPunct="1">
+                        <a:lnSpc>
+                          <a:spcPct val="100000"/>
+                        </a:lnSpc>
+                        <a:spcBef>
+                          <a:spcPts val="0"/>
+                        </a:spcBef>
+                        <a:spcAft>
+                          <a:spcPts val="0"/>
+                        </a:spcAft>
+                        <a:buClrTx/>
+                        <a:buSzTx/>
+                        <a:buFontTx/>
+                        <a:buNone/>
+                        <a:tabLst/>
+                        <a:defRPr/>
+                      </a:pPr>
+                      <a:r>
+                        <a:rPr kumimoji="1" lang="en-US" altLang="ja-JP" sz="1200" b="0" i="0" u="none" strike="noStrike" kern="1200" cap="none" spc="0" normalizeH="0" baseline="0" noProof="0" dirty="0">
+                          <a:ln>
+                            <a:noFill/>
+                          </a:ln>
+                          <a:solidFill>
+                            <a:prstClr val="black"/>
+                          </a:solidFill>
+                          <a:effectLst/>
+                          <a:uLnTx/>
+                          <a:uFillTx/>
+                          <a:latin typeface="UD デジタル 教科書体 NP-B" panose="02020700000000000000" pitchFamily="18" charset="-128"/>
+                          <a:ea typeface="UD デジタル 教科書体 NP-B" panose="02020700000000000000" pitchFamily="18" charset="-128"/>
+                          <a:cs typeface="+mn-cs"/>
+                        </a:rPr>
+                        <a:t>2,544</a:t>
+                      </a:r>
+                      <a:endParaRPr kumimoji="1" lang="ja-JP" altLang="en-US" sz="1200" b="0" i="0" u="none" strike="noStrike" kern="1200" cap="none" spc="0" normalizeH="0" baseline="0" noProof="0" dirty="0">
+                        <a:ln>
+                          <a:noFill/>
+                        </a:ln>
+                        <a:solidFill>
+                          <a:prstClr val="black"/>
+                        </a:solidFill>
+                        <a:effectLst/>
+                        <a:uLnTx/>
+                        <a:uFillTx/>
+                        <a:latin typeface="UD デジタル 教科書体 NP-B" panose="02020700000000000000" pitchFamily="18" charset="-128"/>
+                        <a:ea typeface="UD デジタル 教科書体 NP-B" panose="02020700000000000000" pitchFamily="18" charset="-128"/>
+                        <a:cs typeface="+mn-cs"/>
+                      </a:endParaRPr>
+                    </a:p>
+                  </a:txBody>
+                  <a:tcPr anchor="ctr">
+                    <a:lnT w="12700" cap="flat" cmpd="sng" algn="ctr">
+                      <a:solidFill>
+                        <a:schemeClr val="bg1">
+                          <a:lumMod val="50000"/>
+                        </a:schemeClr>
+                      </a:solidFill>
+                      <a:prstDash val="solid"/>
+                      <a:round/>
+                      <a:headEnd type="none" w="med" len="med"/>
+                      <a:tailEnd type="none" w="med" len="med"/>
+                    </a:lnT>
+                  </a:tcPr>
+                </a:tc>
+                <a:tc>
+                  <a:txBody>
+                    <a:bodyPr/>
+                    <a:lstStyle/>
+                    <a:p>
+                      <a:pPr marL="0" marR="0" lvl="0" indent="0" algn="ctr" defTabSz="914400" rtl="0" eaLnBrk="1" fontAlgn="auto" latinLnBrk="0" hangingPunct="1">
+                        <a:lnSpc>
+                          <a:spcPct val="100000"/>
+                        </a:lnSpc>
+                        <a:spcBef>
+                          <a:spcPts val="0"/>
+                        </a:spcBef>
+                        <a:spcAft>
+                          <a:spcPts val="0"/>
+                        </a:spcAft>
+                        <a:buClrTx/>
+                        <a:buSzTx/>
+                        <a:buFontTx/>
+                        <a:buNone/>
+                        <a:tabLst/>
+                        <a:defRPr/>
+                      </a:pPr>
+                      <a:r>
+                        <a:rPr kumimoji="1" lang="en-US" altLang="ja-JP" sz="1200" b="0" i="0" u="none" strike="noStrike" kern="1200" cap="none" spc="0" normalizeH="0" baseline="0" noProof="0" dirty="0">
+                          <a:ln>
+                            <a:noFill/>
+                          </a:ln>
+                          <a:solidFill>
+                            <a:prstClr val="black"/>
+                          </a:solidFill>
+                          <a:effectLst/>
+                          <a:uLnTx/>
+                          <a:uFillTx/>
+                          <a:latin typeface="UD デジタル 教科書体 NP-B" panose="02020700000000000000" pitchFamily="18" charset="-128"/>
+                          <a:ea typeface="UD デジタル 教科書体 NP-B" panose="02020700000000000000" pitchFamily="18" charset="-128"/>
+                          <a:cs typeface="+mn-cs"/>
+                        </a:rPr>
+                        <a:t>957</a:t>
+                      </a:r>
+                      <a:endParaRPr kumimoji="1" lang="ja-JP" altLang="en-US" sz="1200" b="0" i="0" u="none" strike="noStrike" kern="1200" cap="none" spc="0" normalizeH="0" baseline="0" noProof="0" dirty="0">
+                        <a:ln>
+                          <a:noFill/>
+                        </a:ln>
+                        <a:solidFill>
+                          <a:prstClr val="black"/>
+                        </a:solidFill>
+                        <a:effectLst/>
+                        <a:uLnTx/>
+                        <a:uFillTx/>
+                        <a:latin typeface="UD デジタル 教科書体 NP-B" panose="02020700000000000000" pitchFamily="18" charset="-128"/>
+                        <a:ea typeface="UD デジタル 教科書体 NP-B" panose="02020700000000000000" pitchFamily="18" charset="-128"/>
+                        <a:cs typeface="+mn-cs"/>
+                      </a:endParaRPr>
+                    </a:p>
+                  </a:txBody>
+                  <a:tcPr anchor="ctr">
+                    <a:lnT w="12700" cap="flat" cmpd="sng" algn="ctr">
+                      <a:solidFill>
+                        <a:schemeClr val="bg1">
+                          <a:lumMod val="50000"/>
+                        </a:schemeClr>
+                      </a:solidFill>
+                      <a:prstDash val="solid"/>
+                      <a:round/>
+                      <a:headEnd type="none" w="med" len="med"/>
+                      <a:tailEnd type="none" w="med" len="med"/>
+                    </a:lnT>
+                  </a:tcPr>
+                </a:tc>
+                <a:tc>
+                  <a:txBody>
+                    <a:bodyPr/>
+                    <a:lstStyle/>
+                    <a:p>
+                      <a:pPr marL="0" marR="0" lvl="0" indent="0" algn="ctr" defTabSz="914400" rtl="0" eaLnBrk="1" fontAlgn="auto" latinLnBrk="0" hangingPunct="1">
+                        <a:lnSpc>
+                          <a:spcPct val="100000"/>
+                        </a:lnSpc>
+                        <a:spcBef>
+                          <a:spcPts val="0"/>
+                        </a:spcBef>
+                        <a:spcAft>
+                          <a:spcPts val="0"/>
+                        </a:spcAft>
+                        <a:buClrTx/>
+                        <a:buSzTx/>
+                        <a:buFontTx/>
+                        <a:buNone/>
+                        <a:tabLst/>
+                        <a:defRPr/>
+                      </a:pPr>
+                      <a:r>
+                        <a:rPr kumimoji="1" lang="en-US" altLang="ja-JP" sz="1200" b="0" i="0" u="none" strike="noStrike" kern="1200" cap="none" spc="0" normalizeH="0" baseline="0" noProof="0" dirty="0">
+                          <a:ln>
+                            <a:noFill/>
+                          </a:ln>
+                          <a:solidFill>
+                            <a:prstClr val="black"/>
+                          </a:solidFill>
+                          <a:effectLst/>
+                          <a:uLnTx/>
+                          <a:uFillTx/>
+                          <a:latin typeface="UD デジタル 教科書体 NP-B" panose="02020700000000000000" pitchFamily="18" charset="-128"/>
+                          <a:ea typeface="UD デジタル 教科書体 NP-B" panose="02020700000000000000" pitchFamily="18" charset="-128"/>
+                          <a:cs typeface="+mn-cs"/>
+                        </a:rPr>
+                        <a:t>2,884</a:t>
+                      </a:r>
+                      <a:endParaRPr kumimoji="1" lang="ja-JP" altLang="en-US" sz="1200" b="0" i="0" u="none" strike="noStrike" kern="1200" cap="none" spc="0" normalizeH="0" baseline="0" noProof="0" dirty="0">
+                        <a:ln>
+                          <a:noFill/>
+                        </a:ln>
+                        <a:solidFill>
+                          <a:prstClr val="black"/>
+                        </a:solidFill>
+                        <a:effectLst/>
+                        <a:uLnTx/>
+                        <a:uFillTx/>
+                        <a:latin typeface="UD デジタル 教科書体 NP-B" panose="02020700000000000000" pitchFamily="18" charset="-128"/>
+                        <a:ea typeface="UD デジタル 教科書体 NP-B" panose="02020700000000000000" pitchFamily="18" charset="-128"/>
+                        <a:cs typeface="+mn-cs"/>
+                      </a:endParaRPr>
+                    </a:p>
+                  </a:txBody>
+                  <a:tcPr anchor="ctr">
+                    <a:lnT w="12700" cap="flat" cmpd="sng" algn="ctr">
+                      <a:solidFill>
+                        <a:schemeClr val="bg1">
+                          <a:lumMod val="50000"/>
+                        </a:schemeClr>
+                      </a:solidFill>
+                      <a:prstDash val="solid"/>
+                      <a:round/>
+                      <a:headEnd type="none" w="med" len="med"/>
+                      <a:tailEnd type="none" w="med" len="med"/>
+                    </a:lnT>
+                  </a:tcPr>
+                </a:tc>
+                <a:extLst>
+                  <a:ext uri="{0D108BD9-81ED-4DB2-BD59-A6C34878D82A}">
+                    <a16:rowId xmlns:a16="http://schemas.microsoft.com/office/drawing/2014/main" val="601181801"/>
+                  </a:ext>
+                </a:extLst>
+              </a:tr>
+            </a:tbl>
+          </a:graphicData>
+        </a:graphic>
+      </p:graphicFrame>
+      <p:sp>
+        <p:nvSpPr>
+          <p:cNvPr id="89" name="テキスト ボックス 88">
+            <a:extLst>
+              <a:ext uri="{FF2B5EF4-FFF2-40B4-BE49-F238E27FC236}">
+                <a16:creationId xmlns:a16="http://schemas.microsoft.com/office/drawing/2014/main" id="{89ED2067-70E5-C0F7-EDA1-9DCECFEAB5C4}"/>
+              </a:ext>
+            </a:extLst>
+          </p:cNvPr>
+          <p:cNvSpPr txBox="1"/>
+          <p:nvPr/>
+        </p:nvSpPr>
+        <p:spPr>
+          <a:xfrm>
+            <a:off x="2400524" y="1981551"/>
+            <a:ext cx="2640975" cy="276999"/>
+          </a:xfrm>
+          <a:prstGeom prst="rect">
+            <a:avLst/>
+          </a:prstGeom>
+          <a:noFill/>
+        </p:spPr>
+        <p:txBody>
+          <a:bodyPr wrap="square" rtlCol="0">
+            <a:spAutoFit/>
+          </a:bodyPr>
+          <a:lstStyle/>
+          <a:p>
+            <a:r>
+              <a:rPr kumimoji="1" lang="ja-JP" altLang="en-US" sz="1200" dirty="0">
+                <a:solidFill>
+                  <a:schemeClr val="tx1">
+                    <a:lumMod val="65000"/>
+                    <a:lumOff val="35000"/>
+                  </a:schemeClr>
+                </a:solidFill>
+                <a:latin typeface="UD デジタル 教科書体 NP-B" panose="02020700000000000000" pitchFamily="18" charset="-128"/>
+                <a:ea typeface="UD デジタル 教科書体 NP-B" panose="02020700000000000000" pitchFamily="18" charset="-128"/>
+              </a:rPr>
+              <a:t>累積生産数</a:t>
+            </a:r>
+          </a:p>
+        </p:txBody>
+      </p:sp>
+      <p:sp>
+        <p:nvSpPr>
+          <p:cNvPr id="90" name="テキスト ボックス 89">
+            <a:extLst>
+              <a:ext uri="{FF2B5EF4-FFF2-40B4-BE49-F238E27FC236}">
+                <a16:creationId xmlns:a16="http://schemas.microsoft.com/office/drawing/2014/main" id="{D849127B-ED8F-03B9-78CB-AB3006C10C49}"/>
+              </a:ext>
+            </a:extLst>
+          </p:cNvPr>
+          <p:cNvSpPr txBox="1"/>
+          <p:nvPr/>
+        </p:nvSpPr>
+        <p:spPr>
+          <a:xfrm>
+            <a:off x="3681955" y="5639126"/>
+            <a:ext cx="1432397" cy="276999"/>
+          </a:xfrm>
+          <a:prstGeom prst="rect">
+            <a:avLst/>
+          </a:prstGeom>
+          <a:noFill/>
+        </p:spPr>
+        <p:txBody>
+          <a:bodyPr wrap="square" rtlCol="0">
+            <a:spAutoFit/>
+          </a:bodyPr>
+          <a:lstStyle/>
+          <a:p>
+            <a:r>
+              <a:rPr lang="ja-JP" altLang="en-US" sz="1200" dirty="0">
+                <a:solidFill>
+                  <a:schemeClr val="tx1">
+                    <a:lumMod val="65000"/>
+                    <a:lumOff val="35000"/>
+                  </a:schemeClr>
+                </a:solidFill>
+                <a:latin typeface="UD デジタル 教科書体 NP-B" panose="02020700000000000000" pitchFamily="18" charset="-128"/>
+                <a:ea typeface="UD デジタル 教科書体 NP-B" panose="02020700000000000000" pitchFamily="18" charset="-128"/>
+              </a:rPr>
+              <a:t>機械別生産数</a:t>
+            </a:r>
+            <a:endParaRPr kumimoji="1" lang="ja-JP" altLang="en-US" sz="1200" dirty="0">
+              <a:solidFill>
+                <a:schemeClr val="tx1">
+                  <a:lumMod val="65000"/>
+                  <a:lumOff val="35000"/>
+                </a:schemeClr>
+              </a:solidFill>
+              <a:latin typeface="UD デジタル 教科書体 NP-B" panose="02020700000000000000" pitchFamily="18" charset="-128"/>
+              <a:ea typeface="UD デジタル 教科書体 NP-B" panose="02020700000000000000" pitchFamily="18" charset="-128"/>
+            </a:endParaRPr>
+          </a:p>
+        </p:txBody>
+      </p:sp>
+      <p:sp>
+        <p:nvSpPr>
+          <p:cNvPr id="91" name="正方形/長方形 90">
+            <a:extLst>
+              <a:ext uri="{FF2B5EF4-FFF2-40B4-BE49-F238E27FC236}">
+                <a16:creationId xmlns:a16="http://schemas.microsoft.com/office/drawing/2014/main" id="{22A10175-E604-02DA-669F-E3A3C4250D6C}"/>
+              </a:ext>
+            </a:extLst>
+          </p:cNvPr>
+          <p:cNvSpPr/>
+          <p:nvPr/>
+        </p:nvSpPr>
+        <p:spPr>
+          <a:xfrm>
+            <a:off x="1390576" y="6107197"/>
+            <a:ext cx="826796" cy="303128"/>
+          </a:xfrm>
+          <a:prstGeom prst="rect">
+            <a:avLst/>
+          </a:prstGeom>
+          <a:noFill/>
+          <a:ln w="9525">
+            <a:solidFill>
+              <a:schemeClr val="tx1">
+                <a:lumMod val="50000"/>
+                <a:lumOff val="50000"/>
+              </a:schemeClr>
+            </a:solidFill>
+          </a:ln>
+        </p:spPr>
+        <p:style>
+          <a:lnRef idx="2">
+            <a:schemeClr val="accent1">
+              <a:shade val="15000"/>
+            </a:schemeClr>
+          </a:lnRef>
+          <a:fillRef idx="1">
+            <a:schemeClr val="accent1"/>
+          </a:fillRef>
+          <a:effectRef idx="0">
+            <a:schemeClr val="accent1"/>
+          </a:effectRef>
+          <a:fontRef idx="minor">
+            <a:schemeClr val="lt1"/>
+          </a:fontRef>
+        </p:style>
+        <p:txBody>
+          <a:bodyPr rtlCol="0" anchor="ctr"/>
+          <a:lstStyle/>
+          <a:p>
+            <a:pPr algn="ctr"/>
+            <a:endParaRPr kumimoji="1" lang="ja-JP" altLang="en-US" dirty="0">
+              <a:latin typeface="UD デジタル 教科書体 NP-B" panose="02020700000000000000" pitchFamily="18" charset="-128"/>
+              <a:ea typeface="UD デジタル 教科書体 NP-B" panose="02020700000000000000" pitchFamily="18" charset="-128"/>
+            </a:endParaRPr>
+          </a:p>
+        </p:txBody>
+      </p:sp>
+      <p:sp>
+        <p:nvSpPr>
+          <p:cNvPr id="92" name="正方形/長方形 91">
+            <a:extLst>
+              <a:ext uri="{FF2B5EF4-FFF2-40B4-BE49-F238E27FC236}">
+                <a16:creationId xmlns:a16="http://schemas.microsoft.com/office/drawing/2014/main" id="{6BFC6A50-788F-B8C1-D6F6-99196950F849}"/>
+              </a:ext>
+            </a:extLst>
+          </p:cNvPr>
+          <p:cNvSpPr/>
+          <p:nvPr/>
+        </p:nvSpPr>
+        <p:spPr>
+          <a:xfrm>
+            <a:off x="308054" y="1729384"/>
+            <a:ext cx="671559" cy="144017"/>
+          </a:xfrm>
+          <a:prstGeom prst="rect">
+            <a:avLst/>
+          </a:prstGeom>
+          <a:noFill/>
+          <a:ln w="9525">
+            <a:solidFill>
+              <a:schemeClr val="tx1">
+                <a:lumMod val="50000"/>
+                <a:lumOff val="50000"/>
+              </a:schemeClr>
+            </a:solidFill>
+          </a:ln>
+        </p:spPr>
+        <p:style>
+          <a:lnRef idx="2">
+            <a:schemeClr val="accent1">
+              <a:shade val="15000"/>
+            </a:schemeClr>
+          </a:lnRef>
+          <a:fillRef idx="1">
+            <a:schemeClr val="accent1"/>
+          </a:fillRef>
+          <a:effectRef idx="0">
+            <a:schemeClr val="accent1"/>
+          </a:effectRef>
+          <a:fontRef idx="minor">
+            <a:schemeClr val="lt1"/>
+          </a:fontRef>
+        </p:style>
+        <p:txBody>
+          <a:bodyPr rtlCol="0" anchor="ctr"/>
+          <a:lstStyle/>
+          <a:p>
+            <a:pPr algn="ctr"/>
+            <a:r>
+              <a:rPr kumimoji="1" lang="en-US" altLang="ja-JP" sz="900" dirty="0">
+                <a:solidFill>
+                  <a:schemeClr val="tx1"/>
+                </a:solidFill>
+                <a:latin typeface="UD デジタル 教科書体 NP-B" panose="02020700000000000000" pitchFamily="18" charset="-128"/>
+                <a:ea typeface="UD デジタル 教科書体 NP-B" panose="02020700000000000000" pitchFamily="18" charset="-128"/>
+              </a:rPr>
+              <a:t>NAME</a:t>
+            </a:r>
+            <a:endParaRPr kumimoji="1" lang="ja-JP" altLang="en-US" sz="900" dirty="0">
+              <a:solidFill>
+                <a:schemeClr val="tx1"/>
+              </a:solidFill>
+              <a:latin typeface="UD デジタル 教科書体 NP-B" panose="02020700000000000000" pitchFamily="18" charset="-128"/>
+              <a:ea typeface="UD デジタル 教科書体 NP-B" panose="02020700000000000000" pitchFamily="18" charset="-128"/>
+            </a:endParaRPr>
+          </a:p>
+        </p:txBody>
+      </p:sp>
+      <p:sp>
+        <p:nvSpPr>
+          <p:cNvPr id="95" name="正方形/長方形 94">
+            <a:extLst>
+              <a:ext uri="{FF2B5EF4-FFF2-40B4-BE49-F238E27FC236}">
+                <a16:creationId xmlns:a16="http://schemas.microsoft.com/office/drawing/2014/main" id="{0A7DEF6F-4C9C-DAEC-8E09-D6AA146FEA95}"/>
+              </a:ext>
+            </a:extLst>
+          </p:cNvPr>
+          <p:cNvSpPr/>
+          <p:nvPr/>
+        </p:nvSpPr>
+        <p:spPr>
+          <a:xfrm>
+            <a:off x="1002957" y="1729384"/>
+            <a:ext cx="671559" cy="144017"/>
+          </a:xfrm>
+          <a:prstGeom prst="rect">
+            <a:avLst/>
+          </a:prstGeom>
+          <a:noFill/>
+          <a:ln w="9525">
+            <a:solidFill>
+              <a:schemeClr val="tx1">
+                <a:lumMod val="50000"/>
+                <a:lumOff val="50000"/>
+              </a:schemeClr>
+            </a:solidFill>
+          </a:ln>
+        </p:spPr>
+        <p:style>
+          <a:lnRef idx="2">
+            <a:schemeClr val="accent1">
+              <a:shade val="15000"/>
+            </a:schemeClr>
+          </a:lnRef>
+          <a:fillRef idx="1">
+            <a:schemeClr val="accent1"/>
+          </a:fillRef>
+          <a:effectRef idx="0">
+            <a:schemeClr val="accent1"/>
+          </a:effectRef>
+          <a:fontRef idx="minor">
+            <a:schemeClr val="lt1"/>
+          </a:fontRef>
+        </p:style>
+        <p:txBody>
+          <a:bodyPr rtlCol="0" anchor="ctr"/>
+          <a:lstStyle/>
+          <a:p>
+            <a:pPr algn="ctr"/>
+            <a:r>
+              <a:rPr kumimoji="1" lang="en-US" altLang="ja-JP" sz="900" dirty="0">
+                <a:solidFill>
+                  <a:schemeClr val="tx1"/>
+                </a:solidFill>
+                <a:latin typeface="UD デジタル 教科書体 NP-B" panose="02020700000000000000" pitchFamily="18" charset="-128"/>
+                <a:ea typeface="UD デジタル 教科書体 NP-B" panose="02020700000000000000" pitchFamily="18" charset="-128"/>
+              </a:rPr>
+              <a:t>NAME</a:t>
+            </a:r>
+            <a:endParaRPr kumimoji="1" lang="ja-JP" altLang="en-US" sz="900" dirty="0">
+              <a:solidFill>
+                <a:schemeClr val="tx1"/>
+              </a:solidFill>
+              <a:latin typeface="UD デジタル 教科書体 NP-B" panose="02020700000000000000" pitchFamily="18" charset="-128"/>
+              <a:ea typeface="UD デジタル 教科書体 NP-B" panose="02020700000000000000" pitchFamily="18" charset="-128"/>
+            </a:endParaRPr>
+          </a:p>
+        </p:txBody>
+      </p:sp>
+      <p:sp>
+        <p:nvSpPr>
+          <p:cNvPr id="96" name="正方形/長方形 95">
+            <a:extLst>
+              <a:ext uri="{FF2B5EF4-FFF2-40B4-BE49-F238E27FC236}">
+                <a16:creationId xmlns:a16="http://schemas.microsoft.com/office/drawing/2014/main" id="{5D8AC10B-98F4-DDC8-C084-3BE867F1E86F}"/>
+              </a:ext>
+            </a:extLst>
+          </p:cNvPr>
+          <p:cNvSpPr/>
+          <p:nvPr/>
+        </p:nvSpPr>
+        <p:spPr>
+          <a:xfrm>
+            <a:off x="1698097" y="1725895"/>
+            <a:ext cx="671559" cy="144017"/>
+          </a:xfrm>
+          <a:prstGeom prst="rect">
+            <a:avLst/>
+          </a:prstGeom>
+          <a:noFill/>
+          <a:ln w="9525">
+            <a:solidFill>
+              <a:schemeClr val="tx1">
+                <a:lumMod val="50000"/>
+                <a:lumOff val="50000"/>
+              </a:schemeClr>
+            </a:solidFill>
+          </a:ln>
+        </p:spPr>
+        <p:style>
+          <a:lnRef idx="2">
+            <a:schemeClr val="accent1">
+              <a:shade val="15000"/>
+            </a:schemeClr>
+          </a:lnRef>
+          <a:fillRef idx="1">
+            <a:schemeClr val="accent1"/>
+          </a:fillRef>
+          <a:effectRef idx="0">
+            <a:schemeClr val="accent1"/>
+          </a:effectRef>
+          <a:fontRef idx="minor">
+            <a:schemeClr val="lt1"/>
+          </a:fontRef>
+        </p:style>
+        <p:txBody>
+          <a:bodyPr rtlCol="0" anchor="ctr"/>
+          <a:lstStyle/>
+          <a:p>
+            <a:pPr algn="ctr"/>
+            <a:r>
+              <a:rPr kumimoji="1" lang="en-US" altLang="ja-JP" sz="900" dirty="0">
+                <a:solidFill>
+                  <a:schemeClr val="tx1"/>
+                </a:solidFill>
+                <a:latin typeface="UD デジタル 教科書体 NP-B" panose="02020700000000000000" pitchFamily="18" charset="-128"/>
+                <a:ea typeface="UD デジタル 教科書体 NP-B" panose="02020700000000000000" pitchFamily="18" charset="-128"/>
+              </a:rPr>
+              <a:t>NAME</a:t>
+            </a:r>
+            <a:endParaRPr kumimoji="1" lang="ja-JP" altLang="en-US" sz="900" dirty="0">
+              <a:solidFill>
+                <a:schemeClr val="tx1"/>
+              </a:solidFill>
+              <a:latin typeface="UD デジタル 教科書体 NP-B" panose="02020700000000000000" pitchFamily="18" charset="-128"/>
+              <a:ea typeface="UD デジタル 教科書体 NP-B" panose="02020700000000000000" pitchFamily="18" charset="-128"/>
+            </a:endParaRPr>
+          </a:p>
+        </p:txBody>
+      </p:sp>
+      <p:sp>
+        <p:nvSpPr>
+          <p:cNvPr id="97" name="正方形/長方形 96">
+            <a:extLst>
+              <a:ext uri="{FF2B5EF4-FFF2-40B4-BE49-F238E27FC236}">
+                <a16:creationId xmlns:a16="http://schemas.microsoft.com/office/drawing/2014/main" id="{E0E5164E-0FB9-12E8-450F-85597EA64A6F}"/>
+              </a:ext>
+            </a:extLst>
+          </p:cNvPr>
+          <p:cNvSpPr/>
+          <p:nvPr/>
+        </p:nvSpPr>
+        <p:spPr>
+          <a:xfrm>
+            <a:off x="301069" y="2884789"/>
+            <a:ext cx="671559" cy="144017"/>
+          </a:xfrm>
+          <a:prstGeom prst="rect">
+            <a:avLst/>
+          </a:prstGeom>
+          <a:noFill/>
+          <a:ln w="9525">
+            <a:solidFill>
+              <a:schemeClr val="tx1">
+                <a:lumMod val="50000"/>
+                <a:lumOff val="50000"/>
+              </a:schemeClr>
+            </a:solidFill>
+          </a:ln>
+        </p:spPr>
+        <p:style>
+          <a:lnRef idx="2">
+            <a:schemeClr val="accent1">
+              <a:shade val="15000"/>
+            </a:schemeClr>
+          </a:lnRef>
+          <a:fillRef idx="1">
+            <a:schemeClr val="accent1"/>
+          </a:fillRef>
+          <a:effectRef idx="0">
+            <a:schemeClr val="accent1"/>
+          </a:effectRef>
+          <a:fontRef idx="minor">
+            <a:schemeClr val="lt1"/>
+          </a:fontRef>
+        </p:style>
+        <p:txBody>
+          <a:bodyPr rtlCol="0" anchor="ctr"/>
+          <a:lstStyle/>
+          <a:p>
+            <a:pPr algn="ctr"/>
+            <a:r>
+              <a:rPr kumimoji="1" lang="en-US" altLang="ja-JP" sz="900" dirty="0">
+                <a:solidFill>
+                  <a:schemeClr val="tx1"/>
+                </a:solidFill>
+                <a:latin typeface="UD デジタル 教科書体 NP-B" panose="02020700000000000000" pitchFamily="18" charset="-128"/>
+                <a:ea typeface="UD デジタル 教科書体 NP-B" panose="02020700000000000000" pitchFamily="18" charset="-128"/>
+              </a:rPr>
+              <a:t>NAME</a:t>
+            </a:r>
+            <a:endParaRPr kumimoji="1" lang="ja-JP" altLang="en-US" sz="900" dirty="0">
+              <a:solidFill>
+                <a:schemeClr val="tx1"/>
+              </a:solidFill>
+              <a:latin typeface="UD デジタル 教科書体 NP-B" panose="02020700000000000000" pitchFamily="18" charset="-128"/>
+              <a:ea typeface="UD デジタル 教科書体 NP-B" panose="02020700000000000000" pitchFamily="18" charset="-128"/>
+            </a:endParaRPr>
+          </a:p>
+        </p:txBody>
+      </p:sp>
+      <p:sp>
+        <p:nvSpPr>
+          <p:cNvPr id="98" name="正方形/長方形 97">
+            <a:extLst>
+              <a:ext uri="{FF2B5EF4-FFF2-40B4-BE49-F238E27FC236}">
+                <a16:creationId xmlns:a16="http://schemas.microsoft.com/office/drawing/2014/main" id="{3A00516B-8E6F-0438-99F0-932495884AF8}"/>
+              </a:ext>
+            </a:extLst>
+          </p:cNvPr>
+          <p:cNvSpPr/>
+          <p:nvPr/>
+        </p:nvSpPr>
+        <p:spPr>
+          <a:xfrm>
+            <a:off x="992797" y="2884789"/>
+            <a:ext cx="671559" cy="144017"/>
+          </a:xfrm>
+          <a:prstGeom prst="rect">
+            <a:avLst/>
+          </a:prstGeom>
+          <a:noFill/>
+          <a:ln w="9525">
+            <a:solidFill>
+              <a:schemeClr val="tx1">
+                <a:lumMod val="50000"/>
+                <a:lumOff val="50000"/>
+              </a:schemeClr>
+            </a:solidFill>
+          </a:ln>
+        </p:spPr>
+        <p:style>
+          <a:lnRef idx="2">
+            <a:schemeClr val="accent1">
+              <a:shade val="15000"/>
+            </a:schemeClr>
+          </a:lnRef>
+          <a:fillRef idx="1">
+            <a:schemeClr val="accent1"/>
+          </a:fillRef>
+          <a:effectRef idx="0">
+            <a:schemeClr val="accent1"/>
+          </a:effectRef>
+          <a:fontRef idx="minor">
+            <a:schemeClr val="lt1"/>
+          </a:fontRef>
+        </p:style>
+        <p:txBody>
+          <a:bodyPr rtlCol="0" anchor="ctr"/>
+          <a:lstStyle/>
+          <a:p>
+            <a:pPr algn="ctr"/>
+            <a:r>
+              <a:rPr kumimoji="1" lang="en-US" altLang="ja-JP" sz="900" dirty="0">
+                <a:solidFill>
+                  <a:schemeClr val="tx1"/>
+                </a:solidFill>
+                <a:latin typeface="UD デジタル 教科書体 NP-B" panose="02020700000000000000" pitchFamily="18" charset="-128"/>
+                <a:ea typeface="UD デジタル 教科書体 NP-B" panose="02020700000000000000" pitchFamily="18" charset="-128"/>
+              </a:rPr>
+              <a:t>NAME</a:t>
+            </a:r>
+            <a:endParaRPr kumimoji="1" lang="ja-JP" altLang="en-US" sz="900" dirty="0">
+              <a:solidFill>
+                <a:schemeClr val="tx1"/>
+              </a:solidFill>
+              <a:latin typeface="UD デジタル 教科書体 NP-B" panose="02020700000000000000" pitchFamily="18" charset="-128"/>
+              <a:ea typeface="UD デジタル 教科書体 NP-B" panose="02020700000000000000" pitchFamily="18" charset="-128"/>
+            </a:endParaRPr>
+          </a:p>
+        </p:txBody>
+      </p:sp>
+      <p:sp>
+        <p:nvSpPr>
+          <p:cNvPr id="99" name="正方形/長方形 98">
+            <a:extLst>
+              <a:ext uri="{FF2B5EF4-FFF2-40B4-BE49-F238E27FC236}">
+                <a16:creationId xmlns:a16="http://schemas.microsoft.com/office/drawing/2014/main" id="{F1F13337-AC4F-24BB-7EB7-45BAD36C7CB3}"/>
+              </a:ext>
+            </a:extLst>
+          </p:cNvPr>
+          <p:cNvSpPr/>
+          <p:nvPr/>
+        </p:nvSpPr>
+        <p:spPr>
+          <a:xfrm>
+            <a:off x="1697462" y="2881300"/>
+            <a:ext cx="671559" cy="144017"/>
+          </a:xfrm>
+          <a:prstGeom prst="rect">
+            <a:avLst/>
+          </a:prstGeom>
+          <a:noFill/>
+          <a:ln w="9525">
+            <a:solidFill>
+              <a:schemeClr val="tx1">
+                <a:lumMod val="50000"/>
+                <a:lumOff val="50000"/>
+              </a:schemeClr>
+            </a:solidFill>
+          </a:ln>
+        </p:spPr>
+        <p:style>
+          <a:lnRef idx="2">
+            <a:schemeClr val="accent1">
+              <a:shade val="15000"/>
+            </a:schemeClr>
+          </a:lnRef>
+          <a:fillRef idx="1">
+            <a:schemeClr val="accent1"/>
+          </a:fillRef>
+          <a:effectRef idx="0">
+            <a:schemeClr val="accent1"/>
+          </a:effectRef>
+          <a:fontRef idx="minor">
+            <a:schemeClr val="lt1"/>
+          </a:fontRef>
+        </p:style>
+        <p:txBody>
+          <a:bodyPr rtlCol="0" anchor="ctr"/>
+          <a:lstStyle/>
+          <a:p>
+            <a:pPr algn="ctr"/>
+            <a:r>
+              <a:rPr kumimoji="1" lang="en-US" altLang="ja-JP" sz="900" dirty="0">
+                <a:solidFill>
+                  <a:schemeClr val="tx1"/>
+                </a:solidFill>
+                <a:latin typeface="UD デジタル 教科書体 NP-B" panose="02020700000000000000" pitchFamily="18" charset="-128"/>
+                <a:ea typeface="UD デジタル 教科書体 NP-B" panose="02020700000000000000" pitchFamily="18" charset="-128"/>
+              </a:rPr>
+              <a:t>NAME</a:t>
+            </a:r>
+            <a:endParaRPr kumimoji="1" lang="ja-JP" altLang="en-US" sz="900" dirty="0">
+              <a:solidFill>
+                <a:schemeClr val="tx1"/>
+              </a:solidFill>
+              <a:latin typeface="UD デジタル 教科書体 NP-B" panose="02020700000000000000" pitchFamily="18" charset="-128"/>
+              <a:ea typeface="UD デジタル 教科書体 NP-B" panose="02020700000000000000" pitchFamily="18" charset="-128"/>
+            </a:endParaRPr>
+          </a:p>
+        </p:txBody>
+      </p:sp>
+      <p:sp>
+        <p:nvSpPr>
+          <p:cNvPr id="100" name="正方形/長方形 99">
+            <a:extLst>
+              <a:ext uri="{FF2B5EF4-FFF2-40B4-BE49-F238E27FC236}">
+                <a16:creationId xmlns:a16="http://schemas.microsoft.com/office/drawing/2014/main" id="{02CCBFF0-1454-DDA6-7C93-ABABC1D8B6C0}"/>
+              </a:ext>
+            </a:extLst>
+          </p:cNvPr>
+          <p:cNvSpPr/>
+          <p:nvPr/>
+        </p:nvSpPr>
+        <p:spPr>
+          <a:xfrm>
+            <a:off x="1696707" y="2034846"/>
+            <a:ext cx="671559" cy="821732"/>
+          </a:xfrm>
+          <a:prstGeom prst="rect">
+            <a:avLst/>
+          </a:prstGeom>
+          <a:noFill/>
+          <a:ln w="9525">
+            <a:solidFill>
+              <a:schemeClr val="tx1">
+                <a:lumMod val="50000"/>
+                <a:lumOff val="50000"/>
+              </a:schemeClr>
+            </a:solidFill>
+          </a:ln>
+        </p:spPr>
+        <p:style>
+          <a:lnRef idx="2">
+            <a:schemeClr val="accent1">
+              <a:shade val="15000"/>
+            </a:schemeClr>
+          </a:lnRef>
+          <a:fillRef idx="1">
+            <a:schemeClr val="accent1"/>
+          </a:fillRef>
+          <a:effectRef idx="0">
+            <a:schemeClr val="accent1"/>
+          </a:effectRef>
+          <a:fontRef idx="minor">
+            <a:schemeClr val="lt1"/>
+          </a:fontRef>
+        </p:style>
+        <p:txBody>
+          <a:bodyPr rtlCol="0" anchor="ctr"/>
+          <a:lstStyle/>
+          <a:p>
+            <a:pPr algn="ctr"/>
+            <a:endParaRPr kumimoji="1" lang="ja-JP" altLang="en-US" sz="900" dirty="0">
+              <a:solidFill>
+                <a:schemeClr val="tx1"/>
+              </a:solidFill>
+              <a:latin typeface="UD デジタル 教科書体 NP-B" panose="02020700000000000000" pitchFamily="18" charset="-128"/>
+              <a:ea typeface="UD デジタル 教科書体 NP-B" panose="02020700000000000000" pitchFamily="18" charset="-128"/>
+            </a:endParaRPr>
+          </a:p>
+        </p:txBody>
+      </p:sp>
+      <p:sp>
+        <p:nvSpPr>
+          <p:cNvPr id="101" name="正方形/長方形 100">
+            <a:extLst>
+              <a:ext uri="{FF2B5EF4-FFF2-40B4-BE49-F238E27FC236}">
+                <a16:creationId xmlns:a16="http://schemas.microsoft.com/office/drawing/2014/main" id="{B2F5F130-1670-31EC-70F5-B475F3B1B038}"/>
+              </a:ext>
+            </a:extLst>
+          </p:cNvPr>
+          <p:cNvSpPr/>
+          <p:nvPr/>
+        </p:nvSpPr>
+        <p:spPr>
+          <a:xfrm>
+            <a:off x="9798179" y="1725711"/>
+            <a:ext cx="671559" cy="144017"/>
+          </a:xfrm>
+          <a:prstGeom prst="rect">
+            <a:avLst/>
+          </a:prstGeom>
+          <a:noFill/>
+          <a:ln w="9525">
+            <a:solidFill>
+              <a:schemeClr val="tx1">
+                <a:lumMod val="50000"/>
+                <a:lumOff val="50000"/>
+              </a:schemeClr>
+            </a:solidFill>
+          </a:ln>
+        </p:spPr>
+        <p:style>
+          <a:lnRef idx="2">
+            <a:schemeClr val="accent1">
+              <a:shade val="15000"/>
+            </a:schemeClr>
+          </a:lnRef>
+          <a:fillRef idx="1">
+            <a:schemeClr val="accent1"/>
+          </a:fillRef>
+          <a:effectRef idx="0">
+            <a:schemeClr val="accent1"/>
+          </a:effectRef>
+          <a:fontRef idx="minor">
+            <a:schemeClr val="lt1"/>
+          </a:fontRef>
+        </p:style>
+        <p:txBody>
+          <a:bodyPr rtlCol="0" anchor="ctr"/>
+          <a:lstStyle/>
+          <a:p>
+            <a:pPr algn="ctr"/>
+            <a:r>
+              <a:rPr kumimoji="1" lang="en-US" altLang="ja-JP" sz="900" dirty="0">
+                <a:solidFill>
+                  <a:schemeClr val="tx1"/>
+                </a:solidFill>
+                <a:latin typeface="UD デジタル 教科書体 NP-B" panose="02020700000000000000" pitchFamily="18" charset="-128"/>
+                <a:ea typeface="UD デジタル 教科書体 NP-B" panose="02020700000000000000" pitchFamily="18" charset="-128"/>
+              </a:rPr>
+              <a:t>NAME</a:t>
+            </a:r>
+            <a:endParaRPr kumimoji="1" lang="ja-JP" altLang="en-US" sz="900" dirty="0">
+              <a:solidFill>
+                <a:schemeClr val="tx1"/>
+              </a:solidFill>
+              <a:latin typeface="UD デジタル 教科書体 NP-B" panose="02020700000000000000" pitchFamily="18" charset="-128"/>
+              <a:ea typeface="UD デジタル 教科書体 NP-B" panose="02020700000000000000" pitchFamily="18" charset="-128"/>
+            </a:endParaRPr>
+          </a:p>
+        </p:txBody>
+      </p:sp>
+      <p:sp>
+        <p:nvSpPr>
+          <p:cNvPr id="102" name="正方形/長方形 101">
+            <a:extLst>
+              <a:ext uri="{FF2B5EF4-FFF2-40B4-BE49-F238E27FC236}">
+                <a16:creationId xmlns:a16="http://schemas.microsoft.com/office/drawing/2014/main" id="{F9DE4E79-3B42-AE83-3CA2-D07B7C7ECDE7}"/>
+              </a:ext>
+            </a:extLst>
+          </p:cNvPr>
+          <p:cNvSpPr/>
+          <p:nvPr/>
+        </p:nvSpPr>
+        <p:spPr>
+          <a:xfrm>
+            <a:off x="10508957" y="1725711"/>
+            <a:ext cx="671559" cy="144017"/>
+          </a:xfrm>
+          <a:prstGeom prst="rect">
+            <a:avLst/>
+          </a:prstGeom>
+          <a:noFill/>
+          <a:ln w="9525">
+            <a:solidFill>
+              <a:schemeClr val="tx1">
+                <a:lumMod val="50000"/>
+                <a:lumOff val="50000"/>
+              </a:schemeClr>
+            </a:solidFill>
+          </a:ln>
+        </p:spPr>
+        <p:style>
+          <a:lnRef idx="2">
+            <a:schemeClr val="accent1">
+              <a:shade val="15000"/>
+            </a:schemeClr>
+          </a:lnRef>
+          <a:fillRef idx="1">
+            <a:schemeClr val="accent1"/>
+          </a:fillRef>
+          <a:effectRef idx="0">
+            <a:schemeClr val="accent1"/>
+          </a:effectRef>
+          <a:fontRef idx="minor">
+            <a:schemeClr val="lt1"/>
+          </a:fontRef>
+        </p:style>
+        <p:txBody>
+          <a:bodyPr rtlCol="0" anchor="ctr"/>
+          <a:lstStyle/>
+          <a:p>
+            <a:pPr algn="ctr"/>
+            <a:r>
+              <a:rPr kumimoji="1" lang="en-US" altLang="ja-JP" sz="900" dirty="0">
+                <a:solidFill>
+                  <a:schemeClr val="tx1"/>
+                </a:solidFill>
+                <a:latin typeface="UD デジタル 教科書体 NP-B" panose="02020700000000000000" pitchFamily="18" charset="-128"/>
+                <a:ea typeface="UD デジタル 教科書体 NP-B" panose="02020700000000000000" pitchFamily="18" charset="-128"/>
+              </a:rPr>
+              <a:t>NAME</a:t>
+            </a:r>
+            <a:endParaRPr kumimoji="1" lang="ja-JP" altLang="en-US" sz="900" dirty="0">
+              <a:solidFill>
+                <a:schemeClr val="tx1"/>
+              </a:solidFill>
+              <a:latin typeface="UD デジタル 教科書体 NP-B" panose="02020700000000000000" pitchFamily="18" charset="-128"/>
+              <a:ea typeface="UD デジタル 教科書体 NP-B" panose="02020700000000000000" pitchFamily="18" charset="-128"/>
+            </a:endParaRPr>
+          </a:p>
+        </p:txBody>
+      </p:sp>
+      <p:sp>
+        <p:nvSpPr>
+          <p:cNvPr id="103" name="正方形/長方形 102">
+            <a:extLst>
+              <a:ext uri="{FF2B5EF4-FFF2-40B4-BE49-F238E27FC236}">
+                <a16:creationId xmlns:a16="http://schemas.microsoft.com/office/drawing/2014/main" id="{5053B668-4D15-B262-2D6F-DD04CDB45ACE}"/>
+              </a:ext>
+            </a:extLst>
+          </p:cNvPr>
+          <p:cNvSpPr/>
+          <p:nvPr/>
+        </p:nvSpPr>
+        <p:spPr>
+          <a:xfrm>
+            <a:off x="11210447" y="1722222"/>
+            <a:ext cx="671559" cy="144017"/>
+          </a:xfrm>
+          <a:prstGeom prst="rect">
+            <a:avLst/>
+          </a:prstGeom>
+          <a:noFill/>
+          <a:ln w="9525">
+            <a:solidFill>
+              <a:schemeClr val="tx1">
+                <a:lumMod val="50000"/>
+                <a:lumOff val="50000"/>
+              </a:schemeClr>
+            </a:solidFill>
+          </a:ln>
+        </p:spPr>
+        <p:style>
+          <a:lnRef idx="2">
+            <a:schemeClr val="accent1">
+              <a:shade val="15000"/>
+            </a:schemeClr>
+          </a:lnRef>
+          <a:fillRef idx="1">
+            <a:schemeClr val="accent1"/>
+          </a:fillRef>
+          <a:effectRef idx="0">
+            <a:schemeClr val="accent1"/>
+          </a:effectRef>
+          <a:fontRef idx="minor">
+            <a:schemeClr val="lt1"/>
+          </a:fontRef>
+        </p:style>
+        <p:txBody>
+          <a:bodyPr rtlCol="0" anchor="ctr"/>
+          <a:lstStyle/>
+          <a:p>
+            <a:pPr algn="ctr"/>
+            <a:r>
+              <a:rPr kumimoji="1" lang="en-US" altLang="ja-JP" sz="900" dirty="0">
+                <a:solidFill>
+                  <a:schemeClr val="tx1"/>
+                </a:solidFill>
+                <a:latin typeface="UD デジタル 教科書体 NP-B" panose="02020700000000000000" pitchFamily="18" charset="-128"/>
+                <a:ea typeface="UD デジタル 教科書体 NP-B" panose="02020700000000000000" pitchFamily="18" charset="-128"/>
+              </a:rPr>
+              <a:t>NAME</a:t>
+            </a:r>
+            <a:endParaRPr kumimoji="1" lang="ja-JP" altLang="en-US" sz="900" dirty="0">
+              <a:solidFill>
+                <a:schemeClr val="tx1"/>
+              </a:solidFill>
+              <a:latin typeface="UD デジタル 教科書体 NP-B" panose="02020700000000000000" pitchFamily="18" charset="-128"/>
+              <a:ea typeface="UD デジタル 教科書体 NP-B" panose="02020700000000000000" pitchFamily="18" charset="-128"/>
+            </a:endParaRPr>
+          </a:p>
+        </p:txBody>
+      </p:sp>
+      <p:sp>
+        <p:nvSpPr>
+          <p:cNvPr id="104" name="正方形/長方形 103">
+            <a:extLst>
+              <a:ext uri="{FF2B5EF4-FFF2-40B4-BE49-F238E27FC236}">
+                <a16:creationId xmlns:a16="http://schemas.microsoft.com/office/drawing/2014/main" id="{CD4D88EE-7901-6742-82FB-7B5015C8E4EC}"/>
+              </a:ext>
+            </a:extLst>
+          </p:cNvPr>
+          <p:cNvSpPr/>
+          <p:nvPr/>
+        </p:nvSpPr>
+        <p:spPr>
+          <a:xfrm>
+            <a:off x="9822550" y="2954603"/>
+            <a:ext cx="671559" cy="144017"/>
+          </a:xfrm>
+          <a:prstGeom prst="rect">
+            <a:avLst/>
+          </a:prstGeom>
+          <a:noFill/>
+          <a:ln w="9525">
+            <a:solidFill>
+              <a:schemeClr val="tx1">
+                <a:lumMod val="50000"/>
+                <a:lumOff val="50000"/>
+              </a:schemeClr>
+            </a:solidFill>
+          </a:ln>
+        </p:spPr>
+        <p:style>
+          <a:lnRef idx="2">
+            <a:schemeClr val="accent1">
+              <a:shade val="15000"/>
+            </a:schemeClr>
+          </a:lnRef>
+          <a:fillRef idx="1">
+            <a:schemeClr val="accent1"/>
+          </a:fillRef>
+          <a:effectRef idx="0">
+            <a:schemeClr val="accent1"/>
+          </a:effectRef>
+          <a:fontRef idx="minor">
+            <a:schemeClr val="lt1"/>
+          </a:fontRef>
+        </p:style>
+        <p:txBody>
+          <a:bodyPr rtlCol="0" anchor="ctr"/>
+          <a:lstStyle/>
+          <a:p>
+            <a:pPr algn="ctr"/>
+            <a:r>
+              <a:rPr kumimoji="1" lang="en-US" altLang="ja-JP" sz="900" dirty="0">
+                <a:solidFill>
+                  <a:schemeClr val="tx1"/>
+                </a:solidFill>
+                <a:latin typeface="UD デジタル 教科書体 NP-B" panose="02020700000000000000" pitchFamily="18" charset="-128"/>
+                <a:ea typeface="UD デジタル 教科書体 NP-B" panose="02020700000000000000" pitchFamily="18" charset="-128"/>
+              </a:rPr>
+              <a:t>NAME</a:t>
+            </a:r>
+            <a:endParaRPr kumimoji="1" lang="ja-JP" altLang="en-US" sz="900" dirty="0">
+              <a:solidFill>
+                <a:schemeClr val="tx1"/>
+              </a:solidFill>
+              <a:latin typeface="UD デジタル 教科書体 NP-B" panose="02020700000000000000" pitchFamily="18" charset="-128"/>
+              <a:ea typeface="UD デジタル 教科書体 NP-B" panose="02020700000000000000" pitchFamily="18" charset="-128"/>
+            </a:endParaRPr>
+          </a:p>
+        </p:txBody>
+      </p:sp>
+      <p:sp>
+        <p:nvSpPr>
+          <p:cNvPr id="105" name="正方形/長方形 104">
+            <a:extLst>
+              <a:ext uri="{FF2B5EF4-FFF2-40B4-BE49-F238E27FC236}">
+                <a16:creationId xmlns:a16="http://schemas.microsoft.com/office/drawing/2014/main" id="{CDE5A2C8-F4B9-3D23-C6CD-007BE50FB86E}"/>
+              </a:ext>
+            </a:extLst>
+          </p:cNvPr>
+          <p:cNvSpPr/>
+          <p:nvPr/>
+        </p:nvSpPr>
+        <p:spPr>
+          <a:xfrm>
+            <a:off x="10530153" y="2954603"/>
+            <a:ext cx="671559" cy="144017"/>
+          </a:xfrm>
+          <a:prstGeom prst="rect">
+            <a:avLst/>
+          </a:prstGeom>
+          <a:noFill/>
+          <a:ln w="9525">
+            <a:solidFill>
+              <a:schemeClr val="tx1">
+                <a:lumMod val="50000"/>
+                <a:lumOff val="50000"/>
+              </a:schemeClr>
+            </a:solidFill>
+          </a:ln>
+        </p:spPr>
+        <p:style>
+          <a:lnRef idx="2">
+            <a:schemeClr val="accent1">
+              <a:shade val="15000"/>
+            </a:schemeClr>
+          </a:lnRef>
+          <a:fillRef idx="1">
+            <a:schemeClr val="accent1"/>
+          </a:fillRef>
+          <a:effectRef idx="0">
+            <a:schemeClr val="accent1"/>
+          </a:effectRef>
+          <a:fontRef idx="minor">
+            <a:schemeClr val="lt1"/>
+          </a:fontRef>
+        </p:style>
+        <p:txBody>
+          <a:bodyPr rtlCol="0" anchor="ctr"/>
+          <a:lstStyle/>
+          <a:p>
+            <a:pPr algn="ctr"/>
+            <a:r>
+              <a:rPr kumimoji="1" lang="en-US" altLang="ja-JP" sz="900" dirty="0">
+                <a:solidFill>
+                  <a:schemeClr val="tx1"/>
+                </a:solidFill>
+                <a:latin typeface="UD デジタル 教科書体 NP-B" panose="02020700000000000000" pitchFamily="18" charset="-128"/>
+                <a:ea typeface="UD デジタル 教科書体 NP-B" panose="02020700000000000000" pitchFamily="18" charset="-128"/>
+              </a:rPr>
+              <a:t>NAME</a:t>
+            </a:r>
+            <a:endParaRPr kumimoji="1" lang="ja-JP" altLang="en-US" sz="900" dirty="0">
+              <a:solidFill>
+                <a:schemeClr val="tx1"/>
+              </a:solidFill>
+              <a:latin typeface="UD デジタル 教科書体 NP-B" panose="02020700000000000000" pitchFamily="18" charset="-128"/>
+              <a:ea typeface="UD デジタル 教科書体 NP-B" panose="02020700000000000000" pitchFamily="18" charset="-128"/>
+            </a:endParaRPr>
+          </a:p>
+        </p:txBody>
+      </p:sp>
+      <p:sp>
+        <p:nvSpPr>
+          <p:cNvPr id="106" name="正方形/長方形 105">
+            <a:extLst>
+              <a:ext uri="{FF2B5EF4-FFF2-40B4-BE49-F238E27FC236}">
+                <a16:creationId xmlns:a16="http://schemas.microsoft.com/office/drawing/2014/main" id="{53199239-D007-3473-26CE-2F776E2ADC3E}"/>
+              </a:ext>
+            </a:extLst>
+          </p:cNvPr>
+          <p:cNvSpPr/>
+          <p:nvPr/>
+        </p:nvSpPr>
+        <p:spPr>
+          <a:xfrm>
+            <a:off x="11241168" y="2951114"/>
+            <a:ext cx="671559" cy="144017"/>
+          </a:xfrm>
+          <a:prstGeom prst="rect">
+            <a:avLst/>
+          </a:prstGeom>
+          <a:noFill/>
+          <a:ln w="9525">
+            <a:solidFill>
+              <a:schemeClr val="tx1">
+                <a:lumMod val="50000"/>
+                <a:lumOff val="50000"/>
+              </a:schemeClr>
+            </a:solidFill>
+          </a:ln>
+        </p:spPr>
+        <p:style>
+          <a:lnRef idx="2">
+            <a:schemeClr val="accent1">
+              <a:shade val="15000"/>
+            </a:schemeClr>
+          </a:lnRef>
+          <a:fillRef idx="1">
+            <a:schemeClr val="accent1"/>
+          </a:fillRef>
+          <a:effectRef idx="0">
+            <a:schemeClr val="accent1"/>
+          </a:effectRef>
+          <a:fontRef idx="minor">
+            <a:schemeClr val="lt1"/>
+          </a:fontRef>
+        </p:style>
+        <p:txBody>
+          <a:bodyPr rtlCol="0" anchor="ctr"/>
+          <a:lstStyle/>
+          <a:p>
+            <a:pPr algn="ctr"/>
+            <a:r>
+              <a:rPr kumimoji="1" lang="en-US" altLang="ja-JP" sz="900" dirty="0">
+                <a:solidFill>
+                  <a:schemeClr val="tx1"/>
+                </a:solidFill>
+                <a:latin typeface="UD デジタル 教科書体 NP-B" panose="02020700000000000000" pitchFamily="18" charset="-128"/>
+                <a:ea typeface="UD デジタル 教科書体 NP-B" panose="02020700000000000000" pitchFamily="18" charset="-128"/>
+              </a:rPr>
+              <a:t>NAME</a:t>
+            </a:r>
+            <a:endParaRPr kumimoji="1" lang="ja-JP" altLang="en-US" sz="900" dirty="0">
+              <a:solidFill>
+                <a:schemeClr val="tx1"/>
+              </a:solidFill>
+              <a:latin typeface="UD デジタル 教科書体 NP-B" panose="02020700000000000000" pitchFamily="18" charset="-128"/>
+              <a:ea typeface="UD デジタル 教科書体 NP-B" panose="02020700000000000000" pitchFamily="18" charset="-128"/>
+            </a:endParaRPr>
+          </a:p>
+        </p:txBody>
+      </p:sp>
+      <p:sp>
+        <p:nvSpPr>
+          <p:cNvPr id="107" name="正方形/長方形 106">
+            <a:extLst>
+              <a:ext uri="{FF2B5EF4-FFF2-40B4-BE49-F238E27FC236}">
+                <a16:creationId xmlns:a16="http://schemas.microsoft.com/office/drawing/2014/main" id="{F7446400-3354-0851-E7D2-FB8A4B5F7278}"/>
+              </a:ext>
+            </a:extLst>
+          </p:cNvPr>
+          <p:cNvSpPr/>
+          <p:nvPr/>
+        </p:nvSpPr>
+        <p:spPr>
+          <a:xfrm>
+            <a:off x="11239641" y="2075399"/>
+            <a:ext cx="671559" cy="848776"/>
+          </a:xfrm>
+          <a:prstGeom prst="rect">
+            <a:avLst/>
+          </a:prstGeom>
+          <a:noFill/>
+          <a:ln w="9525">
+            <a:solidFill>
+              <a:schemeClr val="tx1">
+                <a:lumMod val="50000"/>
+                <a:lumOff val="50000"/>
+              </a:schemeClr>
+            </a:solidFill>
+          </a:ln>
+        </p:spPr>
+        <p:style>
+          <a:lnRef idx="2">
+            <a:schemeClr val="accent1">
+              <a:shade val="15000"/>
+            </a:schemeClr>
+          </a:lnRef>
+          <a:fillRef idx="1">
+            <a:schemeClr val="accent1"/>
+          </a:fillRef>
+          <a:effectRef idx="0">
+            <a:schemeClr val="accent1"/>
+          </a:effectRef>
+          <a:fontRef idx="minor">
+            <a:schemeClr val="lt1"/>
+          </a:fontRef>
+        </p:style>
+        <p:txBody>
+          <a:bodyPr rtlCol="0" anchor="ctr"/>
+          <a:lstStyle/>
+          <a:p>
+            <a:pPr algn="ctr"/>
+            <a:endParaRPr kumimoji="1" lang="ja-JP" altLang="en-US" sz="900" dirty="0">
+              <a:solidFill>
+                <a:schemeClr val="tx1"/>
+              </a:solidFill>
+              <a:latin typeface="UD デジタル 教科書体 NP-B" panose="02020700000000000000" pitchFamily="18" charset="-128"/>
+              <a:ea typeface="UD デジタル 教科書体 NP-B" panose="02020700000000000000" pitchFamily="18" charset="-128"/>
+            </a:endParaRPr>
+          </a:p>
+        </p:txBody>
+      </p:sp>
+    </p:spTree>
+    <p:extLst>
+      <p:ext uri="{BB962C8B-B14F-4D97-AF65-F5344CB8AC3E}">
+        <p14:creationId xmlns:p14="http://schemas.microsoft.com/office/powerpoint/2010/main" val="3935500735"/>
+      </p:ext>
+    </p:extLst>
+  </p:cSld>
+  <p:clrMapOvr>
+    <a:masterClrMapping/>
+  </p:clrMapOvr>
+</p:sld>
+</file>
+
 <file path=ppt/theme/theme1.xml><?xml version="1.0" encoding="utf-8"?>
 <a:theme xmlns:a="http://schemas.openxmlformats.org/drawingml/2006/main" name="Office テーマ">
   <a:themeElements>
@@ -9853,4 +15827,299 @@
     </a:ext>
   </a:extLst>
 </a:theme>
+</file>
+
+<file path=ppt/theme/theme2.xml><?xml version="1.0" encoding="utf-8"?>
+<a:theme xmlns:a="http://schemas.openxmlformats.org/drawingml/2006/main" name="Office テーマ">
+  <a:themeElements>
+    <a:clrScheme name="Office">
+      <a:dk1>
+        <a:sysClr val="windowText" lastClr="000000"/>
+      </a:dk1>
+      <a:lt1>
+        <a:sysClr val="window" lastClr="FFFFFF"/>
+      </a:lt1>
+      <a:dk2>
+        <a:srgbClr val="44546A"/>
+      </a:dk2>
+      <a:lt2>
+        <a:srgbClr val="E7E6E6"/>
+      </a:lt2>
+      <a:accent1>
+        <a:srgbClr val="4472C4"/>
+      </a:accent1>
+      <a:accent2>
+        <a:srgbClr val="ED7D31"/>
+      </a:accent2>
+      <a:accent3>
+        <a:srgbClr val="A5A5A5"/>
+      </a:accent3>
+      <a:accent4>
+        <a:srgbClr val="FFC000"/>
+      </a:accent4>
+      <a:accent5>
+        <a:srgbClr val="5B9BD5"/>
+      </a:accent5>
+      <a:accent6>
+        <a:srgbClr val="70AD47"/>
+      </a:accent6>
+      <a:hlink>
+        <a:srgbClr val="0563C1"/>
+      </a:hlink>
+      <a:folHlink>
+        <a:srgbClr val="954F72"/>
+      </a:folHlink>
+    </a:clrScheme>
+    <a:fontScheme name="Office">
+      <a:majorFont>
+        <a:latin typeface="游ゴシック Light" panose="020F0302020204030204"/>
+        <a:ea typeface=""/>
+        <a:cs typeface=""/>
+        <a:font script="Jpan" typeface="游ゴシック Light"/>
+        <a:font script="Hang" typeface="맑은 고딕"/>
+        <a:font script="Hans" typeface="等线 Light"/>
+        <a:font script="Hant" typeface="新細明體"/>
+        <a:font script="Arab" typeface="Times New Roman"/>
+        <a:font script="Hebr" typeface="Times New Roman"/>
+        <a:font script="Thai" typeface="Angsana New"/>
+        <a:font script="Ethi" typeface="Nyala"/>
+        <a:font script="Beng" typeface="Vrinda"/>
+        <a:font script="Gujr" typeface="Shruti"/>
+        <a:font script="Khmr" typeface="MoolBoran"/>
+        <a:font script="Knda" typeface="Tunga"/>
+        <a:font script="Guru" typeface="Raavi"/>
+        <a:font script="Cans" typeface="Euphemia"/>
+        <a:font script="Cher" typeface="Plantagenet Cherokee"/>
+        <a:font script="Yiii" typeface="Microsoft Yi Baiti"/>
+        <a:font script="Tibt" typeface="Microsoft Himalaya"/>
+        <a:font script="Thaa" typeface="MV Boli"/>
+        <a:font script="Deva" typeface="Mangal"/>
+        <a:font script="Telu" typeface="Gautami"/>
+        <a:font script="Taml" typeface="Latha"/>
+        <a:font script="Syrc" typeface="Estrangelo Edessa"/>
+        <a:font script="Orya" typeface="Kalinga"/>
+        <a:font script="Mlym" typeface="Kartika"/>
+        <a:font script="Laoo" typeface="DokChampa"/>
+        <a:font script="Sinh" typeface="Iskoola Pota"/>
+        <a:font script="Mong" typeface="Mongolian Baiti"/>
+        <a:font script="Viet" typeface="Times New Roman"/>
+        <a:font script="Uigh" typeface="Microsoft Uighur"/>
+        <a:font script="Geor" typeface="Sylfaen"/>
+        <a:font script="Armn" typeface="Arial"/>
+        <a:font script="Bugi" typeface="Leelawadee UI"/>
+        <a:font script="Bopo" typeface="Microsoft JhengHei"/>
+        <a:font script="Java" typeface="Javanese Text"/>
+        <a:font script="Lisu" typeface="Segoe UI"/>
+        <a:font script="Mymr" typeface="Myanmar Text"/>
+        <a:font script="Nkoo" typeface="Ebrima"/>
+        <a:font script="Olck" typeface="Nirmala UI"/>
+        <a:font script="Osma" typeface="Ebrima"/>
+        <a:font script="Phag" typeface="Phagspa"/>
+        <a:font script="Syrn" typeface="Estrangelo Edessa"/>
+        <a:font script="Syrj" typeface="Estrangelo Edessa"/>
+        <a:font script="Syre" typeface="Estrangelo Edessa"/>
+        <a:font script="Sora" typeface="Nirmala UI"/>
+        <a:font script="Tale" typeface="Microsoft Tai Le"/>
+        <a:font script="Talu" typeface="Microsoft New Tai Lue"/>
+        <a:font script="Tfng" typeface="Ebrima"/>
+      </a:majorFont>
+      <a:minorFont>
+        <a:latin typeface="游ゴシック" panose="020F0502020204030204"/>
+        <a:ea typeface=""/>
+        <a:cs typeface=""/>
+        <a:font script="Jpan" typeface="游ゴシック"/>
+        <a:font script="Hang" typeface="맑은 고딕"/>
+        <a:font script="Hans" typeface="等线"/>
+        <a:font script="Hant" typeface="新細明體"/>
+        <a:font script="Arab" typeface="Arial"/>
+        <a:font script="Hebr" typeface="Arial"/>
+        <a:font script="Thai" typeface="Cordia New"/>
+        <a:font script="Ethi" typeface="Nyala"/>
+        <a:font script="Beng" typeface="Vrinda"/>
+        <a:font script="Gujr" typeface="Shruti"/>
+        <a:font script="Khmr" typeface="DaunPenh"/>
+        <a:font script="Knda" typeface="Tunga"/>
+        <a:font script="Guru" typeface="Raavi"/>
+        <a:font script="Cans" typeface="Euphemia"/>
+        <a:font script="Cher" typeface="Plantagenet Cherokee"/>
+        <a:font script="Yiii" typeface="Microsoft Yi Baiti"/>
+        <a:font script="Tibt" typeface="Microsoft Himalaya"/>
+        <a:font script="Thaa" typeface="MV Boli"/>
+        <a:font script="Deva" typeface="Mangal"/>
+        <a:font script="Telu" typeface="Gautami"/>
+        <a:font script="Taml" typeface="Latha"/>
+        <a:font script="Syrc" typeface="Estrangelo Edessa"/>
+        <a:font script="Orya" typeface="Kalinga"/>
+        <a:font script="Mlym" typeface="Kartika"/>
+        <a:font script="Laoo" typeface="DokChampa"/>
+        <a:font script="Sinh" typeface="Iskoola Pota"/>
+        <a:font script="Mong" typeface="Mongolian Baiti"/>
+        <a:font script="Viet" typeface="Arial"/>
+        <a:font script="Uigh" typeface="Microsoft Uighur"/>
+        <a:font script="Geor" typeface="Sylfaen"/>
+        <a:font script="Armn" typeface="Arial"/>
+        <a:font script="Bugi" typeface="Leelawadee UI"/>
+        <a:font script="Bopo" typeface="Microsoft JhengHei"/>
+        <a:font script="Java" typeface="Javanese Text"/>
+        <a:font script="Lisu" typeface="Segoe UI"/>
+        <a:font script="Mymr" typeface="Myanmar Text"/>
+        <a:font script="Nkoo" typeface="Ebrima"/>
+        <a:font script="Olck" typeface="Nirmala UI"/>
+        <a:font script="Osma" typeface="Ebrima"/>
+        <a:font script="Phag" typeface="Phagspa"/>
+        <a:font script="Syrn" typeface="Estrangelo Edessa"/>
+        <a:font script="Syrj" typeface="Estrangelo Edessa"/>
+        <a:font script="Syre" typeface="Estrangelo Edessa"/>
+        <a:font script="Sora" typeface="Nirmala UI"/>
+        <a:font script="Tale" typeface="Microsoft Tai Le"/>
+        <a:font script="Talu" typeface="Microsoft New Tai Lue"/>
+        <a:font script="Tfng" typeface="Ebrima"/>
+      </a:minorFont>
+    </a:fontScheme>
+    <a:fmtScheme name="Office">
+      <a:fillStyleLst>
+        <a:solidFill>
+          <a:schemeClr val="phClr"/>
+        </a:solidFill>
+        <a:gradFill rotWithShape="1">
+          <a:gsLst>
+            <a:gs pos="0">
+              <a:schemeClr val="phClr">
+                <a:lumMod val="110000"/>
+                <a:satMod val="105000"/>
+                <a:tint val="67000"/>
+              </a:schemeClr>
+            </a:gs>
+            <a:gs pos="50000">
+              <a:schemeClr val="phClr">
+                <a:lumMod val="105000"/>
+                <a:satMod val="103000"/>
+                <a:tint val="73000"/>
+              </a:schemeClr>
+            </a:gs>
+            <a:gs pos="100000">
+              <a:schemeClr val="phClr">
+                <a:lumMod val="105000"/>
+                <a:satMod val="109000"/>
+                <a:tint val="81000"/>
+              </a:schemeClr>
+            </a:gs>
+          </a:gsLst>
+          <a:lin ang="5400000" scaled="0"/>
+        </a:gradFill>
+        <a:gradFill rotWithShape="1">
+          <a:gsLst>
+            <a:gs pos="0">
+              <a:schemeClr val="phClr">
+                <a:satMod val="103000"/>
+                <a:lumMod val="102000"/>
+                <a:tint val="94000"/>
+              </a:schemeClr>
+            </a:gs>
+            <a:gs pos="50000">
+              <a:schemeClr val="phClr">
+                <a:satMod val="110000"/>
+                <a:lumMod val="100000"/>
+                <a:shade val="100000"/>
+              </a:schemeClr>
+            </a:gs>
+            <a:gs pos="100000">
+              <a:schemeClr val="phClr">
+                <a:lumMod val="99000"/>
+                <a:satMod val="120000"/>
+                <a:shade val="78000"/>
+              </a:schemeClr>
+            </a:gs>
+          </a:gsLst>
+          <a:lin ang="5400000" scaled="0"/>
+        </a:gradFill>
+      </a:fillStyleLst>
+      <a:lnStyleLst>
+        <a:ln w="6350" cap="flat" cmpd="sng" algn="ctr">
+          <a:solidFill>
+            <a:schemeClr val="phClr"/>
+          </a:solidFill>
+          <a:prstDash val="solid"/>
+          <a:miter lim="800000"/>
+        </a:ln>
+        <a:ln w="12700" cap="flat" cmpd="sng" algn="ctr">
+          <a:solidFill>
+            <a:schemeClr val="phClr"/>
+          </a:solidFill>
+          <a:prstDash val="solid"/>
+          <a:miter lim="800000"/>
+        </a:ln>
+        <a:ln w="19050" cap="flat" cmpd="sng" algn="ctr">
+          <a:solidFill>
+            <a:schemeClr val="phClr"/>
+          </a:solidFill>
+          <a:prstDash val="solid"/>
+          <a:miter lim="800000"/>
+        </a:ln>
+      </a:lnStyleLst>
+      <a:effectStyleLst>
+        <a:effectStyle>
+          <a:effectLst/>
+        </a:effectStyle>
+        <a:effectStyle>
+          <a:effectLst/>
+        </a:effectStyle>
+        <a:effectStyle>
+          <a:effectLst>
+            <a:outerShdw blurRad="57150" dist="19050" dir="5400000" algn="ctr" rotWithShape="0">
+              <a:srgbClr val="000000">
+                <a:alpha val="63000"/>
+              </a:srgbClr>
+            </a:outerShdw>
+          </a:effectLst>
+        </a:effectStyle>
+      </a:effectStyleLst>
+      <a:bgFillStyleLst>
+        <a:solidFill>
+          <a:schemeClr val="phClr"/>
+        </a:solidFill>
+        <a:solidFill>
+          <a:schemeClr val="phClr">
+            <a:tint val="95000"/>
+            <a:satMod val="170000"/>
+          </a:schemeClr>
+        </a:solidFill>
+        <a:gradFill rotWithShape="1">
+          <a:gsLst>
+            <a:gs pos="0">
+              <a:schemeClr val="phClr">
+                <a:tint val="93000"/>
+                <a:satMod val="150000"/>
+                <a:shade val="98000"/>
+                <a:lumMod val="102000"/>
+              </a:schemeClr>
+            </a:gs>
+            <a:gs pos="50000">
+              <a:schemeClr val="phClr">
+                <a:tint val="98000"/>
+                <a:satMod val="130000"/>
+                <a:shade val="90000"/>
+                <a:lumMod val="103000"/>
+              </a:schemeClr>
+            </a:gs>
+            <a:gs pos="100000">
+              <a:schemeClr val="phClr">
+                <a:shade val="63000"/>
+                <a:satMod val="120000"/>
+              </a:schemeClr>
+            </a:gs>
+          </a:gsLst>
+          <a:lin ang="5400000" scaled="0"/>
+        </a:gradFill>
+      </a:bgFillStyleLst>
+    </a:fmtScheme>
+  </a:themeElements>
+  <a:objectDefaults/>
+  <a:extraClrSchemeLst/>
+  <a:extLst>
+    <a:ext uri="{05A4C25C-085E-4340-85A3-A5531E510DB2}">
+      <thm15:themeFamily xmlns:thm15="http://schemas.microsoft.com/office/thememl/2012/main" name="Office Theme" id="{62F939B6-93AF-4DB8-9C6B-D6C7DFDC589F}" vid="{4A3C46E8-61CC-4603-A589-7422A47A8E4A}"/>
+    </a:ext>
+  </a:extLst>
+</a:theme>
 </file>